--- a/Axveer-Moving-Automation.pptx
+++ b/Axveer-Moving-Automation.pptx
@@ -1569,7 +1569,7 @@
     <p:bg>
       <p:bgPr>
         <a:solidFill>
-          <a:srgbClr val="0A1628"/>
+          <a:srgbClr val="000000"/>
         </a:solidFill>
       </p:bgPr>
     </p:bg>
@@ -1602,7 +1602,7 @@
             <a:avLst/>
           </a:prstGeom>
           <a:solidFill>
-            <a:srgbClr val="00C9A7"/>
+            <a:srgbClr val="22C55E"/>
           </a:solidFill>
           <a:ln/>
         </p:spPr>
@@ -1634,11 +1634,11 @@
             <a:r>
               <a:rPr lang="en-US" sz="1800" b="1" spc="800" kern="0" dirty="0">
                 <a:solidFill>
-                  <a:srgbClr val="00C9A7"/>
-                </a:solidFill>
-                <a:latin typeface="Trebuchet MS" pitchFamily="34" charset="0"/>
-                <a:ea typeface="Trebuchet MS" pitchFamily="34" charset="-122"/>
-                <a:cs typeface="Trebuchet MS" pitchFamily="34" charset="-120"/>
+                  <a:srgbClr val="22C55E"/>
+                </a:solidFill>
+                <a:latin typeface="Inter" pitchFamily="34" charset="0"/>
+                <a:ea typeface="Inter" pitchFamily="34" charset="-122"/>
+                <a:cs typeface="Inter" pitchFamily="34" charset="-120"/>
               </a:rPr>
               <a:t>AXVEER</a:t>
             </a:r>
@@ -1678,9 +1678,9 @@
                 <a:solidFill>
                   <a:srgbClr val="FFFFFF"/>
                 </a:solidFill>
-                <a:latin typeface="Trebuchet MS" pitchFamily="34" charset="0"/>
-                <a:ea typeface="Trebuchet MS" pitchFamily="34" charset="-122"/>
-                <a:cs typeface="Trebuchet MS" pitchFamily="34" charset="-120"/>
+                <a:latin typeface="Inter" pitchFamily="34" charset="0"/>
+                <a:ea typeface="Inter" pitchFamily="34" charset="-122"/>
+                <a:cs typeface="Inter" pitchFamily="34" charset="-120"/>
               </a:rPr>
               <a:t>Automate Your Moving</a:t>
             </a:r>
@@ -1698,9 +1698,9 @@
                 <a:solidFill>
                   <a:srgbClr val="FFFFFF"/>
                 </a:solidFill>
-                <a:latin typeface="Trebuchet MS" pitchFamily="34" charset="0"/>
-                <a:ea typeface="Trebuchet MS" pitchFamily="34" charset="-122"/>
-                <a:cs typeface="Trebuchet MS" pitchFamily="34" charset="-120"/>
+                <a:latin typeface="Inter" pitchFamily="34" charset="0"/>
+                <a:ea typeface="Inter" pitchFamily="34" charset="-122"/>
+                <a:cs typeface="Inter" pitchFamily="34" charset="-120"/>
               </a:rPr>
               <a:t>Business. Scale Without</a:t>
             </a:r>
@@ -1718,9 +1718,9 @@
                 <a:solidFill>
                   <a:srgbClr val="FFFFFF"/>
                 </a:solidFill>
-                <a:latin typeface="Trebuchet MS" pitchFamily="34" charset="0"/>
-                <a:ea typeface="Trebuchet MS" pitchFamily="34" charset="-122"/>
-                <a:cs typeface="Trebuchet MS" pitchFamily="34" charset="-120"/>
+                <a:latin typeface="Inter" pitchFamily="34" charset="0"/>
+                <a:ea typeface="Inter" pitchFamily="34" charset="-122"/>
+                <a:cs typeface="Inter" pitchFamily="34" charset="-120"/>
               </a:rPr>
               <a:t>Adding Headcount.</a:t>
             </a:r>
@@ -1758,13 +1758,13 @@
             <a:r>
               <a:rPr lang="en-US" sz="1600" dirty="0">
                 <a:solidFill>
-                  <a:srgbClr val="8896AB"/>
-                </a:solidFill>
-                <a:latin typeface="Calibri" pitchFamily="34" charset="0"/>
-                <a:ea typeface="Calibri" pitchFamily="34" charset="-122"/>
-                <a:cs typeface="Calibri" pitchFamily="34" charset="-120"/>
-              </a:rPr>
-              <a:t>Full IT support and AI-powered automation</a:t>
+                  <a:srgbClr val="6B7280"/>
+                </a:solidFill>
+                <a:latin typeface="Inter" pitchFamily="34" charset="0"/>
+                <a:ea typeface="Inter" pitchFamily="34" charset="-122"/>
+                <a:cs typeface="Inter" pitchFamily="34" charset="-120"/>
+              </a:rPr>
+              <a:t>AI-powered automation and full IT support</a:t>
             </a:r>
             <a:endParaRPr lang="en-US" sz="1600" dirty="0"/>
           </a:p>
@@ -1778,13 +1778,13 @@
             <a:r>
               <a:rPr lang="en-US" sz="1600" dirty="0">
                 <a:solidFill>
-                  <a:srgbClr val="8896AB"/>
-                </a:solidFill>
-                <a:latin typeface="Calibri" pitchFamily="34" charset="0"/>
-                <a:ea typeface="Calibri" pitchFamily="34" charset="-122"/>
-                <a:cs typeface="Calibri" pitchFamily="34" charset="-120"/>
-              </a:rPr>
-              <a:t>for US moving companies</a:t>
+                  <a:srgbClr val="6B7280"/>
+                </a:solidFill>
+                <a:latin typeface="Inter" pitchFamily="34" charset="0"/>
+                <a:ea typeface="Inter" pitchFamily="34" charset="-122"/>
+                <a:cs typeface="Inter" pitchFamily="34" charset="-120"/>
+              </a:rPr>
+              <a:t>built for US moving companies</a:t>
             </a:r>
             <a:endParaRPr lang="en-US" sz="1600" dirty="0"/>
           </a:p>
@@ -1805,7 +1805,7 @@
             <a:avLst/>
           </a:prstGeom>
           <a:solidFill>
-            <a:srgbClr val="00C9A7"/>
+            <a:srgbClr val="22C55E"/>
           </a:solidFill>
           <a:ln/>
         </p:spPr>
@@ -1837,11 +1837,11 @@
             <a:r>
               <a:rPr lang="en-US" sz="1100" dirty="0">
                 <a:solidFill>
-                  <a:srgbClr val="8896AB"/>
-                </a:solidFill>
-                <a:latin typeface="Calibri" pitchFamily="34" charset="0"/>
-                <a:ea typeface="Calibri" pitchFamily="34" charset="-122"/>
-                <a:cs typeface="Calibri" pitchFamily="34" charset="-120"/>
+                  <a:srgbClr val="6B7280"/>
+                </a:solidFill>
+                <a:latin typeface="Inter" pitchFamily="34" charset="0"/>
+                <a:ea typeface="Inter" pitchFamily="34" charset="-122"/>
+                <a:cs typeface="Inter" pitchFamily="34" charset="-120"/>
               </a:rPr>
               <a:t>axveer.com</a:t>
             </a:r>
@@ -1863,7 +1863,7 @@
     <p:bg>
       <p:bgPr>
         <a:solidFill>
-          <a:srgbClr val="F4F6FA"/>
+          <a:srgbClr val="F5F5F5"/>
         </a:solidFill>
       </p:bgPr>
     </p:bg>
@@ -1908,11 +1908,11 @@
             <a:r>
               <a:rPr lang="en-US" sz="1200" b="1" spc="400" kern="0" dirty="0">
                 <a:solidFill>
-                  <a:srgbClr val="00C9A7"/>
-                </a:solidFill>
-                <a:latin typeface="Trebuchet MS" pitchFamily="34" charset="0"/>
-                <a:ea typeface="Trebuchet MS" pitchFamily="34" charset="-122"/>
-                <a:cs typeface="Trebuchet MS" pitchFamily="34" charset="-120"/>
+                  <a:srgbClr val="22C55E"/>
+                </a:solidFill>
+                <a:latin typeface="Inter" pitchFamily="34" charset="0"/>
+                <a:ea typeface="Inter" pitchFamily="34" charset="-122"/>
+                <a:cs typeface="Inter" pitchFamily="34" charset="-120"/>
               </a:rPr>
               <a:t>THE PROBLEM</a:t>
             </a:r>
@@ -1947,11 +1947,11 @@
             <a:r>
               <a:rPr lang="en-US" sz="3200" b="1" dirty="0">
                 <a:solidFill>
-                  <a:srgbClr val="1E293B"/>
-                </a:solidFill>
-                <a:latin typeface="Trebuchet MS" pitchFamily="34" charset="0"/>
-                <a:ea typeface="Trebuchet MS" pitchFamily="34" charset="-122"/>
-                <a:cs typeface="Trebuchet MS" pitchFamily="34" charset="-120"/>
+                  <a:srgbClr val="000000"/>
+                </a:solidFill>
+                <a:latin typeface="Inter" pitchFamily="34" charset="0"/>
+                <a:ea typeface="Inter" pitchFamily="34" charset="-122"/>
+                <a:cs typeface="Inter" pitchFamily="34" charset="-120"/>
               </a:rPr>
               <a:t>Your Sales Team Can't Keep Up</a:t>
             </a:r>
@@ -2001,7 +2001,7 @@
             <a:avLst/>
           </a:prstGeom>
           <a:solidFill>
-            <a:srgbClr val="00C9A7"/>
+            <a:srgbClr val="22C55E"/>
           </a:solidFill>
           <a:ln/>
         </p:spPr>
@@ -2057,11 +2057,11 @@
             <a:r>
               <a:rPr lang="en-US" sz="1300" b="1" dirty="0">
                 <a:solidFill>
-                  <a:srgbClr val="1E293B"/>
-                </a:solidFill>
-                <a:latin typeface="Trebuchet MS" pitchFamily="34" charset="0"/>
-                <a:ea typeface="Trebuchet MS" pitchFamily="34" charset="-122"/>
-                <a:cs typeface="Trebuchet MS" pitchFamily="34" charset="-120"/>
+                  <a:srgbClr val="000000"/>
+                </a:solidFill>
+                <a:latin typeface="Inter" pitchFamily="34" charset="0"/>
+                <a:ea typeface="Inter" pitchFamily="34" charset="-122"/>
+                <a:cs typeface="Inter" pitchFamily="34" charset="-120"/>
               </a:rPr>
               <a:t>Missed Calls = Lost Revenue</a:t>
             </a:r>
@@ -2096,11 +2096,11 @@
             <a:r>
               <a:rPr lang="en-US" sz="1100" dirty="0">
                 <a:solidFill>
-                  <a:srgbClr val="8896AB"/>
-                </a:solidFill>
-                <a:latin typeface="Calibri" pitchFamily="34" charset="0"/>
-                <a:ea typeface="Calibri" pitchFamily="34" charset="-122"/>
-                <a:cs typeface="Calibri" pitchFamily="34" charset="-120"/>
+                  <a:srgbClr val="6B7280"/>
+                </a:solidFill>
+                <a:latin typeface="Inter" pitchFamily="34" charset="0"/>
+                <a:ea typeface="Inter" pitchFamily="34" charset="-122"/>
+                <a:cs typeface="Inter" pitchFamily="34" charset="-120"/>
               </a:rPr>
               <a:t>Every unanswered call is a customer who books with your competitor.</a:t>
             </a:r>
@@ -2150,7 +2150,7 @@
             <a:avLst/>
           </a:prstGeom>
           <a:solidFill>
-            <a:srgbClr val="00C9A7"/>
+            <a:srgbClr val="22C55E"/>
           </a:solidFill>
           <a:ln/>
         </p:spPr>
@@ -2206,11 +2206,11 @@
             <a:r>
               <a:rPr lang="en-US" sz="1300" b="1" dirty="0">
                 <a:solidFill>
-                  <a:srgbClr val="1E293B"/>
-                </a:solidFill>
-                <a:latin typeface="Trebuchet MS" pitchFamily="34" charset="0"/>
-                <a:ea typeface="Trebuchet MS" pitchFamily="34" charset="-122"/>
-                <a:cs typeface="Trebuchet MS" pitchFamily="34" charset="-120"/>
+                  <a:srgbClr val="000000"/>
+                </a:solidFill>
+                <a:latin typeface="Inter" pitchFamily="34" charset="0"/>
+                <a:ea typeface="Inter" pitchFamily="34" charset="-122"/>
+                <a:cs typeface="Inter" pitchFamily="34" charset="-120"/>
               </a:rPr>
               <a:t>High Staff Turnover</a:t>
             </a:r>
@@ -2245,13 +2245,13 @@
             <a:r>
               <a:rPr lang="en-US" sz="1100" dirty="0">
                 <a:solidFill>
-                  <a:srgbClr val="8896AB"/>
-                </a:solidFill>
-                <a:latin typeface="Calibri" pitchFamily="34" charset="0"/>
-                <a:ea typeface="Calibri" pitchFamily="34" charset="-122"/>
-                <a:cs typeface="Calibri" pitchFamily="34" charset="-120"/>
-              </a:rPr>
-              <a:t>Training new sales reps is expensive. They leave. You start over.</a:t>
+                  <a:srgbClr val="6B7280"/>
+                </a:solidFill>
+                <a:latin typeface="Inter" pitchFamily="34" charset="0"/>
+                <a:ea typeface="Inter" pitchFamily="34" charset="-122"/>
+                <a:cs typeface="Inter" pitchFamily="34" charset="-120"/>
+              </a:rPr>
+              <a:t>Training new sales reps costs thousands. They leave, and you start from scratch.</a:t>
             </a:r>
             <a:endParaRPr lang="en-US" sz="1100" dirty="0"/>
           </a:p>
@@ -2299,7 +2299,7 @@
             <a:avLst/>
           </a:prstGeom>
           <a:solidFill>
-            <a:srgbClr val="00C9A7"/>
+            <a:srgbClr val="22C55E"/>
           </a:solidFill>
           <a:ln/>
         </p:spPr>
@@ -2355,11 +2355,11 @@
             <a:r>
               <a:rPr lang="en-US" sz="1300" b="1" dirty="0">
                 <a:solidFill>
-                  <a:srgbClr val="1E293B"/>
-                </a:solidFill>
-                <a:latin typeface="Trebuchet MS" pitchFamily="34" charset="0"/>
-                <a:ea typeface="Trebuchet MS" pitchFamily="34" charset="-122"/>
-                <a:cs typeface="Trebuchet MS" pitchFamily="34" charset="-120"/>
+                  <a:srgbClr val="000000"/>
+                </a:solidFill>
+                <a:latin typeface="Inter" pitchFamily="34" charset="0"/>
+                <a:ea typeface="Inter" pitchFamily="34" charset="-122"/>
+                <a:cs typeface="Inter" pitchFamily="34" charset="-120"/>
               </a:rPr>
               <a:t>Inconsistent Quoting</a:t>
             </a:r>
@@ -2394,13 +2394,13 @@
             <a:r>
               <a:rPr lang="en-US" sz="1100" dirty="0">
                 <a:solidFill>
-                  <a:srgbClr val="8896AB"/>
-                </a:solidFill>
-                <a:latin typeface="Calibri" pitchFamily="34" charset="0"/>
-                <a:ea typeface="Calibri" pitchFamily="34" charset="-122"/>
-                <a:cs typeface="Calibri" pitchFamily="34" charset="-120"/>
-              </a:rPr>
-              <a:t>Different reps give different prices. Customers lose trust.</a:t>
+                  <a:srgbClr val="6B7280"/>
+                </a:solidFill>
+                <a:latin typeface="Inter" pitchFamily="34" charset="0"/>
+                <a:ea typeface="Inter" pitchFamily="34" charset="-122"/>
+                <a:cs typeface="Inter" pitchFamily="34" charset="-120"/>
+              </a:rPr>
+              <a:t>Different reps give different prices. Customers lose trust and shop around.</a:t>
             </a:r>
             <a:endParaRPr lang="en-US" sz="1100" dirty="0"/>
           </a:p>
@@ -2448,7 +2448,7 @@
             <a:avLst/>
           </a:prstGeom>
           <a:solidFill>
-            <a:srgbClr val="00C9A7"/>
+            <a:srgbClr val="22C55E"/>
           </a:solidFill>
           <a:ln/>
         </p:spPr>
@@ -2504,13 +2504,13 @@
             <a:r>
               <a:rPr lang="en-US" sz="1300" b="1" dirty="0">
                 <a:solidFill>
-                  <a:srgbClr val="1E293B"/>
-                </a:solidFill>
-                <a:latin typeface="Trebuchet MS" pitchFamily="34" charset="0"/>
-                <a:ea typeface="Trebuchet MS" pitchFamily="34" charset="-122"/>
-                <a:cs typeface="Trebuchet MS" pitchFamily="34" charset="-120"/>
-              </a:rPr>
-              <a:t>No Scalability</a:t>
+                  <a:srgbClr val="000000"/>
+                </a:solidFill>
+                <a:latin typeface="Inter" pitchFamily="34" charset="0"/>
+                <a:ea typeface="Inter" pitchFamily="34" charset="-122"/>
+                <a:cs typeface="Inter" pitchFamily="34" charset="-120"/>
+              </a:rPr>
+              <a:t>Can't Scale Affordably</a:t>
             </a:r>
             <a:endParaRPr lang="en-US" sz="1300" dirty="0"/>
           </a:p>
@@ -2543,13 +2543,13 @@
             <a:r>
               <a:rPr lang="en-US" sz="1100" dirty="0">
                 <a:solidFill>
-                  <a:srgbClr val="8896AB"/>
-                </a:solidFill>
-                <a:latin typeface="Calibri" pitchFamily="34" charset="0"/>
-                <a:ea typeface="Calibri" pitchFamily="34" charset="-122"/>
-                <a:cs typeface="Calibri" pitchFamily="34" charset="-120"/>
-              </a:rPr>
-              <a:t>More trucks means more calls means more people. The math never works.</a:t>
+                  <a:srgbClr val="6B7280"/>
+                </a:solidFill>
+                <a:latin typeface="Inter" pitchFamily="34" charset="0"/>
+                <a:ea typeface="Inter" pitchFamily="34" charset="-122"/>
+                <a:cs typeface="Inter" pitchFamily="34" charset="-120"/>
+              </a:rPr>
+              <a:t>More trucks means more calls means more hires. The math never works in your favor.</a:t>
             </a:r>
             <a:endParaRPr lang="en-US" sz="1100" dirty="0"/>
           </a:p>
@@ -2569,7 +2569,7 @@
     <p:bg>
       <p:bgPr>
         <a:solidFill>
-          <a:srgbClr val="0A1628"/>
+          <a:srgbClr val="000000"/>
         </a:solidFill>
       </p:bgPr>
     </p:bg>
@@ -2614,11 +2614,11 @@
             <a:r>
               <a:rPr lang="en-US" sz="1200" b="1" spc="400" kern="0" dirty="0">
                 <a:solidFill>
-                  <a:srgbClr val="00C9A7"/>
-                </a:solidFill>
-                <a:latin typeface="Trebuchet MS" pitchFamily="34" charset="0"/>
-                <a:ea typeface="Trebuchet MS" pitchFamily="34" charset="-122"/>
-                <a:cs typeface="Trebuchet MS" pitchFamily="34" charset="-120"/>
+                  <a:srgbClr val="22C55E"/>
+                </a:solidFill>
+                <a:latin typeface="Inter" pitchFamily="34" charset="0"/>
+                <a:ea typeface="Inter" pitchFamily="34" charset="-122"/>
+                <a:cs typeface="Inter" pitchFamily="34" charset="-120"/>
               </a:rPr>
               <a:t>PHASE 1</a:t>
             </a:r>
@@ -2635,7 +2635,7 @@
         <p:spPr>
           <a:xfrm>
             <a:off x="731520" y="822960"/>
-            <a:ext cx="7315200" cy="640080"/>
+            <a:ext cx="5029200" cy="640080"/>
           </a:xfrm>
           <a:prstGeom prst="rect">
             <a:avLst/>
@@ -2655,11 +2655,11 @@
                 <a:solidFill>
                   <a:srgbClr val="FFFFFF"/>
                 </a:solidFill>
-                <a:latin typeface="Trebuchet MS" pitchFamily="34" charset="0"/>
-                <a:ea typeface="Trebuchet MS" pitchFamily="34" charset="-122"/>
-                <a:cs typeface="Trebuchet MS" pitchFamily="34" charset="-120"/>
-              </a:rPr>
-              <a:t>AI-Powered Moving Quote Calculator</a:t>
+                <a:latin typeface="Inter" pitchFamily="34" charset="0"/>
+                <a:ea typeface="Inter" pitchFamily="34" charset="-122"/>
+                <a:cs typeface="Inter" pitchFamily="34" charset="-120"/>
+              </a:rPr>
+              <a:t>Smart Moving Quote Form</a:t>
             </a:r>
             <a:endParaRPr lang="en-US" sz="3000" dirty="0"/>
           </a:p>
@@ -2674,7 +2674,7 @@
         <p:spPr>
           <a:xfrm>
             <a:off x="731520" y="1554480"/>
-            <a:ext cx="7315200" cy="731520"/>
+            <a:ext cx="4572000" cy="731520"/>
           </a:xfrm>
           <a:prstGeom prst="rect">
             <a:avLst/>
@@ -2693,36 +2693,288 @@
               <a:buNone/>
             </a:pPr>
             <a:r>
-              <a:rPr lang="en-US" sz="1300" dirty="0">
-                <a:solidFill>
-                  <a:srgbClr val="8896AB"/>
-                </a:solidFill>
-                <a:latin typeface="Calibri" pitchFamily="34" charset="0"/>
-                <a:ea typeface="Calibri" pitchFamily="34" charset="-122"/>
-                <a:cs typeface="Calibri" pitchFamily="34" charset="-120"/>
-              </a:rPr>
-              <a:t>Replace manual quoting with an intelligent chatbot that handles customer inquiries 24/7, calculates accurate quotes instantly, and books jobs — all without human intervention.</a:t>
-            </a:r>
-            <a:endParaRPr lang="en-US" sz="1300" dirty="0"/>
-          </a:p>
-        </p:txBody>
-      </p:sp>
-      <p:sp>
-        <p:nvSpPr>
-          <p:cNvPr id="5" name="Shape 3"/>
-          <p:cNvSpPr/>
-          <p:nvPr/>
-        </p:nvSpPr>
-        <p:spPr>
-          <a:xfrm>
-            <a:off x="731520" y="2651760"/>
-            <a:ext cx="1828800" cy="2011680"/>
+              <a:rPr lang="en-US" sz="1200" dirty="0">
+                <a:solidFill>
+                  <a:srgbClr val="6B7280"/>
+                </a:solidFill>
+                <a:latin typeface="Inter" pitchFamily="34" charset="0"/>
+                <a:ea typeface="Inter" pitchFamily="34" charset="-122"/>
+                <a:cs typeface="Inter" pitchFamily="34" charset="-120"/>
+              </a:rPr>
+              <a:t>An intelligent quote calculator that lives on your website. Customers get accurate pricing in seconds — no phone call needed, no staff required.</a:t>
+            </a:r>
+            <a:endParaRPr lang="en-US" sz="1200" dirty="0"/>
+          </a:p>
+        </p:txBody>
+      </p:sp>
+      <p:pic>
+        <p:nvPicPr>
+          <p:cNvPr id="5" name="Image 0" descr="preencoded.png">    </p:cNvPr>
+          <p:cNvPicPr>
+            <a:picLocks noChangeAspect="1"/>
+          </p:cNvPicPr>
+          <p:nvPr/>
+        </p:nvPicPr>
+        <p:blipFill>
+          <a:blip r:embed="rId1"/>
+          <a:stretch>
+            <a:fillRect/>
+          </a:stretch>
+        </p:blipFill>
+        <p:spPr>
+          <a:xfrm>
+            <a:off x="731520" y="2514600"/>
+            <a:ext cx="274320" cy="274320"/>
+          </a:xfrm>
+          <a:prstGeom prst="rect">
+            <a:avLst/>
+          </a:prstGeom>
+        </p:spPr>
+      </p:pic>
+      <p:sp>
+        <p:nvSpPr>
+          <p:cNvPr id="6" name="Text 3"/>
+          <p:cNvSpPr/>
+          <p:nvPr/>
+        </p:nvSpPr>
+        <p:spPr>
+          <a:xfrm>
+            <a:off x="1143000" y="2468880"/>
+            <a:ext cx="4114800" cy="411480"/>
+          </a:xfrm>
+          <a:prstGeom prst="rect">
+            <a:avLst/>
+          </a:prstGeom>
+          <a:noFill/>
+          <a:ln/>
+        </p:spPr>
+        <p:txBody>
+          <a:bodyPr wrap="square" lIns="0" tIns="0" rIns="0" bIns="0" rtlCol="0" anchor="ctr"/>
+          <a:lstStyle/>
+          <a:p>
+            <a:pPr indent="0" marL="0">
+              <a:buNone/>
+            </a:pPr>
+            <a:r>
+              <a:rPr lang="en-US" sz="1100" dirty="0">
+                <a:solidFill>
+                  <a:srgbClr val="6B7280"/>
+                </a:solidFill>
+                <a:latin typeface="Inter" pitchFamily="34" charset="0"/>
+                <a:ea typeface="Inter" pitchFamily="34" charset="-122"/>
+                <a:cs typeface="Inter" pitchFamily="34" charset="-120"/>
+              </a:rPr>
+              <a:t>Instant price based on distance, volume, stairs, and extras</a:t>
+            </a:r>
+            <a:endParaRPr lang="en-US" sz="1100" dirty="0"/>
+          </a:p>
+        </p:txBody>
+      </p:sp>
+      <p:pic>
+        <p:nvPicPr>
+          <p:cNvPr id="7" name="Image 1" descr="preencoded.png">    </p:cNvPr>
+          <p:cNvPicPr>
+            <a:picLocks noChangeAspect="1"/>
+          </p:cNvPicPr>
+          <p:nvPr/>
+        </p:nvPicPr>
+        <p:blipFill>
+          <a:blip r:embed="rId2"/>
+          <a:stretch>
+            <a:fillRect/>
+          </a:stretch>
+        </p:blipFill>
+        <p:spPr>
+          <a:xfrm>
+            <a:off x="731520" y="3063240"/>
+            <a:ext cx="274320" cy="274320"/>
+          </a:xfrm>
+          <a:prstGeom prst="rect">
+            <a:avLst/>
+          </a:prstGeom>
+        </p:spPr>
+      </p:pic>
+      <p:sp>
+        <p:nvSpPr>
+          <p:cNvPr id="8" name="Text 4"/>
+          <p:cNvSpPr/>
+          <p:nvPr/>
+        </p:nvSpPr>
+        <p:spPr>
+          <a:xfrm>
+            <a:off x="1143000" y="3017520"/>
+            <a:ext cx="4114800" cy="411480"/>
+          </a:xfrm>
+          <a:prstGeom prst="rect">
+            <a:avLst/>
+          </a:prstGeom>
+          <a:noFill/>
+          <a:ln/>
+        </p:spPr>
+        <p:txBody>
+          <a:bodyPr wrap="square" lIns="0" tIns="0" rIns="0" bIns="0" rtlCol="0" anchor="ctr"/>
+          <a:lstStyle/>
+          <a:p>
+            <a:pPr indent="0" marL="0">
+              <a:buNone/>
+            </a:pPr>
+            <a:r>
+              <a:rPr lang="en-US" sz="1100" dirty="0">
+                <a:solidFill>
+                  <a:srgbClr val="6B7280"/>
+                </a:solidFill>
+                <a:latin typeface="Inter" pitchFamily="34" charset="0"/>
+                <a:ea typeface="Inter" pitchFamily="34" charset="-122"/>
+                <a:cs typeface="Inter" pitchFamily="34" charset="-120"/>
+              </a:rPr>
+              <a:t>Available 24/7 — captures leads while your office is closed</a:t>
+            </a:r>
+            <a:endParaRPr lang="en-US" sz="1100" dirty="0"/>
+          </a:p>
+        </p:txBody>
+      </p:sp>
+      <p:pic>
+        <p:nvPicPr>
+          <p:cNvPr id="9" name="Image 2" descr="preencoded.png">    </p:cNvPr>
+          <p:cNvPicPr>
+            <a:picLocks noChangeAspect="1"/>
+          </p:cNvPicPr>
+          <p:nvPr/>
+        </p:nvPicPr>
+        <p:blipFill>
+          <a:blip r:embed="rId3"/>
+          <a:stretch>
+            <a:fillRect/>
+          </a:stretch>
+        </p:blipFill>
+        <p:spPr>
+          <a:xfrm>
+            <a:off x="731520" y="3611880"/>
+            <a:ext cx="274320" cy="274320"/>
+          </a:xfrm>
+          <a:prstGeom prst="rect">
+            <a:avLst/>
+          </a:prstGeom>
+        </p:spPr>
+      </p:pic>
+      <p:sp>
+        <p:nvSpPr>
+          <p:cNvPr id="10" name="Text 5"/>
+          <p:cNvSpPr/>
+          <p:nvPr/>
+        </p:nvSpPr>
+        <p:spPr>
+          <a:xfrm>
+            <a:off x="1143000" y="3566160"/>
+            <a:ext cx="4114800" cy="411480"/>
+          </a:xfrm>
+          <a:prstGeom prst="rect">
+            <a:avLst/>
+          </a:prstGeom>
+          <a:noFill/>
+          <a:ln/>
+        </p:spPr>
+        <p:txBody>
+          <a:bodyPr wrap="square" lIns="0" tIns="0" rIns="0" bIns="0" rtlCol="0" anchor="ctr"/>
+          <a:lstStyle/>
+          <a:p>
+            <a:pPr indent="0" marL="0">
+              <a:buNone/>
+            </a:pPr>
+            <a:r>
+              <a:rPr lang="en-US" sz="1100" dirty="0">
+                <a:solidFill>
+                  <a:srgbClr val="6B7280"/>
+                </a:solidFill>
+                <a:latin typeface="Inter" pitchFamily="34" charset="0"/>
+                <a:ea typeface="Inter" pitchFamily="34" charset="-122"/>
+                <a:cs typeface="Inter" pitchFamily="34" charset="-120"/>
+              </a:rPr>
+              <a:t>Consistent pricing every time, no human error</a:t>
+            </a:r>
+            <a:endParaRPr lang="en-US" sz="1100" dirty="0"/>
+          </a:p>
+        </p:txBody>
+      </p:sp>
+      <p:pic>
+        <p:nvPicPr>
+          <p:cNvPr id="11" name="Image 3" descr="preencoded.png">    </p:cNvPr>
+          <p:cNvPicPr>
+            <a:picLocks noChangeAspect="1"/>
+          </p:cNvPicPr>
+          <p:nvPr/>
+        </p:nvPicPr>
+        <p:blipFill>
+          <a:blip r:embed="rId4"/>
+          <a:stretch>
+            <a:fillRect/>
+          </a:stretch>
+        </p:blipFill>
+        <p:spPr>
+          <a:xfrm>
+            <a:off x="731520" y="4160520"/>
+            <a:ext cx="274320" cy="274320"/>
+          </a:xfrm>
+          <a:prstGeom prst="rect">
+            <a:avLst/>
+          </a:prstGeom>
+        </p:spPr>
+      </p:pic>
+      <p:sp>
+        <p:nvSpPr>
+          <p:cNvPr id="12" name="Text 6"/>
+          <p:cNvSpPr/>
+          <p:nvPr/>
+        </p:nvSpPr>
+        <p:spPr>
+          <a:xfrm>
+            <a:off x="1143000" y="4114800"/>
+            <a:ext cx="4114800" cy="411480"/>
+          </a:xfrm>
+          <a:prstGeom prst="rect">
+            <a:avLst/>
+          </a:prstGeom>
+          <a:noFill/>
+          <a:ln/>
+        </p:spPr>
+        <p:txBody>
+          <a:bodyPr wrap="square" lIns="0" tIns="0" rIns="0" bIns="0" rtlCol="0" anchor="ctr"/>
+          <a:lstStyle/>
+          <a:p>
+            <a:pPr indent="0" marL="0">
+              <a:buNone/>
+            </a:pPr>
+            <a:r>
+              <a:rPr lang="en-US" sz="1100" dirty="0">
+                <a:solidFill>
+                  <a:srgbClr val="6B7280"/>
+                </a:solidFill>
+                <a:latin typeface="Inter" pitchFamily="34" charset="0"/>
+                <a:ea typeface="Inter" pitchFamily="34" charset="-122"/>
+                <a:cs typeface="Inter" pitchFamily="34" charset="-120"/>
+              </a:rPr>
+              <a:t>Embeds directly on your website, no app needed</a:t>
+            </a:r>
+            <a:endParaRPr lang="en-US" sz="1100" dirty="0"/>
+          </a:p>
+        </p:txBody>
+      </p:sp>
+      <p:sp>
+        <p:nvSpPr>
+          <p:cNvPr id="13" name="Shape 7"/>
+          <p:cNvSpPr/>
+          <p:nvPr/>
+        </p:nvSpPr>
+        <p:spPr>
+          <a:xfrm>
+            <a:off x="5486400" y="457200"/>
+            <a:ext cx="3291840" cy="4297680"/>
           </a:xfrm>
           <a:prstGeom prst="rect">
             <a:avLst/>
           </a:prstGeom>
           <a:solidFill>
-            <a:srgbClr val="132240"/>
+            <a:srgbClr val="F0F0F0"/>
           </a:solidFill>
           <a:ln/>
           <a:effectLst>
@@ -2736,65 +2988,571 @@
       </p:sp>
       <p:sp>
         <p:nvSpPr>
-          <p:cNvPr id="6" name="Shape 4"/>
-          <p:cNvSpPr/>
-          <p:nvPr/>
-        </p:nvSpPr>
-        <p:spPr>
-          <a:xfrm>
-            <a:off x="1371600" y="2880360"/>
-            <a:ext cx="548640" cy="548640"/>
-          </a:xfrm>
-          <a:prstGeom prst="ellipse">
+          <p:cNvPr id="14" name="Shape 8"/>
+          <p:cNvSpPr/>
+          <p:nvPr/>
+        </p:nvSpPr>
+        <p:spPr>
+          <a:xfrm>
+            <a:off x="5486400" y="457200"/>
+            <a:ext cx="3291840" cy="502920"/>
+          </a:xfrm>
+          <a:prstGeom prst="rect">
             <a:avLst/>
           </a:prstGeom>
           <a:solidFill>
-            <a:srgbClr val="00C9A7">
-              <a:alpha val="15000"/>
-            </a:srgbClr>
+            <a:srgbClr val="15679B"/>
           </a:solidFill>
           <a:ln/>
         </p:spPr>
       </p:sp>
-      <p:pic>
-        <p:nvPicPr>
-          <p:cNvPr id="7" name="Image 0" descr="preencoded.png">    </p:cNvPr>
-          <p:cNvPicPr>
-            <a:picLocks noChangeAspect="1"/>
-          </p:cNvPicPr>
-          <p:nvPr/>
-        </p:nvPicPr>
-        <p:blipFill>
-          <a:blip r:embed="rId1"/>
-          <a:stretch>
-            <a:fillRect/>
-          </a:stretch>
-        </p:blipFill>
-        <p:spPr>
-          <a:xfrm>
-            <a:off x="1463040" y="2971800"/>
-            <a:ext cx="365760" cy="365760"/>
-          </a:xfrm>
-          <a:prstGeom prst="rect">
-            <a:avLst/>
-          </a:prstGeom>
-        </p:spPr>
-      </p:pic>
-      <p:sp>
-        <p:nvSpPr>
-          <p:cNvPr id="8" name="Text 5"/>
-          <p:cNvSpPr/>
-          <p:nvPr/>
-        </p:nvSpPr>
-        <p:spPr>
-          <a:xfrm>
-            <a:off x="868680" y="3611880"/>
-            <a:ext cx="1554480" cy="411480"/>
-          </a:xfrm>
-          <a:prstGeom prst="rect">
-            <a:avLst/>
-          </a:prstGeom>
-          <a:noFill/>
+      <p:sp>
+        <p:nvSpPr>
+          <p:cNvPr id="15" name="Text 9"/>
+          <p:cNvSpPr/>
+          <p:nvPr/>
+        </p:nvSpPr>
+        <p:spPr>
+          <a:xfrm>
+            <a:off x="5623560" y="530352"/>
+            <a:ext cx="3017520" cy="365760"/>
+          </a:xfrm>
+          <a:prstGeom prst="rect">
+            <a:avLst/>
+          </a:prstGeom>
+          <a:noFill/>
+          <a:ln/>
+        </p:spPr>
+        <p:txBody>
+          <a:bodyPr wrap="square" lIns="0" tIns="0" rIns="0" bIns="0" rtlCol="0" anchor="ctr"/>
+          <a:lstStyle/>
+          <a:p>
+            <a:pPr indent="0" marL="0">
+              <a:buNone/>
+            </a:pPr>
+            <a:r>
+              <a:rPr lang="en-US" sz="1000" b="1" dirty="0">
+                <a:solidFill>
+                  <a:srgbClr val="FFFFFF"/>
+                </a:solidFill>
+                <a:latin typeface="Inter" pitchFamily="34" charset="0"/>
+                <a:ea typeface="Inter" pitchFamily="34" charset="-122"/>
+                <a:cs typeface="Inter" pitchFamily="34" charset="-120"/>
+              </a:rPr>
+              <a:t>Moovers — Instant Quote</a:t>
+            </a:r>
+            <a:endParaRPr lang="en-US" sz="1000" dirty="0"/>
+          </a:p>
+        </p:txBody>
+      </p:sp>
+      <p:sp>
+        <p:nvSpPr>
+          <p:cNvPr id="16" name="Shape 10"/>
+          <p:cNvSpPr/>
+          <p:nvPr/>
+        </p:nvSpPr>
+        <p:spPr>
+          <a:xfrm>
+            <a:off x="5623560" y="1097280"/>
+            <a:ext cx="2194560" cy="292608"/>
+          </a:xfrm>
+          <a:prstGeom prst="rect">
+            <a:avLst/>
+          </a:prstGeom>
+          <a:solidFill>
+            <a:srgbClr val="FFFFFF"/>
+          </a:solidFill>
+          <a:ln/>
+        </p:spPr>
+      </p:sp>
+      <p:sp>
+        <p:nvSpPr>
+          <p:cNvPr id="17" name="Text 11"/>
+          <p:cNvSpPr/>
+          <p:nvPr/>
+        </p:nvSpPr>
+        <p:spPr>
+          <a:xfrm>
+            <a:off x="5715000" y="1115568"/>
+            <a:ext cx="2011680" cy="256032"/>
+          </a:xfrm>
+          <a:prstGeom prst="rect">
+            <a:avLst/>
+          </a:prstGeom>
+          <a:noFill/>
+          <a:ln/>
+        </p:spPr>
+        <p:txBody>
+          <a:bodyPr wrap="square" lIns="0" tIns="0" rIns="0" bIns="0" rtlCol="0" anchor="ctr"/>
+          <a:lstStyle/>
+          <a:p>
+            <a:pPr indent="0" marL="0">
+              <a:buNone/>
+            </a:pPr>
+            <a:r>
+              <a:rPr lang="en-US" sz="800" dirty="0">
+                <a:solidFill>
+                  <a:srgbClr val="333333"/>
+                </a:solidFill>
+                <a:latin typeface="Inter" pitchFamily="34" charset="0"/>
+                <a:ea typeface="Inter" pitchFamily="34" charset="-122"/>
+                <a:cs typeface="Inter" pitchFamily="34" charset="-120"/>
+              </a:rPr>
+              <a:t>What size is your current home?</a:t>
+            </a:r>
+            <a:endParaRPr lang="en-US" sz="800" dirty="0"/>
+          </a:p>
+        </p:txBody>
+      </p:sp>
+      <p:sp>
+        <p:nvSpPr>
+          <p:cNvPr id="18" name="Shape 12"/>
+          <p:cNvSpPr/>
+          <p:nvPr/>
+        </p:nvSpPr>
+        <p:spPr>
+          <a:xfrm>
+            <a:off x="6492240" y="1508760"/>
+            <a:ext cx="2103120" cy="292608"/>
+          </a:xfrm>
+          <a:prstGeom prst="rect">
+            <a:avLst/>
+          </a:prstGeom>
+          <a:solidFill>
+            <a:srgbClr val="15679B"/>
+          </a:solidFill>
+          <a:ln/>
+        </p:spPr>
+      </p:sp>
+      <p:sp>
+        <p:nvSpPr>
+          <p:cNvPr id="19" name="Text 13"/>
+          <p:cNvSpPr/>
+          <p:nvPr/>
+        </p:nvSpPr>
+        <p:spPr>
+          <a:xfrm>
+            <a:off x="6583680" y="1527048"/>
+            <a:ext cx="1920240" cy="256032"/>
+          </a:xfrm>
+          <a:prstGeom prst="rect">
+            <a:avLst/>
+          </a:prstGeom>
+          <a:noFill/>
+          <a:ln/>
+        </p:spPr>
+        <p:txBody>
+          <a:bodyPr wrap="square" lIns="0" tIns="0" rIns="0" bIns="0" rtlCol="0" anchor="ctr"/>
+          <a:lstStyle/>
+          <a:p>
+            <a:pPr indent="0" marL="0">
+              <a:buNone/>
+            </a:pPr>
+            <a:r>
+              <a:rPr lang="en-US" sz="800" dirty="0">
+                <a:solidFill>
+                  <a:srgbClr val="FFFFFF"/>
+                </a:solidFill>
+                <a:latin typeface="Inter" pitchFamily="34" charset="0"/>
+                <a:ea typeface="Inter" pitchFamily="34" charset="-122"/>
+                <a:cs typeface="Inter" pitchFamily="34" charset="-120"/>
+              </a:rPr>
+              <a:t>3 BR</a:t>
+            </a:r>
+            <a:endParaRPr lang="en-US" sz="800" dirty="0"/>
+          </a:p>
+        </p:txBody>
+      </p:sp>
+      <p:sp>
+        <p:nvSpPr>
+          <p:cNvPr id="20" name="Shape 14"/>
+          <p:cNvSpPr/>
+          <p:nvPr/>
+        </p:nvSpPr>
+        <p:spPr>
+          <a:xfrm>
+            <a:off x="5623560" y="1874520"/>
+            <a:ext cx="2194560" cy="292608"/>
+          </a:xfrm>
+          <a:prstGeom prst="rect">
+            <a:avLst/>
+          </a:prstGeom>
+          <a:solidFill>
+            <a:srgbClr val="FFFFFF"/>
+          </a:solidFill>
+          <a:ln/>
+        </p:spPr>
+      </p:sp>
+      <p:sp>
+        <p:nvSpPr>
+          <p:cNvPr id="21" name="Text 15"/>
+          <p:cNvSpPr/>
+          <p:nvPr/>
+        </p:nvSpPr>
+        <p:spPr>
+          <a:xfrm>
+            <a:off x="5715000" y="1892808"/>
+            <a:ext cx="2011680" cy="256032"/>
+          </a:xfrm>
+          <a:prstGeom prst="rect">
+            <a:avLst/>
+          </a:prstGeom>
+          <a:noFill/>
+          <a:ln/>
+        </p:spPr>
+        <p:txBody>
+          <a:bodyPr wrap="square" lIns="0" tIns="0" rIns="0" bIns="0" rtlCol="0" anchor="ctr"/>
+          <a:lstStyle/>
+          <a:p>
+            <a:pPr indent="0" marL="0">
+              <a:buNone/>
+            </a:pPr>
+            <a:r>
+              <a:rPr lang="en-US" sz="800" dirty="0">
+                <a:solidFill>
+                  <a:srgbClr val="333333"/>
+                </a:solidFill>
+                <a:latin typeface="Inter" pitchFamily="34" charset="0"/>
+                <a:ea typeface="Inter" pitchFamily="34" charset="-122"/>
+                <a:cs typeface="Inter" pitchFamily="34" charset="-120"/>
+              </a:rPr>
+              <a:t>What's the pickup address?</a:t>
+            </a:r>
+            <a:endParaRPr lang="en-US" sz="800" dirty="0"/>
+          </a:p>
+        </p:txBody>
+      </p:sp>
+      <p:sp>
+        <p:nvSpPr>
+          <p:cNvPr id="22" name="Shape 16"/>
+          <p:cNvSpPr/>
+          <p:nvPr/>
+        </p:nvSpPr>
+        <p:spPr>
+          <a:xfrm>
+            <a:off x="6492240" y="2286000"/>
+            <a:ext cx="2103120" cy="292608"/>
+          </a:xfrm>
+          <a:prstGeom prst="rect">
+            <a:avLst/>
+          </a:prstGeom>
+          <a:solidFill>
+            <a:srgbClr val="15679B"/>
+          </a:solidFill>
+          <a:ln/>
+        </p:spPr>
+      </p:sp>
+      <p:sp>
+        <p:nvSpPr>
+          <p:cNvPr id="23" name="Text 17"/>
+          <p:cNvSpPr/>
+          <p:nvPr/>
+        </p:nvSpPr>
+        <p:spPr>
+          <a:xfrm>
+            <a:off x="6583680" y="2304288"/>
+            <a:ext cx="1920240" cy="256032"/>
+          </a:xfrm>
+          <a:prstGeom prst="rect">
+            <a:avLst/>
+          </a:prstGeom>
+          <a:noFill/>
+          <a:ln/>
+        </p:spPr>
+        <p:txBody>
+          <a:bodyPr wrap="square" lIns="0" tIns="0" rIns="0" bIns="0" rtlCol="0" anchor="ctr"/>
+          <a:lstStyle/>
+          <a:p>
+            <a:pPr indent="0" marL="0">
+              <a:buNone/>
+            </a:pPr>
+            <a:r>
+              <a:rPr lang="en-US" sz="800" dirty="0">
+                <a:solidFill>
+                  <a:srgbClr val="FFFFFF"/>
+                </a:solidFill>
+                <a:latin typeface="Inter" pitchFamily="34" charset="0"/>
+                <a:ea typeface="Inter" pitchFamily="34" charset="-122"/>
+                <a:cs typeface="Inter" pitchFamily="34" charset="-120"/>
+              </a:rPr>
+              <a:t>123 Main St, Dallas, TX</a:t>
+            </a:r>
+            <a:endParaRPr lang="en-US" sz="800" dirty="0"/>
+          </a:p>
+        </p:txBody>
+      </p:sp>
+      <p:sp>
+        <p:nvSpPr>
+          <p:cNvPr id="24" name="Shape 18"/>
+          <p:cNvSpPr/>
+          <p:nvPr/>
+        </p:nvSpPr>
+        <p:spPr>
+          <a:xfrm>
+            <a:off x="5623560" y="2651760"/>
+            <a:ext cx="2194560" cy="292608"/>
+          </a:xfrm>
+          <a:prstGeom prst="rect">
+            <a:avLst/>
+          </a:prstGeom>
+          <a:solidFill>
+            <a:srgbClr val="FFFFFF"/>
+          </a:solidFill>
+          <a:ln/>
+        </p:spPr>
+      </p:sp>
+      <p:sp>
+        <p:nvSpPr>
+          <p:cNvPr id="25" name="Text 19"/>
+          <p:cNvSpPr/>
+          <p:nvPr/>
+        </p:nvSpPr>
+        <p:spPr>
+          <a:xfrm>
+            <a:off x="5715000" y="2670048"/>
+            <a:ext cx="2011680" cy="256032"/>
+          </a:xfrm>
+          <a:prstGeom prst="rect">
+            <a:avLst/>
+          </a:prstGeom>
+          <a:noFill/>
+          <a:ln/>
+        </p:spPr>
+        <p:txBody>
+          <a:bodyPr wrap="square" lIns="0" tIns="0" rIns="0" bIns="0" rtlCol="0" anchor="ctr"/>
+          <a:lstStyle/>
+          <a:p>
+            <a:pPr indent="0" marL="0">
+              <a:buNone/>
+            </a:pPr>
+            <a:r>
+              <a:rPr lang="en-US" sz="800" dirty="0">
+                <a:solidFill>
+                  <a:srgbClr val="333333"/>
+                </a:solidFill>
+                <a:latin typeface="Inter" pitchFamily="34" charset="0"/>
+                <a:ea typeface="Inter" pitchFamily="34" charset="-122"/>
+                <a:cs typeface="Inter" pitchFamily="34" charset="-120"/>
+              </a:rPr>
+              <a:t>Where are you moving to?</a:t>
+            </a:r>
+            <a:endParaRPr lang="en-US" sz="800" dirty="0"/>
+          </a:p>
+        </p:txBody>
+      </p:sp>
+      <p:sp>
+        <p:nvSpPr>
+          <p:cNvPr id="26" name="Shape 20"/>
+          <p:cNvSpPr/>
+          <p:nvPr/>
+        </p:nvSpPr>
+        <p:spPr>
+          <a:xfrm>
+            <a:off x="6492240" y="3063240"/>
+            <a:ext cx="2103120" cy="292608"/>
+          </a:xfrm>
+          <a:prstGeom prst="rect">
+            <a:avLst/>
+          </a:prstGeom>
+          <a:solidFill>
+            <a:srgbClr val="15679B"/>
+          </a:solidFill>
+          <a:ln/>
+        </p:spPr>
+      </p:sp>
+      <p:sp>
+        <p:nvSpPr>
+          <p:cNvPr id="27" name="Text 21"/>
+          <p:cNvSpPr/>
+          <p:nvPr/>
+        </p:nvSpPr>
+        <p:spPr>
+          <a:xfrm>
+            <a:off x="6583680" y="3081528"/>
+            <a:ext cx="1920240" cy="256032"/>
+          </a:xfrm>
+          <a:prstGeom prst="rect">
+            <a:avLst/>
+          </a:prstGeom>
+          <a:noFill/>
+          <a:ln/>
+        </p:spPr>
+        <p:txBody>
+          <a:bodyPr wrap="square" lIns="0" tIns="0" rIns="0" bIns="0" rtlCol="0" anchor="ctr"/>
+          <a:lstStyle/>
+          <a:p>
+            <a:pPr indent="0" marL="0">
+              <a:buNone/>
+            </a:pPr>
+            <a:r>
+              <a:rPr lang="en-US" sz="800" dirty="0">
+                <a:solidFill>
+                  <a:srgbClr val="FFFFFF"/>
+                </a:solidFill>
+                <a:latin typeface="Inter" pitchFamily="34" charset="0"/>
+                <a:ea typeface="Inter" pitchFamily="34" charset="-122"/>
+                <a:cs typeface="Inter" pitchFamily="34" charset="-120"/>
+              </a:rPr>
+              <a:t>456 Oak Ave, Austin, TX</a:t>
+            </a:r>
+            <a:endParaRPr lang="en-US" sz="800" dirty="0"/>
+          </a:p>
+        </p:txBody>
+      </p:sp>
+      <p:sp>
+        <p:nvSpPr>
+          <p:cNvPr id="28" name="Shape 22"/>
+          <p:cNvSpPr/>
+          <p:nvPr/>
+        </p:nvSpPr>
+        <p:spPr>
+          <a:xfrm>
+            <a:off x="5623560" y="3474720"/>
+            <a:ext cx="3017520" cy="1097280"/>
+          </a:xfrm>
+          <a:prstGeom prst="rect">
+            <a:avLst/>
+          </a:prstGeom>
+          <a:solidFill>
+            <a:srgbClr val="22C55E"/>
+          </a:solidFill>
+          <a:ln/>
+        </p:spPr>
+      </p:sp>
+      <p:sp>
+        <p:nvSpPr>
+          <p:cNvPr id="29" name="Text 23"/>
+          <p:cNvSpPr/>
+          <p:nvPr/>
+        </p:nvSpPr>
+        <p:spPr>
+          <a:xfrm>
+            <a:off x="5760720" y="3520440"/>
+            <a:ext cx="1828800" cy="228600"/>
+          </a:xfrm>
+          <a:prstGeom prst="rect">
+            <a:avLst/>
+          </a:prstGeom>
+          <a:noFill/>
+          <a:ln/>
+        </p:spPr>
+        <p:txBody>
+          <a:bodyPr wrap="square" lIns="0" tIns="0" rIns="0" bIns="0" rtlCol="0" anchor="ctr"/>
+          <a:lstStyle/>
+          <a:p>
+            <a:pPr indent="0" marL="0">
+              <a:buNone/>
+            </a:pPr>
+            <a:r>
+              <a:rPr lang="en-US" sz="800" dirty="0">
+                <a:solidFill>
+                  <a:srgbClr val="FFFFFF"/>
+                </a:solidFill>
+                <a:latin typeface="Inter" pitchFamily="34" charset="0"/>
+                <a:ea typeface="Inter" pitchFamily="34" charset="-122"/>
+                <a:cs typeface="Inter" pitchFamily="34" charset="-120"/>
+              </a:rPr>
+              <a:t>Your Estimate</a:t>
+            </a:r>
+            <a:endParaRPr lang="en-US" sz="800" dirty="0"/>
+          </a:p>
+        </p:txBody>
+      </p:sp>
+      <p:sp>
+        <p:nvSpPr>
+          <p:cNvPr id="30" name="Text 24"/>
+          <p:cNvSpPr/>
+          <p:nvPr/>
+        </p:nvSpPr>
+        <p:spPr>
+          <a:xfrm>
+            <a:off x="5760720" y="3749040"/>
+            <a:ext cx="2560320" cy="365760"/>
+          </a:xfrm>
+          <a:prstGeom prst="rect">
+            <a:avLst/>
+          </a:prstGeom>
+          <a:noFill/>
+          <a:ln/>
+        </p:spPr>
+        <p:txBody>
+          <a:bodyPr wrap="square" lIns="0" tIns="0" rIns="0" bIns="0" rtlCol="0" anchor="ctr"/>
+          <a:lstStyle/>
+          <a:p>
+            <a:pPr indent="0" marL="0">
+              <a:buNone/>
+            </a:pPr>
+            <a:r>
+              <a:rPr lang="en-US" sz="1800" b="1" dirty="0">
+                <a:solidFill>
+                  <a:srgbClr val="FFFFFF"/>
+                </a:solidFill>
+                <a:latin typeface="Inter" pitchFamily="34" charset="0"/>
+                <a:ea typeface="Inter" pitchFamily="34" charset="-122"/>
+                <a:cs typeface="Inter" pitchFamily="34" charset="-120"/>
+              </a:rPr>
+              <a:t>$1,850 – $2,340</a:t>
+            </a:r>
+            <a:endParaRPr lang="en-US" sz="1800" dirty="0"/>
+          </a:p>
+        </p:txBody>
+      </p:sp>
+      <p:sp>
+        <p:nvSpPr>
+          <p:cNvPr id="31" name="Text 25"/>
+          <p:cNvSpPr/>
+          <p:nvPr/>
+        </p:nvSpPr>
+        <p:spPr>
+          <a:xfrm>
+            <a:off x="5760720" y="4114800"/>
+            <a:ext cx="2560320" cy="182880"/>
+          </a:xfrm>
+          <a:prstGeom prst="rect">
+            <a:avLst/>
+          </a:prstGeom>
+          <a:noFill/>
+          <a:ln/>
+        </p:spPr>
+        <p:txBody>
+          <a:bodyPr wrap="square" lIns="0" tIns="0" rIns="0" bIns="0" rtlCol="0" anchor="ctr"/>
+          <a:lstStyle/>
+          <a:p>
+            <a:pPr indent="0" marL="0">
+              <a:buNone/>
+            </a:pPr>
+            <a:r>
+              <a:rPr lang="en-US" sz="700" dirty="0">
+                <a:solidFill>
+                  <a:srgbClr val="FFFFFF"/>
+                </a:solidFill>
+                <a:latin typeface="Inter" pitchFamily="34" charset="0"/>
+                <a:ea typeface="Inter" pitchFamily="34" charset="-122"/>
+                <a:cs typeface="Inter" pitchFamily="34" charset="-120"/>
+              </a:rPr>
+              <a:t>3 BR • Dallas → Austin • 195 mi</a:t>
+            </a:r>
+            <a:endParaRPr lang="en-US" sz="700" dirty="0"/>
+          </a:p>
+        </p:txBody>
+      </p:sp>
+      <p:sp>
+        <p:nvSpPr>
+          <p:cNvPr id="32" name="Text 26"/>
+          <p:cNvSpPr/>
+          <p:nvPr/>
+        </p:nvSpPr>
+        <p:spPr>
+          <a:xfrm>
+            <a:off x="5760720" y="4297680"/>
+            <a:ext cx="914400" cy="201168"/>
+          </a:xfrm>
+          <a:prstGeom prst="rect">
+            <a:avLst/>
+          </a:prstGeom>
+          <a:solidFill>
+            <a:srgbClr val="FFFFFF"/>
+          </a:solidFill>
           <a:ln/>
         </p:spPr>
         <p:txBody>
@@ -2805,30 +3563,30 @@
               <a:buNone/>
             </a:pPr>
             <a:r>
-              <a:rPr lang="en-US" sz="1200" b="1" dirty="0">
-                <a:solidFill>
-                  <a:srgbClr val="FFFFFF"/>
-                </a:solidFill>
-                <a:latin typeface="Trebuchet MS" pitchFamily="34" charset="0"/>
-                <a:ea typeface="Trebuchet MS" pitchFamily="34" charset="-122"/>
-                <a:cs typeface="Trebuchet MS" pitchFamily="34" charset="-120"/>
-              </a:rPr>
-              <a:t>Instant Accurate Quotes</a:t>
-            </a:r>
-            <a:endParaRPr lang="en-US" sz="1200" dirty="0"/>
-          </a:p>
-        </p:txBody>
-      </p:sp>
-      <p:sp>
-        <p:nvSpPr>
-          <p:cNvPr id="9" name="Text 6"/>
-          <p:cNvSpPr/>
-          <p:nvPr/>
-        </p:nvSpPr>
-        <p:spPr>
-          <a:xfrm>
-            <a:off x="868680" y="4023360"/>
-            <a:ext cx="1554480" cy="502920"/>
+              <a:rPr lang="en-US" sz="700" b="1" dirty="0">
+                <a:solidFill>
+                  <a:srgbClr val="22C55E"/>
+                </a:solidFill>
+                <a:latin typeface="Inter" pitchFamily="34" charset="0"/>
+                <a:ea typeface="Inter" pitchFamily="34" charset="-122"/>
+                <a:cs typeface="Inter" pitchFamily="34" charset="-120"/>
+              </a:rPr>
+              <a:t>Book Now</a:t>
+            </a:r>
+            <a:endParaRPr lang="en-US" sz="700" dirty="0"/>
+          </a:p>
+        </p:txBody>
+      </p:sp>
+      <p:sp>
+        <p:nvSpPr>
+          <p:cNvPr id="33" name="Text 27"/>
+          <p:cNvSpPr/>
+          <p:nvPr/>
+        </p:nvSpPr>
+        <p:spPr>
+          <a:xfrm>
+            <a:off x="5486400" y="4892040"/>
+            <a:ext cx="3291840" cy="274320"/>
           </a:xfrm>
           <a:prstGeom prst="rect">
             <a:avLst/>
@@ -2844,470 +3602,17 @@
               <a:buNone/>
             </a:pPr>
             <a:r>
-              <a:rPr lang="en-US" sz="1000" dirty="0">
-                <a:solidFill>
-                  <a:srgbClr val="8896AB"/>
-                </a:solidFill>
-                <a:latin typeface="Calibri" pitchFamily="34" charset="0"/>
-                <a:ea typeface="Calibri" pitchFamily="34" charset="-122"/>
-                <a:cs typeface="Calibri" pitchFamily="34" charset="-120"/>
-              </a:rPr>
-              <a:t>Distance, volume, stairs, special items — priced in seconds</a:t>
-            </a:r>
-            <a:endParaRPr lang="en-US" sz="1000" dirty="0"/>
-          </a:p>
-        </p:txBody>
-      </p:sp>
-      <p:sp>
-        <p:nvSpPr>
-          <p:cNvPr id="10" name="Shape 7"/>
-          <p:cNvSpPr/>
-          <p:nvPr/>
-        </p:nvSpPr>
-        <p:spPr>
-          <a:xfrm>
-            <a:off x="2788920" y="2651760"/>
-            <a:ext cx="1828800" cy="2011680"/>
-          </a:xfrm>
-          <a:prstGeom prst="rect">
-            <a:avLst/>
-          </a:prstGeom>
-          <a:solidFill>
-            <a:srgbClr val="132240"/>
-          </a:solidFill>
-          <a:ln/>
-          <a:effectLst>
-            <a:outerShdw sx="100000" sy="100000" kx="0" ky="0" algn="bl" rotWithShape="0" blurRad="76200" dist="25400" dir="8100000">
-              <a:srgbClr val="000000">
-                <a:alpha val="15000"/>
-              </a:srgbClr>
-            </a:outerShdw>
-          </a:effectLst>
-        </p:spPr>
-      </p:sp>
-      <p:sp>
-        <p:nvSpPr>
-          <p:cNvPr id="11" name="Shape 8"/>
-          <p:cNvSpPr/>
-          <p:nvPr/>
-        </p:nvSpPr>
-        <p:spPr>
-          <a:xfrm>
-            <a:off x="3429000" y="2880360"/>
-            <a:ext cx="548640" cy="548640"/>
-          </a:xfrm>
-          <a:prstGeom prst="ellipse">
-            <a:avLst/>
-          </a:prstGeom>
-          <a:solidFill>
-            <a:srgbClr val="00C9A7">
-              <a:alpha val="15000"/>
-            </a:srgbClr>
-          </a:solidFill>
-          <a:ln/>
-        </p:spPr>
-      </p:sp>
-      <p:pic>
-        <p:nvPicPr>
-          <p:cNvPr id="12" name="Image 1" descr="preencoded.png">    </p:cNvPr>
-          <p:cNvPicPr>
-            <a:picLocks noChangeAspect="1"/>
-          </p:cNvPicPr>
-          <p:nvPr/>
-        </p:nvPicPr>
-        <p:blipFill>
-          <a:blip r:embed="rId2"/>
-          <a:stretch>
-            <a:fillRect/>
-          </a:stretch>
-        </p:blipFill>
-        <p:spPr>
-          <a:xfrm>
-            <a:off x="3520440" y="2971800"/>
-            <a:ext cx="365760" cy="365760"/>
-          </a:xfrm>
-          <a:prstGeom prst="rect">
-            <a:avLst/>
-          </a:prstGeom>
-        </p:spPr>
-      </p:pic>
-      <p:sp>
-        <p:nvSpPr>
-          <p:cNvPr id="13" name="Text 9"/>
-          <p:cNvSpPr/>
-          <p:nvPr/>
-        </p:nvSpPr>
-        <p:spPr>
-          <a:xfrm>
-            <a:off x="2926080" y="3611880"/>
-            <a:ext cx="1554480" cy="411480"/>
-          </a:xfrm>
-          <a:prstGeom prst="rect">
-            <a:avLst/>
-          </a:prstGeom>
-          <a:noFill/>
-          <a:ln/>
-        </p:spPr>
-        <p:txBody>
-          <a:bodyPr wrap="square" lIns="0" tIns="0" rIns="0" bIns="0" rtlCol="0" anchor="ctr"/>
-          <a:lstStyle/>
-          <a:p>
-            <a:pPr algn="ctr" indent="0" marL="0">
-              <a:buNone/>
-            </a:pPr>
-            <a:r>
-              <a:rPr lang="en-US" sz="1200" b="1" dirty="0">
-                <a:solidFill>
-                  <a:srgbClr val="FFFFFF"/>
-                </a:solidFill>
-                <a:latin typeface="Trebuchet MS" pitchFamily="34" charset="0"/>
-                <a:ea typeface="Trebuchet MS" pitchFamily="34" charset="-122"/>
-                <a:cs typeface="Trebuchet MS" pitchFamily="34" charset="-120"/>
-              </a:rPr>
-              <a:t>24/7 Availability</a:t>
-            </a:r>
-            <a:endParaRPr lang="en-US" sz="1200" dirty="0"/>
-          </a:p>
-        </p:txBody>
-      </p:sp>
-      <p:sp>
-        <p:nvSpPr>
-          <p:cNvPr id="14" name="Text 10"/>
-          <p:cNvSpPr/>
-          <p:nvPr/>
-        </p:nvSpPr>
-        <p:spPr>
-          <a:xfrm>
-            <a:off x="2926080" y="4023360"/>
-            <a:ext cx="1554480" cy="502920"/>
-          </a:xfrm>
-          <a:prstGeom prst="rect">
-            <a:avLst/>
-          </a:prstGeom>
-          <a:noFill/>
-          <a:ln/>
-        </p:spPr>
-        <p:txBody>
-          <a:bodyPr wrap="square" lIns="0" tIns="0" rIns="0" bIns="0" rtlCol="0" anchor="ctr"/>
-          <a:lstStyle/>
-          <a:p>
-            <a:pPr algn="ctr" indent="0" marL="0">
-              <a:buNone/>
-            </a:pPr>
-            <a:r>
-              <a:rPr lang="en-US" sz="1000" dirty="0">
-                <a:solidFill>
-                  <a:srgbClr val="8896AB"/>
-                </a:solidFill>
-                <a:latin typeface="Calibri" pitchFamily="34" charset="0"/>
-                <a:ea typeface="Calibri" pitchFamily="34" charset="-122"/>
-                <a:cs typeface="Calibri" pitchFamily="34" charset="-120"/>
-              </a:rPr>
-              <a:t>Never miss a lead. Nights, weekends, holidays.</a:t>
-            </a:r>
-            <a:endParaRPr lang="en-US" sz="1000" dirty="0"/>
-          </a:p>
-        </p:txBody>
-      </p:sp>
-      <p:sp>
-        <p:nvSpPr>
-          <p:cNvPr id="15" name="Shape 11"/>
-          <p:cNvSpPr/>
-          <p:nvPr/>
-        </p:nvSpPr>
-        <p:spPr>
-          <a:xfrm>
-            <a:off x="4846320" y="2651760"/>
-            <a:ext cx="1828800" cy="2011680"/>
-          </a:xfrm>
-          <a:prstGeom prst="rect">
-            <a:avLst/>
-          </a:prstGeom>
-          <a:solidFill>
-            <a:srgbClr val="132240"/>
-          </a:solidFill>
-          <a:ln/>
-          <a:effectLst>
-            <a:outerShdw sx="100000" sy="100000" kx="0" ky="0" algn="bl" rotWithShape="0" blurRad="76200" dist="25400" dir="8100000">
-              <a:srgbClr val="000000">
-                <a:alpha val="15000"/>
-              </a:srgbClr>
-            </a:outerShdw>
-          </a:effectLst>
-        </p:spPr>
-      </p:sp>
-      <p:sp>
-        <p:nvSpPr>
-          <p:cNvPr id="16" name="Shape 12"/>
-          <p:cNvSpPr/>
-          <p:nvPr/>
-        </p:nvSpPr>
-        <p:spPr>
-          <a:xfrm>
-            <a:off x="5486400" y="2880360"/>
-            <a:ext cx="548640" cy="548640"/>
-          </a:xfrm>
-          <a:prstGeom prst="ellipse">
-            <a:avLst/>
-          </a:prstGeom>
-          <a:solidFill>
-            <a:srgbClr val="00C9A7">
-              <a:alpha val="15000"/>
-            </a:srgbClr>
-          </a:solidFill>
-          <a:ln/>
-        </p:spPr>
-      </p:sp>
-      <p:pic>
-        <p:nvPicPr>
-          <p:cNvPr id="17" name="Image 2" descr="preencoded.png">    </p:cNvPr>
-          <p:cNvPicPr>
-            <a:picLocks noChangeAspect="1"/>
-          </p:cNvPicPr>
-          <p:nvPr/>
-        </p:nvPicPr>
-        <p:blipFill>
-          <a:blip r:embed="rId3"/>
-          <a:stretch>
-            <a:fillRect/>
-          </a:stretch>
-        </p:blipFill>
-        <p:spPr>
-          <a:xfrm>
-            <a:off x="5577840" y="2971800"/>
-            <a:ext cx="365760" cy="365760"/>
-          </a:xfrm>
-          <a:prstGeom prst="rect">
-            <a:avLst/>
-          </a:prstGeom>
-        </p:spPr>
-      </p:pic>
-      <p:sp>
-        <p:nvSpPr>
-          <p:cNvPr id="18" name="Text 13"/>
-          <p:cNvSpPr/>
-          <p:nvPr/>
-        </p:nvSpPr>
-        <p:spPr>
-          <a:xfrm>
-            <a:off x="4983480" y="3611880"/>
-            <a:ext cx="1554480" cy="411480"/>
-          </a:xfrm>
-          <a:prstGeom prst="rect">
-            <a:avLst/>
-          </a:prstGeom>
-          <a:noFill/>
-          <a:ln/>
-        </p:spPr>
-        <p:txBody>
-          <a:bodyPr wrap="square" lIns="0" tIns="0" rIns="0" bIns="0" rtlCol="0" anchor="ctr"/>
-          <a:lstStyle/>
-          <a:p>
-            <a:pPr algn="ctr" indent="0" marL="0">
-              <a:buNone/>
-            </a:pPr>
-            <a:r>
-              <a:rPr lang="en-US" sz="1200" b="1" dirty="0">
-                <a:solidFill>
-                  <a:srgbClr val="FFFFFF"/>
-                </a:solidFill>
-                <a:latin typeface="Trebuchet MS" pitchFamily="34" charset="0"/>
-                <a:ea typeface="Trebuchet MS" pitchFamily="34" charset="-122"/>
-                <a:cs typeface="Trebuchet MS" pitchFamily="34" charset="-120"/>
-              </a:rPr>
-              <a:t>Consistent Pricing</a:t>
-            </a:r>
-            <a:endParaRPr lang="en-US" sz="1200" dirty="0"/>
-          </a:p>
-        </p:txBody>
-      </p:sp>
-      <p:sp>
-        <p:nvSpPr>
-          <p:cNvPr id="19" name="Text 14"/>
-          <p:cNvSpPr/>
-          <p:nvPr/>
-        </p:nvSpPr>
-        <p:spPr>
-          <a:xfrm>
-            <a:off x="4983480" y="4023360"/>
-            <a:ext cx="1554480" cy="502920"/>
-          </a:xfrm>
-          <a:prstGeom prst="rect">
-            <a:avLst/>
-          </a:prstGeom>
-          <a:noFill/>
-          <a:ln/>
-        </p:spPr>
-        <p:txBody>
-          <a:bodyPr wrap="square" lIns="0" tIns="0" rIns="0" bIns="0" rtlCol="0" anchor="ctr"/>
-          <a:lstStyle/>
-          <a:p>
-            <a:pPr algn="ctr" indent="0" marL="0">
-              <a:buNone/>
-            </a:pPr>
-            <a:r>
-              <a:rPr lang="en-US" sz="1000" dirty="0">
-                <a:solidFill>
-                  <a:srgbClr val="8896AB"/>
-                </a:solidFill>
-                <a:latin typeface="Calibri" pitchFamily="34" charset="0"/>
-                <a:ea typeface="Calibri" pitchFamily="34" charset="-122"/>
-                <a:cs typeface="Calibri" pitchFamily="34" charset="-120"/>
-              </a:rPr>
-              <a:t>Same formula every time. No human error or discounts off-policy.</a:t>
-            </a:r>
-            <a:endParaRPr lang="en-US" sz="1000" dirty="0"/>
-          </a:p>
-        </p:txBody>
-      </p:sp>
-      <p:sp>
-        <p:nvSpPr>
-          <p:cNvPr id="20" name="Shape 15"/>
-          <p:cNvSpPr/>
-          <p:nvPr/>
-        </p:nvSpPr>
-        <p:spPr>
-          <a:xfrm>
-            <a:off x="6903720" y="2651760"/>
-            <a:ext cx="1828800" cy="2011680"/>
-          </a:xfrm>
-          <a:prstGeom prst="rect">
-            <a:avLst/>
-          </a:prstGeom>
-          <a:solidFill>
-            <a:srgbClr val="132240"/>
-          </a:solidFill>
-          <a:ln/>
-          <a:effectLst>
-            <a:outerShdw sx="100000" sy="100000" kx="0" ky="0" algn="bl" rotWithShape="0" blurRad="76200" dist="25400" dir="8100000">
-              <a:srgbClr val="000000">
-                <a:alpha val="15000"/>
-              </a:srgbClr>
-            </a:outerShdw>
-          </a:effectLst>
-        </p:spPr>
-      </p:sp>
-      <p:sp>
-        <p:nvSpPr>
-          <p:cNvPr id="21" name="Shape 16"/>
-          <p:cNvSpPr/>
-          <p:nvPr/>
-        </p:nvSpPr>
-        <p:spPr>
-          <a:xfrm>
-            <a:off x="7543800" y="2880360"/>
-            <a:ext cx="548640" cy="548640"/>
-          </a:xfrm>
-          <a:prstGeom prst="ellipse">
-            <a:avLst/>
-          </a:prstGeom>
-          <a:solidFill>
-            <a:srgbClr val="00C9A7">
-              <a:alpha val="15000"/>
-            </a:srgbClr>
-          </a:solidFill>
-          <a:ln/>
-        </p:spPr>
-      </p:sp>
-      <p:pic>
-        <p:nvPicPr>
-          <p:cNvPr id="22" name="Image 3" descr="preencoded.png">    </p:cNvPr>
-          <p:cNvPicPr>
-            <a:picLocks noChangeAspect="1"/>
-          </p:cNvPicPr>
-          <p:nvPr/>
-        </p:nvPicPr>
-        <p:blipFill>
-          <a:blip r:embed="rId4"/>
-          <a:stretch>
-            <a:fillRect/>
-          </a:stretch>
-        </p:blipFill>
-        <p:spPr>
-          <a:xfrm>
-            <a:off x="7635240" y="2971800"/>
-            <a:ext cx="365760" cy="365760"/>
-          </a:xfrm>
-          <a:prstGeom prst="rect">
-            <a:avLst/>
-          </a:prstGeom>
-        </p:spPr>
-      </p:pic>
-      <p:sp>
-        <p:nvSpPr>
-          <p:cNvPr id="23" name="Text 17"/>
-          <p:cNvSpPr/>
-          <p:nvPr/>
-        </p:nvSpPr>
-        <p:spPr>
-          <a:xfrm>
-            <a:off x="7040880" y="3611880"/>
-            <a:ext cx="1554480" cy="411480"/>
-          </a:xfrm>
-          <a:prstGeom prst="rect">
-            <a:avLst/>
-          </a:prstGeom>
-          <a:noFill/>
-          <a:ln/>
-        </p:spPr>
-        <p:txBody>
-          <a:bodyPr wrap="square" lIns="0" tIns="0" rIns="0" bIns="0" rtlCol="0" anchor="ctr"/>
-          <a:lstStyle/>
-          <a:p>
-            <a:pPr algn="ctr" indent="0" marL="0">
-              <a:buNone/>
-            </a:pPr>
-            <a:r>
-              <a:rPr lang="en-US" sz="1200" b="1" dirty="0">
-                <a:solidFill>
-                  <a:srgbClr val="FFFFFF"/>
-                </a:solidFill>
-                <a:latin typeface="Trebuchet MS" pitchFamily="34" charset="0"/>
-                <a:ea typeface="Trebuchet MS" pitchFamily="34" charset="-122"/>
-                <a:cs typeface="Trebuchet MS" pitchFamily="34" charset="-120"/>
-              </a:rPr>
-              <a:t>Website Integration</a:t>
-            </a:r>
-            <a:endParaRPr lang="en-US" sz="1200" dirty="0"/>
-          </a:p>
-        </p:txBody>
-      </p:sp>
-      <p:sp>
-        <p:nvSpPr>
-          <p:cNvPr id="24" name="Text 18"/>
-          <p:cNvSpPr/>
-          <p:nvPr/>
-        </p:nvSpPr>
-        <p:spPr>
-          <a:xfrm>
-            <a:off x="7040880" y="4023360"/>
-            <a:ext cx="1554480" cy="502920"/>
-          </a:xfrm>
-          <a:prstGeom prst="rect">
-            <a:avLst/>
-          </a:prstGeom>
-          <a:noFill/>
-          <a:ln/>
-        </p:spPr>
-        <p:txBody>
-          <a:bodyPr wrap="square" lIns="0" tIns="0" rIns="0" bIns="0" rtlCol="0" anchor="ctr"/>
-          <a:lstStyle/>
-          <a:p>
-            <a:pPr algn="ctr" indent="0" marL="0">
-              <a:buNone/>
-            </a:pPr>
-            <a:r>
-              <a:rPr lang="en-US" sz="1000" dirty="0">
-                <a:solidFill>
-                  <a:srgbClr val="8896AB"/>
-                </a:solidFill>
-                <a:latin typeface="Calibri" pitchFamily="34" charset="0"/>
-                <a:ea typeface="Calibri" pitchFamily="34" charset="-122"/>
-                <a:cs typeface="Calibri" pitchFamily="34" charset="-120"/>
-              </a:rPr>
-              <a:t>Embeds directly into your site. No app downloads for customers.</a:t>
-            </a:r>
-            <a:endParaRPr lang="en-US" sz="1000" dirty="0"/>
+              <a:rPr lang="en-US" sz="900" i="1" dirty="0">
+                <a:solidFill>
+                  <a:srgbClr val="9CA3AF"/>
+                </a:solidFill>
+                <a:latin typeface="Inter" pitchFamily="34" charset="0"/>
+                <a:ea typeface="Inter" pitchFamily="34" charset="-122"/>
+                <a:cs typeface="Inter" pitchFamily="34" charset="-120"/>
+              </a:rPr>
+              <a:t>Live demo: chiliec.github.io/moovers</a:t>
+            </a:r>
+            <a:endParaRPr lang="en-US" sz="900" dirty="0"/>
           </a:p>
         </p:txBody>
       </p:sp>
@@ -3325,7 +3630,7 @@
     <p:bg>
       <p:bgPr>
         <a:solidFill>
-          <a:srgbClr val="F4F6FA"/>
+          <a:srgbClr val="F5F5F5"/>
         </a:solidFill>
       </p:bgPr>
     </p:bg>
@@ -3370,13 +3675,13 @@
             <a:r>
               <a:rPr lang="en-US" sz="1200" b="1" spc="400" kern="0" dirty="0">
                 <a:solidFill>
-                  <a:srgbClr val="00C9A7"/>
-                </a:solidFill>
-                <a:latin typeface="Trebuchet MS" pitchFamily="34" charset="0"/>
-                <a:ea typeface="Trebuchet MS" pitchFamily="34" charset="-122"/>
-                <a:cs typeface="Trebuchet MS" pitchFamily="34" charset="-120"/>
-              </a:rPr>
-              <a:t>THE ROADMAP</a:t>
+                  <a:srgbClr val="22C55E"/>
+                </a:solidFill>
+                <a:latin typeface="Inter" pitchFamily="34" charset="0"/>
+                <a:ea typeface="Inter" pitchFamily="34" charset="-122"/>
+                <a:cs typeface="Inter" pitchFamily="34" charset="-120"/>
+              </a:rPr>
+              <a:t>SUBSCRIPTION</a:t>
             </a:r>
             <a:endParaRPr lang="en-US" sz="1200" dirty="0"/>
           </a:p>
@@ -3407,50 +3712,351 @@
               <a:buNone/>
             </a:pPr>
             <a:r>
-              <a:rPr lang="en-US" sz="3000" b="1" dirty="0">
-                <a:solidFill>
-                  <a:srgbClr val="1E293B"/>
-                </a:solidFill>
-                <a:latin typeface="Trebuchet MS" pitchFamily="34" charset="0"/>
-                <a:ea typeface="Trebuchet MS" pitchFamily="34" charset="-122"/>
-                <a:cs typeface="Trebuchet MS" pitchFamily="34" charset="-120"/>
-              </a:rPr>
-              <a:t>From First Quote to Full Automation</a:t>
-            </a:r>
-            <a:endParaRPr lang="en-US" sz="3000" dirty="0"/>
-          </a:p>
-        </p:txBody>
-      </p:sp>
-      <p:sp>
-        <p:nvSpPr>
-          <p:cNvPr id="4" name="Shape 2"/>
-          <p:cNvSpPr/>
-          <p:nvPr/>
-        </p:nvSpPr>
-        <p:spPr>
-          <a:xfrm>
-            <a:off x="731520" y="1691640"/>
-            <a:ext cx="548640" cy="548640"/>
-          </a:xfrm>
-          <a:prstGeom prst="ellipse">
+              <a:rPr lang="en-US" sz="2800" b="1" dirty="0">
+                <a:solidFill>
+                  <a:srgbClr val="000000"/>
+                </a:solidFill>
+                <a:latin typeface="Inter" pitchFamily="34" charset="0"/>
+                <a:ea typeface="Inter" pitchFamily="34" charset="-122"/>
+                <a:cs typeface="Inter" pitchFamily="34" charset="-120"/>
+              </a:rPr>
+              <a:t>One Monthly Plan. Everything You Need.</a:t>
+            </a:r>
+            <a:endParaRPr lang="en-US" sz="2800" dirty="0"/>
+          </a:p>
+        </p:txBody>
+      </p:sp>
+      <p:sp>
+        <p:nvSpPr>
+          <p:cNvPr id="4" name="Text 2"/>
+          <p:cNvSpPr/>
+          <p:nvPr/>
+        </p:nvSpPr>
+        <p:spPr>
+          <a:xfrm>
+            <a:off x="731520" y="1417320"/>
+            <a:ext cx="7315200" cy="320040"/>
+          </a:xfrm>
+          <a:prstGeom prst="rect">
+            <a:avLst/>
+          </a:prstGeom>
+          <a:noFill/>
+          <a:ln/>
+        </p:spPr>
+        <p:txBody>
+          <a:bodyPr wrap="square" lIns="0" tIns="0" rIns="0" bIns="0" rtlCol="0" anchor="ctr"/>
+          <a:lstStyle/>
+          <a:p>
+            <a:pPr indent="0" marL="0">
+              <a:buNone/>
+            </a:pPr>
+            <a:r>
+              <a:rPr lang="en-US" sz="1300" dirty="0">
+                <a:solidFill>
+                  <a:srgbClr val="6B7280"/>
+                </a:solidFill>
+                <a:latin typeface="Inter" pitchFamily="34" charset="0"/>
+                <a:ea typeface="Inter" pitchFamily="34" charset="-122"/>
+                <a:cs typeface="Inter" pitchFamily="34" charset="-120"/>
+              </a:rPr>
+              <a:t>Website, AI voice agent, and booking — managed for you under one subscription.</a:t>
+            </a:r>
+            <a:endParaRPr lang="en-US" sz="1300" dirty="0"/>
+          </a:p>
+        </p:txBody>
+      </p:sp>
+      <p:sp>
+        <p:nvSpPr>
+          <p:cNvPr id="5" name="Shape 3"/>
+          <p:cNvSpPr/>
+          <p:nvPr/>
+        </p:nvSpPr>
+        <p:spPr>
+          <a:xfrm>
+            <a:off x="548640" y="1920240"/>
+            <a:ext cx="2606040" cy="2834640"/>
+          </a:xfrm>
+          <a:prstGeom prst="rect">
             <a:avLst/>
           </a:prstGeom>
           <a:solidFill>
-            <a:srgbClr val="00C9A7"/>
+            <a:srgbClr val="FFFFFF"/>
           </a:solidFill>
           <a:ln/>
-        </p:spPr>
-      </p:sp>
-      <p:sp>
-        <p:nvSpPr>
-          <p:cNvPr id="5" name="Text 3"/>
-          <p:cNvSpPr/>
-          <p:nvPr/>
-        </p:nvSpPr>
-        <p:spPr>
-          <a:xfrm>
-            <a:off x="731520" y="1691640"/>
-            <a:ext cx="548640" cy="548640"/>
+          <a:effectLst>
+            <a:outerShdw sx="100000" sy="100000" kx="0" ky="0" algn="bl" rotWithShape="0" blurRad="76200" dist="25400" dir="8100000">
+              <a:srgbClr val="000000">
+                <a:alpha val="15000"/>
+              </a:srgbClr>
+            </a:outerShdw>
+          </a:effectLst>
+        </p:spPr>
+      </p:sp>
+      <p:sp>
+        <p:nvSpPr>
+          <p:cNvPr id="6" name="Shape 4"/>
+          <p:cNvSpPr/>
+          <p:nvPr/>
+        </p:nvSpPr>
+        <p:spPr>
+          <a:xfrm>
+            <a:off x="548640" y="1920240"/>
+            <a:ext cx="2606040" cy="54864"/>
+          </a:xfrm>
+          <a:prstGeom prst="rect">
+            <a:avLst/>
+          </a:prstGeom>
+          <a:solidFill>
+            <a:srgbClr val="6B7280"/>
+          </a:solidFill>
+          <a:ln/>
+        </p:spPr>
+      </p:sp>
+      <p:sp>
+        <p:nvSpPr>
+          <p:cNvPr id="7" name="Text 5"/>
+          <p:cNvSpPr/>
+          <p:nvPr/>
+        </p:nvSpPr>
+        <p:spPr>
+          <a:xfrm>
+            <a:off x="777240" y="2148840"/>
+            <a:ext cx="2148840" cy="320040"/>
+          </a:xfrm>
+          <a:prstGeom prst="rect">
+            <a:avLst/>
+          </a:prstGeom>
+          <a:noFill/>
+          <a:ln/>
+        </p:spPr>
+        <p:txBody>
+          <a:bodyPr wrap="square" lIns="0" tIns="0" rIns="0" bIns="0" rtlCol="0" anchor="ctr"/>
+          <a:lstStyle/>
+          <a:p>
+            <a:pPr indent="0" marL="0">
+              <a:buNone/>
+            </a:pPr>
+            <a:r>
+              <a:rPr lang="en-US" sz="1600" b="1" dirty="0">
+                <a:solidFill>
+                  <a:srgbClr val="000000"/>
+                </a:solidFill>
+                <a:latin typeface="Inter" pitchFamily="34" charset="0"/>
+                <a:ea typeface="Inter" pitchFamily="34" charset="-122"/>
+                <a:cs typeface="Inter" pitchFamily="34" charset="-120"/>
+              </a:rPr>
+              <a:t>Starter</a:t>
+            </a:r>
+            <a:endParaRPr lang="en-US" sz="1600" dirty="0"/>
+          </a:p>
+        </p:txBody>
+      </p:sp>
+      <p:sp>
+        <p:nvSpPr>
+          <p:cNvPr id="8" name="Text 6"/>
+          <p:cNvSpPr/>
+          <p:nvPr/>
+        </p:nvSpPr>
+        <p:spPr>
+          <a:xfrm>
+            <a:off x="777240" y="2514600"/>
+            <a:ext cx="2148840" cy="411480"/>
+          </a:xfrm>
+          <a:prstGeom prst="rect">
+            <a:avLst/>
+          </a:prstGeom>
+          <a:noFill/>
+          <a:ln/>
+        </p:spPr>
+        <p:txBody>
+          <a:bodyPr wrap="square" lIns="0" tIns="0" rIns="0" bIns="0" rtlCol="0" anchor="ctr"/>
+          <a:lstStyle/>
+          <a:p>
+            <a:pPr indent="0" marL="0">
+              <a:buNone/>
+            </a:pPr>
+            <a:r>
+              <a:rPr lang="en-US" sz="2200" b="1" dirty="0">
+                <a:solidFill>
+                  <a:srgbClr val="000000"/>
+                </a:solidFill>
+                <a:latin typeface="Inter" pitchFamily="34" charset="0"/>
+                <a:ea typeface="Inter" pitchFamily="34" charset="-122"/>
+                <a:cs typeface="Inter" pitchFamily="34" charset="-120"/>
+              </a:rPr>
+              <a:t>$300–$500</a:t>
+            </a:r>
+            <a:pPr indent="0" marL="0">
+              <a:buNone/>
+            </a:pPr>
+            <a:r>
+              <a:rPr lang="en-US" sz="1100" dirty="0">
+                <a:solidFill>
+                  <a:srgbClr val="6B7280"/>
+                </a:solidFill>
+                <a:latin typeface="Inter" pitchFamily="34" charset="0"/>
+                <a:ea typeface="Inter" pitchFamily="34" charset="-122"/>
+                <a:cs typeface="Inter" pitchFamily="34" charset="-120"/>
+              </a:rPr>
+              <a:t>/mo</a:t>
+            </a:r>
+            <a:endParaRPr lang="en-US" sz="2200" dirty="0"/>
+          </a:p>
+        </p:txBody>
+      </p:sp>
+      <p:sp>
+        <p:nvSpPr>
+          <p:cNvPr id="9" name="Text 7"/>
+          <p:cNvSpPr/>
+          <p:nvPr/>
+        </p:nvSpPr>
+        <p:spPr>
+          <a:xfrm>
+            <a:off x="777240" y="3063240"/>
+            <a:ext cx="2148840" cy="1097280"/>
+          </a:xfrm>
+          <a:prstGeom prst="rect">
+            <a:avLst/>
+          </a:prstGeom>
+          <a:noFill/>
+          <a:ln/>
+        </p:spPr>
+        <p:txBody>
+          <a:bodyPr wrap="square" lIns="0" tIns="0" rIns="0" bIns="0" rtlCol="0" anchor="ctr"/>
+          <a:lstStyle/>
+          <a:p>
+            <a:pPr marL="342900" indent="-342900">
+              <a:buSzPct val="100000"/>
+              <a:buChar char="•"/>
+            </a:pPr>
+            <a:r>
+              <a:rPr lang="en-US" sz="1000" dirty="0">
+                <a:solidFill>
+                  <a:srgbClr val="6B7280"/>
+                </a:solidFill>
+                <a:latin typeface="Inter" pitchFamily="34" charset="0"/>
+                <a:ea typeface="Inter" pitchFamily="34" charset="-122"/>
+                <a:cs typeface="Inter" pitchFamily="34" charset="-120"/>
+              </a:rPr>
+              <a:t>Mobile-first website refresh</a:t>
+            </a:r>
+            <a:endParaRPr lang="en-US" sz="1000" dirty="0"/>
+          </a:p>
+          <a:p>
+            <a:pPr marL="342900" indent="-342900">
+              <a:buSzPct val="100000"/>
+              <a:buChar char="•"/>
+            </a:pPr>
+            <a:r>
+              <a:rPr lang="en-US" sz="1000" dirty="0">
+                <a:solidFill>
+                  <a:srgbClr val="6B7280"/>
+                </a:solidFill>
+                <a:latin typeface="Inter" pitchFamily="34" charset="0"/>
+                <a:ea typeface="Inter" pitchFamily="34" charset="-122"/>
+                <a:cs typeface="Inter" pitchFamily="34" charset="-120"/>
+              </a:rPr>
+              <a:t>Basic SEO setup</a:t>
+            </a:r>
+            <a:endParaRPr lang="en-US" sz="1000" dirty="0"/>
+          </a:p>
+          <a:p>
+            <a:pPr marL="342900" indent="-342900">
+              <a:buSzPct val="100000"/>
+              <a:buChar char="•"/>
+            </a:pPr>
+            <a:r>
+              <a:rPr lang="en-US" sz="1000" dirty="0">
+                <a:solidFill>
+                  <a:srgbClr val="6B7280"/>
+                </a:solidFill>
+                <a:latin typeface="Inter" pitchFamily="34" charset="0"/>
+                <a:ea typeface="Inter" pitchFamily="34" charset="-122"/>
+                <a:cs typeface="Inter" pitchFamily="34" charset="-120"/>
+              </a:rPr>
+              <a:t>Ongoing maintenance</a:t>
+            </a:r>
+            <a:endParaRPr lang="en-US" sz="1000" dirty="0"/>
+          </a:p>
+        </p:txBody>
+      </p:sp>
+      <p:sp>
+        <p:nvSpPr>
+          <p:cNvPr id="10" name="Shape 8"/>
+          <p:cNvSpPr/>
+          <p:nvPr/>
+        </p:nvSpPr>
+        <p:spPr>
+          <a:xfrm>
+            <a:off x="3429000" y="1920240"/>
+            <a:ext cx="2606040" cy="2834640"/>
+          </a:xfrm>
+          <a:prstGeom prst="rect">
+            <a:avLst/>
+          </a:prstGeom>
+          <a:solidFill>
+            <a:srgbClr val="000000"/>
+          </a:solidFill>
+          <a:ln/>
+          <a:effectLst>
+            <a:outerShdw sx="100000" sy="100000" kx="0" ky="0" algn="bl" rotWithShape="0" blurRad="76200" dist="25400" dir="8100000">
+              <a:srgbClr val="000000">
+                <a:alpha val="15000"/>
+              </a:srgbClr>
+            </a:outerShdw>
+          </a:effectLst>
+        </p:spPr>
+      </p:sp>
+      <p:sp>
+        <p:nvSpPr>
+          <p:cNvPr id="11" name="Shape 9"/>
+          <p:cNvSpPr/>
+          <p:nvPr/>
+        </p:nvSpPr>
+        <p:spPr>
+          <a:xfrm>
+            <a:off x="3429000" y="1920240"/>
+            <a:ext cx="2606040" cy="54864"/>
+          </a:xfrm>
+          <a:prstGeom prst="rect">
+            <a:avLst/>
+          </a:prstGeom>
+          <a:solidFill>
+            <a:srgbClr val="22C55E"/>
+          </a:solidFill>
+          <a:ln/>
+        </p:spPr>
+      </p:sp>
+      <p:sp>
+        <p:nvSpPr>
+          <p:cNvPr id="12" name="Shape 10"/>
+          <p:cNvSpPr/>
+          <p:nvPr/>
+        </p:nvSpPr>
+        <p:spPr>
+          <a:xfrm>
+            <a:off x="3977640" y="2057400"/>
+            <a:ext cx="1508760" cy="256032"/>
+          </a:xfrm>
+          <a:prstGeom prst="rect">
+            <a:avLst/>
+          </a:prstGeom>
+          <a:solidFill>
+            <a:srgbClr val="22C55E"/>
+          </a:solidFill>
+          <a:ln/>
+        </p:spPr>
+      </p:sp>
+      <p:sp>
+        <p:nvSpPr>
+          <p:cNvPr id="13" name="Text 11"/>
+          <p:cNvSpPr/>
+          <p:nvPr/>
+        </p:nvSpPr>
+        <p:spPr>
+          <a:xfrm>
+            <a:off x="3977640" y="2057400"/>
+            <a:ext cx="1508760" cy="256032"/>
           </a:xfrm>
           <a:prstGeom prst="rect">
             <a:avLst/>
@@ -3466,15 +4072,54 @@
               <a:buNone/>
             </a:pPr>
             <a:r>
+              <a:rPr lang="en-US" sz="800" b="1" dirty="0">
+                <a:solidFill>
+                  <a:srgbClr val="FFFFFF"/>
+                </a:solidFill>
+                <a:latin typeface="Inter" pitchFamily="34" charset="0"/>
+                <a:ea typeface="Inter" pitchFamily="34" charset="-122"/>
+                <a:cs typeface="Inter" pitchFamily="34" charset="-120"/>
+              </a:rPr>
+              <a:t>MOST POPULAR</a:t>
+            </a:r>
+            <a:endParaRPr lang="en-US" sz="800" dirty="0"/>
+          </a:p>
+        </p:txBody>
+      </p:sp>
+      <p:sp>
+        <p:nvSpPr>
+          <p:cNvPr id="14" name="Text 12"/>
+          <p:cNvSpPr/>
+          <p:nvPr/>
+        </p:nvSpPr>
+        <p:spPr>
+          <a:xfrm>
+            <a:off x="3657600" y="2423160"/>
+            <a:ext cx="2148840" cy="320040"/>
+          </a:xfrm>
+          <a:prstGeom prst="rect">
+            <a:avLst/>
+          </a:prstGeom>
+          <a:noFill/>
+          <a:ln/>
+        </p:spPr>
+        <p:txBody>
+          <a:bodyPr wrap="square" lIns="0" tIns="0" rIns="0" bIns="0" rtlCol="0" anchor="ctr"/>
+          <a:lstStyle/>
+          <a:p>
+            <a:pPr indent="0" marL="0">
+              <a:buNone/>
+            </a:pPr>
+            <a:r>
               <a:rPr lang="en-US" sz="1600" b="1" dirty="0">
                 <a:solidFill>
                   <a:srgbClr val="FFFFFF"/>
                 </a:solidFill>
-                <a:latin typeface="Trebuchet MS" pitchFamily="34" charset="0"/>
-                <a:ea typeface="Trebuchet MS" pitchFamily="34" charset="-122"/>
-                <a:cs typeface="Trebuchet MS" pitchFamily="34" charset="-120"/>
-              </a:rPr>
-              <a:t>01</a:t>
+                <a:latin typeface="Inter" pitchFamily="34" charset="0"/>
+                <a:ea typeface="Inter" pitchFamily="34" charset="-122"/>
+                <a:cs typeface="Inter" pitchFamily="34" charset="-120"/>
+              </a:rPr>
+              <a:t>Growth</a:t>
             </a:r>
             <a:endParaRPr lang="en-US" sz="1600" dirty="0"/>
           </a:p>
@@ -3482,158 +4127,214 @@
       </p:sp>
       <p:sp>
         <p:nvSpPr>
-          <p:cNvPr id="6" name="Shape 4"/>
-          <p:cNvSpPr/>
-          <p:nvPr/>
-        </p:nvSpPr>
-        <p:spPr>
-          <a:xfrm>
-            <a:off x="978408" y="2240280"/>
-            <a:ext cx="54864" cy="292608"/>
+          <p:cNvPr id="15" name="Text 13"/>
+          <p:cNvSpPr/>
+          <p:nvPr/>
+        </p:nvSpPr>
+        <p:spPr>
+          <a:xfrm>
+            <a:off x="3657600" y="2788920"/>
+            <a:ext cx="2148840" cy="411480"/>
+          </a:xfrm>
+          <a:prstGeom prst="rect">
+            <a:avLst/>
+          </a:prstGeom>
+          <a:noFill/>
+          <a:ln/>
+        </p:spPr>
+        <p:txBody>
+          <a:bodyPr wrap="square" lIns="0" tIns="0" rIns="0" bIns="0" rtlCol="0" anchor="ctr"/>
+          <a:lstStyle/>
+          <a:p>
+            <a:pPr indent="0" marL="0">
+              <a:buNone/>
+            </a:pPr>
+            <a:r>
+              <a:rPr lang="en-US" sz="2200" b="1" dirty="0">
+                <a:solidFill>
+                  <a:srgbClr val="22C55E"/>
+                </a:solidFill>
+                <a:latin typeface="Inter" pitchFamily="34" charset="0"/>
+                <a:ea typeface="Inter" pitchFamily="34" charset="-122"/>
+                <a:cs typeface="Inter" pitchFamily="34" charset="-120"/>
+              </a:rPr>
+              <a:t>$700–$900</a:t>
+            </a:r>
+            <a:pPr indent="0" marL="0">
+              <a:buNone/>
+            </a:pPr>
+            <a:r>
+              <a:rPr lang="en-US" sz="1100" dirty="0">
+                <a:solidFill>
+                  <a:srgbClr val="9CA3AF"/>
+                </a:solidFill>
+                <a:latin typeface="Inter" pitchFamily="34" charset="0"/>
+                <a:ea typeface="Inter" pitchFamily="34" charset="-122"/>
+                <a:cs typeface="Inter" pitchFamily="34" charset="-120"/>
+              </a:rPr>
+              <a:t>/mo</a:t>
+            </a:r>
+            <a:endParaRPr lang="en-US" sz="2200" dirty="0"/>
+          </a:p>
+        </p:txBody>
+      </p:sp>
+      <p:sp>
+        <p:nvSpPr>
+          <p:cNvPr id="16" name="Text 14"/>
+          <p:cNvSpPr/>
+          <p:nvPr/>
+        </p:nvSpPr>
+        <p:spPr>
+          <a:xfrm>
+            <a:off x="3657600" y="3337560"/>
+            <a:ext cx="2148840" cy="1097280"/>
+          </a:xfrm>
+          <a:prstGeom prst="rect">
+            <a:avLst/>
+          </a:prstGeom>
+          <a:noFill/>
+          <a:ln/>
+        </p:spPr>
+        <p:txBody>
+          <a:bodyPr wrap="square" lIns="0" tIns="0" rIns="0" bIns="0" rtlCol="0" anchor="ctr"/>
+          <a:lstStyle/>
+          <a:p>
+            <a:pPr marL="342900" indent="-342900">
+              <a:buSzPct val="100000"/>
+              <a:buChar char="•"/>
+            </a:pPr>
+            <a:r>
+              <a:rPr lang="en-US" sz="1000" dirty="0">
+                <a:solidFill>
+                  <a:srgbClr val="9CA3AF"/>
+                </a:solidFill>
+                <a:latin typeface="Inter" pitchFamily="34" charset="0"/>
+                <a:ea typeface="Inter" pitchFamily="34" charset="-122"/>
+                <a:cs typeface="Inter" pitchFamily="34" charset="-120"/>
+              </a:rPr>
+              <a:t>Premium website redesign</a:t>
+            </a:r>
+            <a:endParaRPr lang="en-US" sz="1000" dirty="0"/>
+          </a:p>
+          <a:p>
+            <a:pPr marL="342900" indent="-342900">
+              <a:buSzPct val="100000"/>
+              <a:buChar char="•"/>
+            </a:pPr>
+            <a:r>
+              <a:rPr lang="en-US" sz="1000" dirty="0">
+                <a:solidFill>
+                  <a:srgbClr val="9CA3AF"/>
+                </a:solidFill>
+                <a:latin typeface="Inter" pitchFamily="34" charset="0"/>
+                <a:ea typeface="Inter" pitchFamily="34" charset="-122"/>
+                <a:cs typeface="Inter" pitchFamily="34" charset="-120"/>
+              </a:rPr>
+              <a:t>Booking + analytics</a:t>
+            </a:r>
+            <a:endParaRPr lang="en-US" sz="1000" dirty="0"/>
+          </a:p>
+          <a:p>
+            <a:pPr marL="342900" indent="-342900">
+              <a:buSzPct val="100000"/>
+              <a:buChar char="•"/>
+            </a:pPr>
+            <a:r>
+              <a:rPr lang="en-US" sz="1000" dirty="0">
+                <a:solidFill>
+                  <a:srgbClr val="9CA3AF"/>
+                </a:solidFill>
+                <a:latin typeface="Inter" pitchFamily="34" charset="0"/>
+                <a:ea typeface="Inter" pitchFamily="34" charset="-122"/>
+                <a:cs typeface="Inter" pitchFamily="34" charset="-120"/>
+              </a:rPr>
+              <a:t>Quote form automation</a:t>
+            </a:r>
+            <a:endParaRPr lang="en-US" sz="1000" dirty="0"/>
+          </a:p>
+        </p:txBody>
+      </p:sp>
+      <p:sp>
+        <p:nvSpPr>
+          <p:cNvPr id="17" name="Shape 15"/>
+          <p:cNvSpPr/>
+          <p:nvPr/>
+        </p:nvSpPr>
+        <p:spPr>
+          <a:xfrm>
+            <a:off x="6309360" y="1920240"/>
+            <a:ext cx="2606040" cy="2834640"/>
           </a:xfrm>
           <a:prstGeom prst="rect">
             <a:avLst/>
           </a:prstGeom>
           <a:solidFill>
-            <a:srgbClr val="00C9A7">
-              <a:alpha val="40000"/>
-            </a:srgbClr>
+            <a:srgbClr val="FFFFFF"/>
           </a:solidFill>
           <a:ln/>
-        </p:spPr>
-      </p:sp>
-      <p:sp>
-        <p:nvSpPr>
-          <p:cNvPr id="7" name="Text 5"/>
-          <p:cNvSpPr/>
-          <p:nvPr/>
-        </p:nvSpPr>
-        <p:spPr>
-          <a:xfrm>
-            <a:off x="1554480" y="1709928"/>
-            <a:ext cx="2743200" cy="274320"/>
-          </a:xfrm>
-          <a:prstGeom prst="rect">
-            <a:avLst/>
-          </a:prstGeom>
-          <a:noFill/>
-          <a:ln/>
-        </p:spPr>
-        <p:txBody>
-          <a:bodyPr wrap="square" lIns="0" tIns="0" rIns="0" bIns="0" rtlCol="0" anchor="ctr"/>
-          <a:lstStyle/>
-          <a:p>
-            <a:pPr indent="0" marL="0">
-              <a:buNone/>
-            </a:pPr>
-            <a:r>
-              <a:rPr lang="en-US" sz="1500" b="1" dirty="0">
-                <a:solidFill>
-                  <a:srgbClr val="1E293B"/>
-                </a:solidFill>
-                <a:latin typeface="Trebuchet MS" pitchFamily="34" charset="0"/>
-                <a:ea typeface="Trebuchet MS" pitchFamily="34" charset="-122"/>
-                <a:cs typeface="Trebuchet MS" pitchFamily="34" charset="-120"/>
-              </a:rPr>
-              <a:t>Quote Bot</a:t>
-            </a:r>
-            <a:endParaRPr lang="en-US" sz="1500" dirty="0"/>
-          </a:p>
-        </p:txBody>
-      </p:sp>
-      <p:sp>
-        <p:nvSpPr>
-          <p:cNvPr id="8" name="Text 6"/>
-          <p:cNvSpPr/>
-          <p:nvPr/>
-        </p:nvSpPr>
-        <p:spPr>
-          <a:xfrm>
-            <a:off x="1554480" y="1984248"/>
-            <a:ext cx="6400800" cy="274320"/>
-          </a:xfrm>
-          <a:prstGeom prst="rect">
-            <a:avLst/>
-          </a:prstGeom>
-          <a:noFill/>
-          <a:ln/>
-        </p:spPr>
-        <p:txBody>
-          <a:bodyPr wrap="square" lIns="0" tIns="0" rIns="0" bIns="0" rtlCol="0" anchor="ctr"/>
-          <a:lstStyle/>
-          <a:p>
-            <a:pPr indent="0" marL="0">
-              <a:buNone/>
-            </a:pPr>
-            <a:r>
-              <a:rPr lang="en-US" sz="1100" dirty="0">
-                <a:solidFill>
-                  <a:srgbClr val="8896AB"/>
-                </a:solidFill>
-                <a:latin typeface="Calibri" pitchFamily="34" charset="0"/>
-                <a:ea typeface="Calibri" pitchFamily="34" charset="-122"/>
-                <a:cs typeface="Calibri" pitchFamily="34" charset="-120"/>
-              </a:rPr>
-              <a:t>Automated moving quote calculator on your website. Handles inquiries 24/7.</a:t>
-            </a:r>
-            <a:endParaRPr lang="en-US" sz="1100" dirty="0"/>
-          </a:p>
-        </p:txBody>
-      </p:sp>
-      <p:sp>
-        <p:nvSpPr>
-          <p:cNvPr id="9" name="Shape 7"/>
-          <p:cNvSpPr/>
-          <p:nvPr/>
-        </p:nvSpPr>
-        <p:spPr>
-          <a:xfrm>
-            <a:off x="731520" y="2532888"/>
-            <a:ext cx="548640" cy="548640"/>
-          </a:xfrm>
-          <a:prstGeom prst="ellipse">
+          <a:effectLst>
+            <a:outerShdw sx="100000" sy="100000" kx="0" ky="0" algn="bl" rotWithShape="0" blurRad="76200" dist="25400" dir="8100000">
+              <a:srgbClr val="000000">
+                <a:alpha val="15000"/>
+              </a:srgbClr>
+            </a:outerShdw>
+          </a:effectLst>
+        </p:spPr>
+      </p:sp>
+      <p:sp>
+        <p:nvSpPr>
+          <p:cNvPr id="18" name="Shape 16"/>
+          <p:cNvSpPr/>
+          <p:nvPr/>
+        </p:nvSpPr>
+        <p:spPr>
+          <a:xfrm>
+            <a:off x="6309360" y="1920240"/>
+            <a:ext cx="2606040" cy="54864"/>
+          </a:xfrm>
+          <a:prstGeom prst="rect">
             <a:avLst/>
           </a:prstGeom>
           <a:solidFill>
-            <a:srgbClr val="3B82F6"/>
+            <a:srgbClr val="000000"/>
           </a:solidFill>
           <a:ln/>
         </p:spPr>
       </p:sp>
       <p:sp>
         <p:nvSpPr>
-          <p:cNvPr id="10" name="Text 8"/>
-          <p:cNvSpPr/>
-          <p:nvPr/>
-        </p:nvSpPr>
-        <p:spPr>
-          <a:xfrm>
-            <a:off x="731520" y="2532888"/>
-            <a:ext cx="548640" cy="548640"/>
-          </a:xfrm>
-          <a:prstGeom prst="rect">
-            <a:avLst/>
-          </a:prstGeom>
-          <a:noFill/>
-          <a:ln/>
-        </p:spPr>
-        <p:txBody>
-          <a:bodyPr wrap="square" lIns="0" tIns="0" rIns="0" bIns="0" rtlCol="0" anchor="ctr"/>
-          <a:lstStyle/>
-          <a:p>
-            <a:pPr algn="ctr" indent="0" marL="0">
+          <p:cNvPr id="19" name="Text 17"/>
+          <p:cNvSpPr/>
+          <p:nvPr/>
+        </p:nvSpPr>
+        <p:spPr>
+          <a:xfrm>
+            <a:off x="6537960" y="2148840"/>
+            <a:ext cx="2148840" cy="320040"/>
+          </a:xfrm>
+          <a:prstGeom prst="rect">
+            <a:avLst/>
+          </a:prstGeom>
+          <a:noFill/>
+          <a:ln/>
+        </p:spPr>
+        <p:txBody>
+          <a:bodyPr wrap="square" lIns="0" tIns="0" rIns="0" bIns="0" rtlCol="0" anchor="ctr"/>
+          <a:lstStyle/>
+          <a:p>
+            <a:pPr indent="0" marL="0">
               <a:buNone/>
             </a:pPr>
             <a:r>
               <a:rPr lang="en-US" sz="1600" b="1" dirty="0">
                 <a:solidFill>
-                  <a:srgbClr val="FFFFFF"/>
-                </a:solidFill>
-                <a:latin typeface="Trebuchet MS" pitchFamily="34" charset="0"/>
-                <a:ea typeface="Trebuchet MS" pitchFamily="34" charset="-122"/>
-                <a:cs typeface="Trebuchet MS" pitchFamily="34" charset="-120"/>
-              </a:rPr>
-              <a:t>02</a:t>
+                  <a:srgbClr val="000000"/>
+                </a:solidFill>
+                <a:latin typeface="Inter" pitchFamily="34" charset="0"/>
+                <a:ea typeface="Inter" pitchFamily="34" charset="-122"/>
+                <a:cs typeface="Inter" pitchFamily="34" charset="-120"/>
+              </a:rPr>
+              <a:t>Premium</a:t>
             </a:r>
             <a:endParaRPr lang="en-US" sz="1600" dirty="0"/>
           </a:p>
@@ -3641,319 +4342,43 @@
       </p:sp>
       <p:sp>
         <p:nvSpPr>
-          <p:cNvPr id="11" name="Shape 9"/>
-          <p:cNvSpPr/>
-          <p:nvPr/>
-        </p:nvSpPr>
-        <p:spPr>
-          <a:xfrm>
-            <a:off x="978408" y="3081528"/>
-            <a:ext cx="54864" cy="292608"/>
-          </a:xfrm>
-          <a:prstGeom prst="rect">
-            <a:avLst/>
-          </a:prstGeom>
-          <a:solidFill>
-            <a:srgbClr val="3B82F6">
-              <a:alpha val="40000"/>
-            </a:srgbClr>
-          </a:solidFill>
-          <a:ln/>
-        </p:spPr>
-      </p:sp>
-      <p:sp>
-        <p:nvSpPr>
-          <p:cNvPr id="12" name="Text 10"/>
-          <p:cNvSpPr/>
-          <p:nvPr/>
-        </p:nvSpPr>
-        <p:spPr>
-          <a:xfrm>
-            <a:off x="1554480" y="2551176"/>
-            <a:ext cx="2743200" cy="274320"/>
-          </a:xfrm>
-          <a:prstGeom prst="rect">
-            <a:avLst/>
-          </a:prstGeom>
-          <a:noFill/>
-          <a:ln/>
-        </p:spPr>
-        <p:txBody>
-          <a:bodyPr wrap="square" lIns="0" tIns="0" rIns="0" bIns="0" rtlCol="0" anchor="ctr"/>
-          <a:lstStyle/>
-          <a:p>
-            <a:pPr indent="0" marL="0">
-              <a:buNone/>
-            </a:pPr>
-            <a:r>
-              <a:rPr lang="en-US" sz="1500" b="1" dirty="0">
-                <a:solidFill>
-                  <a:srgbClr val="1E293B"/>
-                </a:solidFill>
-                <a:latin typeface="Trebuchet MS" pitchFamily="34" charset="0"/>
-                <a:ea typeface="Trebuchet MS" pitchFamily="34" charset="-122"/>
-                <a:cs typeface="Trebuchet MS" pitchFamily="34" charset="-120"/>
-              </a:rPr>
-              <a:t>AI Secretary</a:t>
-            </a:r>
-            <a:endParaRPr lang="en-US" sz="1500" dirty="0"/>
-          </a:p>
-        </p:txBody>
-      </p:sp>
-      <p:sp>
-        <p:nvSpPr>
-          <p:cNvPr id="13" name="Text 11"/>
-          <p:cNvSpPr/>
-          <p:nvPr/>
-        </p:nvSpPr>
-        <p:spPr>
-          <a:xfrm>
-            <a:off x="1554480" y="2825496"/>
-            <a:ext cx="6400800" cy="274320"/>
-          </a:xfrm>
-          <a:prstGeom prst="rect">
-            <a:avLst/>
-          </a:prstGeom>
-          <a:noFill/>
-          <a:ln/>
-        </p:spPr>
-        <p:txBody>
-          <a:bodyPr wrap="square" lIns="0" tIns="0" rIns="0" bIns="0" rtlCol="0" anchor="ctr"/>
-          <a:lstStyle/>
-          <a:p>
-            <a:pPr indent="0" marL="0">
-              <a:buNone/>
-            </a:pPr>
-            <a:r>
-              <a:rPr lang="en-US" sz="1100" dirty="0">
-                <a:solidFill>
-                  <a:srgbClr val="8896AB"/>
-                </a:solidFill>
-                <a:latin typeface="Calibri" pitchFamily="34" charset="0"/>
-                <a:ea typeface="Calibri" pitchFamily="34" charset="-122"/>
-                <a:cs typeface="Calibri" pitchFamily="34" charset="-120"/>
-              </a:rPr>
-              <a:t>Answers calls, schedules appointments, routes urgent requests. Replaces front-desk staff.</a:t>
-            </a:r>
-            <a:endParaRPr lang="en-US" sz="1100" dirty="0"/>
-          </a:p>
-        </p:txBody>
-      </p:sp>
-      <p:sp>
-        <p:nvSpPr>
-          <p:cNvPr id="14" name="Shape 12"/>
-          <p:cNvSpPr/>
-          <p:nvPr/>
-        </p:nvSpPr>
-        <p:spPr>
-          <a:xfrm>
-            <a:off x="731520" y="3374136"/>
-            <a:ext cx="548640" cy="548640"/>
-          </a:xfrm>
-          <a:prstGeom prst="ellipse">
-            <a:avLst/>
-          </a:prstGeom>
-          <a:solidFill>
-            <a:srgbClr val="8B5CF6"/>
-          </a:solidFill>
-          <a:ln/>
-        </p:spPr>
-      </p:sp>
-      <p:sp>
-        <p:nvSpPr>
-          <p:cNvPr id="15" name="Text 13"/>
-          <p:cNvSpPr/>
-          <p:nvPr/>
-        </p:nvSpPr>
-        <p:spPr>
-          <a:xfrm>
-            <a:off x="731520" y="3374136"/>
-            <a:ext cx="548640" cy="548640"/>
-          </a:xfrm>
-          <a:prstGeom prst="rect">
-            <a:avLst/>
-          </a:prstGeom>
-          <a:noFill/>
-          <a:ln/>
-        </p:spPr>
-        <p:txBody>
-          <a:bodyPr wrap="square" lIns="0" tIns="0" rIns="0" bIns="0" rtlCol="0" anchor="ctr"/>
-          <a:lstStyle/>
-          <a:p>
-            <a:pPr algn="ctr" indent="0" marL="0">
-              <a:buNone/>
-            </a:pPr>
-            <a:r>
-              <a:rPr lang="en-US" sz="1600" b="1" dirty="0">
-                <a:solidFill>
-                  <a:srgbClr val="FFFFFF"/>
-                </a:solidFill>
-                <a:latin typeface="Trebuchet MS" pitchFamily="34" charset="0"/>
-                <a:ea typeface="Trebuchet MS" pitchFamily="34" charset="-122"/>
-                <a:cs typeface="Trebuchet MS" pitchFamily="34" charset="-120"/>
-              </a:rPr>
-              <a:t>03</a:t>
-            </a:r>
-            <a:endParaRPr lang="en-US" sz="1600" dirty="0"/>
-          </a:p>
-        </p:txBody>
-      </p:sp>
-      <p:sp>
-        <p:nvSpPr>
-          <p:cNvPr id="16" name="Shape 14"/>
-          <p:cNvSpPr/>
-          <p:nvPr/>
-        </p:nvSpPr>
-        <p:spPr>
-          <a:xfrm>
-            <a:off x="978408" y="3922776"/>
-            <a:ext cx="54864" cy="292608"/>
-          </a:xfrm>
-          <a:prstGeom prst="rect">
-            <a:avLst/>
-          </a:prstGeom>
-          <a:solidFill>
-            <a:srgbClr val="8B5CF6">
-              <a:alpha val="40000"/>
-            </a:srgbClr>
-          </a:solidFill>
-          <a:ln/>
-        </p:spPr>
-      </p:sp>
-      <p:sp>
-        <p:nvSpPr>
-          <p:cNvPr id="17" name="Text 15"/>
-          <p:cNvSpPr/>
-          <p:nvPr/>
-        </p:nvSpPr>
-        <p:spPr>
-          <a:xfrm>
-            <a:off x="1554480" y="3392424"/>
-            <a:ext cx="2743200" cy="274320"/>
-          </a:xfrm>
-          <a:prstGeom prst="rect">
-            <a:avLst/>
-          </a:prstGeom>
-          <a:noFill/>
-          <a:ln/>
-        </p:spPr>
-        <p:txBody>
-          <a:bodyPr wrap="square" lIns="0" tIns="0" rIns="0" bIns="0" rtlCol="0" anchor="ctr"/>
-          <a:lstStyle/>
-          <a:p>
-            <a:pPr indent="0" marL="0">
-              <a:buNone/>
-            </a:pPr>
-            <a:r>
-              <a:rPr lang="en-US" sz="1500" b="1" dirty="0">
-                <a:solidFill>
-                  <a:srgbClr val="1E293B"/>
-                </a:solidFill>
-                <a:latin typeface="Trebuchet MS" pitchFamily="34" charset="0"/>
-                <a:ea typeface="Trebuchet MS" pitchFamily="34" charset="-122"/>
-                <a:cs typeface="Trebuchet MS" pitchFamily="34" charset="-120"/>
-              </a:rPr>
-              <a:t>AI Sales Dept</a:t>
-            </a:r>
-            <a:endParaRPr lang="en-US" sz="1500" dirty="0"/>
-          </a:p>
-        </p:txBody>
-      </p:sp>
-      <p:sp>
-        <p:nvSpPr>
-          <p:cNvPr id="18" name="Text 16"/>
-          <p:cNvSpPr/>
-          <p:nvPr/>
-        </p:nvSpPr>
-        <p:spPr>
-          <a:xfrm>
-            <a:off x="1554480" y="3666744"/>
-            <a:ext cx="6400800" cy="274320"/>
-          </a:xfrm>
-          <a:prstGeom prst="rect">
-            <a:avLst/>
-          </a:prstGeom>
-          <a:noFill/>
-          <a:ln/>
-        </p:spPr>
-        <p:txBody>
-          <a:bodyPr wrap="square" lIns="0" tIns="0" rIns="0" bIns="0" rtlCol="0" anchor="ctr"/>
-          <a:lstStyle/>
-          <a:p>
-            <a:pPr indent="0" marL="0">
-              <a:buNone/>
-            </a:pPr>
-            <a:r>
-              <a:rPr lang="en-US" sz="1100" dirty="0">
-                <a:solidFill>
-                  <a:srgbClr val="8896AB"/>
-                </a:solidFill>
-                <a:latin typeface="Calibri" pitchFamily="34" charset="0"/>
-                <a:ea typeface="Calibri" pitchFamily="34" charset="-122"/>
-                <a:cs typeface="Calibri" pitchFamily="34" charset="-120"/>
-              </a:rPr>
-              <a:t>Outbound calls, follow-ups, upsells. Closes deals without human reps.</a:t>
-            </a:r>
-            <a:endParaRPr lang="en-US" sz="1100" dirty="0"/>
-          </a:p>
-        </p:txBody>
-      </p:sp>
-      <p:sp>
-        <p:nvSpPr>
-          <p:cNvPr id="19" name="Shape 17"/>
-          <p:cNvSpPr/>
-          <p:nvPr/>
-        </p:nvSpPr>
-        <p:spPr>
-          <a:xfrm>
-            <a:off x="731520" y="4215384"/>
-            <a:ext cx="548640" cy="548640"/>
-          </a:xfrm>
-          <a:prstGeom prst="ellipse">
-            <a:avLst/>
-          </a:prstGeom>
-          <a:solidFill>
-            <a:srgbClr val="EC4899"/>
-          </a:solidFill>
-          <a:ln/>
-        </p:spPr>
-      </p:sp>
-      <p:sp>
-        <p:nvSpPr>
           <p:cNvPr id="20" name="Text 18"/>
           <p:cNvSpPr/>
           <p:nvPr/>
         </p:nvSpPr>
         <p:spPr>
           <a:xfrm>
-            <a:off x="731520" y="4215384"/>
-            <a:ext cx="548640" cy="548640"/>
-          </a:xfrm>
-          <a:prstGeom prst="rect">
-            <a:avLst/>
-          </a:prstGeom>
-          <a:noFill/>
-          <a:ln/>
-        </p:spPr>
-        <p:txBody>
-          <a:bodyPr wrap="square" lIns="0" tIns="0" rIns="0" bIns="0" rtlCol="0" anchor="ctr"/>
-          <a:lstStyle/>
-          <a:p>
-            <a:pPr algn="ctr" indent="0" marL="0">
-              <a:buNone/>
-            </a:pPr>
-            <a:r>
-              <a:rPr lang="en-US" sz="1600" b="1" dirty="0">
-                <a:solidFill>
-                  <a:srgbClr val="FFFFFF"/>
-                </a:solidFill>
-                <a:latin typeface="Trebuchet MS" pitchFamily="34" charset="0"/>
-                <a:ea typeface="Trebuchet MS" pitchFamily="34" charset="-122"/>
-                <a:cs typeface="Trebuchet MS" pitchFamily="34" charset="-120"/>
-              </a:rPr>
-              <a:t>04</a:t>
-            </a:r>
-            <a:endParaRPr lang="en-US" sz="1600" dirty="0"/>
+            <a:off x="6537960" y="2514600"/>
+            <a:ext cx="2148840" cy="411480"/>
+          </a:xfrm>
+          <a:prstGeom prst="rect">
+            <a:avLst/>
+          </a:prstGeom>
+          <a:noFill/>
+          <a:ln/>
+        </p:spPr>
+        <p:txBody>
+          <a:bodyPr wrap="square" lIns="0" tIns="0" rIns="0" bIns="0" rtlCol="0" anchor="ctr"/>
+          <a:lstStyle/>
+          <a:p>
+            <a:pPr indent="0" marL="0">
+              <a:buNone/>
+            </a:pPr>
+            <a:r>
+              <a:rPr lang="en-US" sz="2200" b="1" dirty="0">
+                <a:solidFill>
+                  <a:srgbClr val="000000"/>
+                </a:solidFill>
+                <a:latin typeface="Inter" pitchFamily="34" charset="0"/>
+                <a:ea typeface="Inter" pitchFamily="34" charset="-122"/>
+                <a:cs typeface="Inter" pitchFamily="34" charset="-120"/>
+              </a:rPr>
+              <a:t>Custom</a:t>
+            </a:r>
+            <a:pPr indent="0" marL="0">
+              <a:buNone/>
+            </a:pPr>
+            <a:endParaRPr lang="en-US" sz="2200" dirty="0"/>
           </a:p>
         </p:txBody>
       </p:sp>
@@ -3965,34 +4390,71 @@
         </p:nvSpPr>
         <p:spPr>
           <a:xfrm>
-            <a:off x="1554480" y="4233672"/>
-            <a:ext cx="2743200" cy="274320"/>
-          </a:xfrm>
-          <a:prstGeom prst="rect">
-            <a:avLst/>
-          </a:prstGeom>
-          <a:noFill/>
-          <a:ln/>
-        </p:spPr>
-        <p:txBody>
-          <a:bodyPr wrap="square" lIns="0" tIns="0" rIns="0" bIns="0" rtlCol="0" anchor="ctr"/>
-          <a:lstStyle/>
-          <a:p>
-            <a:pPr indent="0" marL="0">
-              <a:buNone/>
-            </a:pPr>
-            <a:r>
-              <a:rPr lang="en-US" sz="1500" b="1" dirty="0">
-                <a:solidFill>
-                  <a:srgbClr val="1E293B"/>
-                </a:solidFill>
-                <a:latin typeface="Trebuchet MS" pitchFamily="34" charset="0"/>
-                <a:ea typeface="Trebuchet MS" pitchFamily="34" charset="-122"/>
-                <a:cs typeface="Trebuchet MS" pitchFamily="34" charset="-120"/>
-              </a:rPr>
-              <a:t>CRM &amp; Accounting</a:t>
-            </a:r>
-            <a:endParaRPr lang="en-US" sz="1500" dirty="0"/>
+            <a:off x="6537960" y="3063240"/>
+            <a:ext cx="2148840" cy="1097280"/>
+          </a:xfrm>
+          <a:prstGeom prst="rect">
+            <a:avLst/>
+          </a:prstGeom>
+          <a:noFill/>
+          <a:ln/>
+        </p:spPr>
+        <p:txBody>
+          <a:bodyPr wrap="square" lIns="0" tIns="0" rIns="0" bIns="0" rtlCol="0" anchor="ctr"/>
+          <a:lstStyle/>
+          <a:p>
+            <a:pPr marL="342900" indent="-342900">
+              <a:buSzPct val="100000"/>
+              <a:buChar char="•"/>
+            </a:pPr>
+            <a:r>
+              <a:rPr lang="en-US" sz="1000" dirty="0">
+                <a:solidFill>
+                  <a:srgbClr val="6B7280"/>
+                </a:solidFill>
+                <a:latin typeface="Inter" pitchFamily="34" charset="0"/>
+                <a:ea typeface="Inter" pitchFamily="34" charset="-122"/>
+                <a:cs typeface="Inter" pitchFamily="34" charset="-120"/>
+              </a:rPr>
+              <a:t>Everything in Growth</a:t>
+            </a:r>
+            <a:endParaRPr lang="en-US" sz="1000" dirty="0"/>
+          </a:p>
+          <a:p>
+            <a:pPr marL="342900" indent="-342900">
+              <a:buSzPct val="100000"/>
+              <a:buChar char="•"/>
+            </a:pPr>
+            <a:r>
+              <a:rPr lang="en-US" sz="1000" dirty="0">
+                <a:solidFill>
+                  <a:srgbClr val="6B7280"/>
+                </a:solidFill>
+                <a:latin typeface="Inter" pitchFamily="34" charset="0"/>
+                <a:ea typeface="Inter" pitchFamily="34" charset="-122"/>
+                <a:cs typeface="Inter" pitchFamily="34" charset="-120"/>
+              </a:rPr>
+              <a:t>24/7 AI Voice Agent</a:t>
+            </a:r>
+            <a:endParaRPr lang="en-US" sz="1000" dirty="0"/>
+          </a:p>
+          <a:p>
+            <a:pPr marL="342900" indent="-342900">
+              <a:buSzPct val="100000"/>
+              <a:buChar char="•"/>
+            </a:pPr>
+            <a:r>
+              <a:rPr lang="en-US" sz="1000" dirty="0">
+                <a:solidFill>
+                  <a:srgbClr val="6B7280"/>
+                </a:solidFill>
+                <a:latin typeface="Inter" pitchFamily="34" charset="0"/>
+                <a:ea typeface="Inter" pitchFamily="34" charset="-122"/>
+                <a:cs typeface="Inter" pitchFamily="34" charset="-120"/>
+              </a:rPr>
+              <a:t>Dedicated support + integrations</a:t>
+            </a:r>
+            <a:endParaRPr lang="en-US" sz="1000" dirty="0"/>
           </a:p>
         </p:txBody>
       </p:sp>
@@ -4004,34 +4466,34 @@
         </p:nvSpPr>
         <p:spPr>
           <a:xfrm>
-            <a:off x="1554480" y="4507992"/>
-            <a:ext cx="6400800" cy="274320"/>
-          </a:xfrm>
-          <a:prstGeom prst="rect">
-            <a:avLst/>
-          </a:prstGeom>
-          <a:noFill/>
-          <a:ln/>
-        </p:spPr>
-        <p:txBody>
-          <a:bodyPr wrap="square" lIns="0" tIns="0" rIns="0" bIns="0" rtlCol="0" anchor="ctr"/>
-          <a:lstStyle/>
-          <a:p>
-            <a:pPr indent="0" marL="0">
-              <a:buNone/>
-            </a:pPr>
-            <a:r>
-              <a:rPr lang="en-US" sz="1100" dirty="0">
-                <a:solidFill>
-                  <a:srgbClr val="8896AB"/>
-                </a:solidFill>
-                <a:latin typeface="Calibri" pitchFamily="34" charset="0"/>
-                <a:ea typeface="Calibri" pitchFamily="34" charset="-122"/>
-                <a:cs typeface="Calibri" pitchFamily="34" charset="-120"/>
-              </a:rPr>
-              <a:t>Unified customer database, invoicing, payments, financial reporting — all automated.</a:t>
-            </a:r>
-            <a:endParaRPr lang="en-US" sz="1100" dirty="0"/>
+            <a:off x="731520" y="4526280"/>
+            <a:ext cx="7772400" cy="320040"/>
+          </a:xfrm>
+          <a:prstGeom prst="rect">
+            <a:avLst/>
+          </a:prstGeom>
+          <a:noFill/>
+          <a:ln/>
+        </p:spPr>
+        <p:txBody>
+          <a:bodyPr wrap="square" lIns="0" tIns="0" rIns="0" bIns="0" rtlCol="0" anchor="ctr"/>
+          <a:lstStyle/>
+          <a:p>
+            <a:pPr indent="0" marL="0">
+              <a:buNone/>
+            </a:pPr>
+            <a:r>
+              <a:rPr lang="en-US" sz="1000" i="1" dirty="0">
+                <a:solidFill>
+                  <a:srgbClr val="6B7280"/>
+                </a:solidFill>
+                <a:latin typeface="Inter" pitchFamily="34" charset="0"/>
+                <a:ea typeface="Inter" pitchFamily="34" charset="-122"/>
+                <a:cs typeface="Inter" pitchFamily="34" charset="-120"/>
+              </a:rPr>
+              <a:t>Add-ons: marketing platform, Google Calendar sync, WhatsApp management, SEO</a:t>
+            </a:r>
+            <a:endParaRPr lang="en-US" sz="1000" dirty="0"/>
           </a:p>
         </p:txBody>
       </p:sp>
@@ -4049,7 +4511,7 @@
     <p:bg>
       <p:bgPr>
         <a:solidFill>
-          <a:srgbClr val="0A1628"/>
+          <a:srgbClr val="000000"/>
         </a:solidFill>
       </p:bgPr>
     </p:bg>
@@ -4094,13 +4556,13 @@
             <a:r>
               <a:rPr lang="en-US" sz="1200" b="1" spc="400" kern="0" dirty="0">
                 <a:solidFill>
-                  <a:srgbClr val="00C9A7"/>
-                </a:solidFill>
-                <a:latin typeface="Trebuchet MS" pitchFamily="34" charset="0"/>
-                <a:ea typeface="Trebuchet MS" pitchFamily="34" charset="-122"/>
-                <a:cs typeface="Trebuchet MS" pitchFamily="34" charset="-120"/>
-              </a:rPr>
-              <a:t>AI VOICE AGENTS</a:t>
+                  <a:srgbClr val="22C55E"/>
+                </a:solidFill>
+                <a:latin typeface="Inter" pitchFamily="34" charset="0"/>
+                <a:ea typeface="Inter" pitchFamily="34" charset="-122"/>
+                <a:cs typeface="Inter" pitchFamily="34" charset="-120"/>
+              </a:rPr>
+              <a:t>AI CONCIERGE</a:t>
             </a:r>
             <a:endParaRPr lang="en-US" sz="1200" dirty="0"/>
           </a:p>
@@ -4135,11 +4597,11 @@
                 <a:solidFill>
                   <a:srgbClr val="FFFFFF"/>
                 </a:solidFill>
-                <a:latin typeface="Trebuchet MS" pitchFamily="34" charset="0"/>
-                <a:ea typeface="Trebuchet MS" pitchFamily="34" charset="-122"/>
-                <a:cs typeface="Trebuchet MS" pitchFamily="34" charset="-120"/>
-              </a:rPr>
-              <a:t>Replace Your Call Center</a:t>
+                <a:latin typeface="Inter" pitchFamily="34" charset="0"/>
+                <a:ea typeface="Inter" pitchFamily="34" charset="-122"/>
+                <a:cs typeface="Inter" pitchFamily="34" charset="-120"/>
+              </a:rPr>
+              <a:t>A Dedicated Phone Line</a:t>
             </a:r>
             <a:endParaRPr lang="en-US" sz="3000" dirty="0"/>
           </a:p>
@@ -4152,11 +4614,11 @@
                 <a:solidFill>
                   <a:srgbClr val="FFFFFF"/>
                 </a:solidFill>
-                <a:latin typeface="Trebuchet MS" pitchFamily="34" charset="0"/>
-                <a:ea typeface="Trebuchet MS" pitchFamily="34" charset="-122"/>
-                <a:cs typeface="Trebuchet MS" pitchFamily="34" charset="-120"/>
-              </a:rPr>
-              <a:t>With AI That Never Sleeps</a:t>
+                <a:latin typeface="Inter" pitchFamily="34" charset="0"/>
+                <a:ea typeface="Inter" pitchFamily="34" charset="-122"/>
+                <a:cs typeface="Inter" pitchFamily="34" charset="-120"/>
+              </a:rPr>
+              <a:t>That Never Goes to Voicemail</a:t>
             </a:r>
             <a:endParaRPr lang="en-US" sz="3000" dirty="0"/>
           </a:p>
@@ -4164,20 +4626,62 @@
       </p:sp>
       <p:sp>
         <p:nvSpPr>
-          <p:cNvPr id="4" name="Shape 2"/>
-          <p:cNvSpPr/>
-          <p:nvPr/>
-        </p:nvSpPr>
-        <p:spPr>
-          <a:xfrm>
-            <a:off x="731520" y="2011680"/>
-            <a:ext cx="3657600" cy="2560320"/>
+          <p:cNvPr id="4" name="Text 2"/>
+          <p:cNvSpPr/>
+          <p:nvPr/>
+        </p:nvSpPr>
+        <p:spPr>
+          <a:xfrm>
+            <a:off x="731520" y="1874520"/>
+            <a:ext cx="7315200" cy="640080"/>
+          </a:xfrm>
+          <a:prstGeom prst="rect">
+            <a:avLst/>
+          </a:prstGeom>
+          <a:noFill/>
+          <a:ln/>
+        </p:spPr>
+        <p:txBody>
+          <a:bodyPr wrap="square" lIns="0" tIns="0" rIns="0" bIns="0" rtlCol="0" anchor="ctr"/>
+          <a:lstStyle/>
+          <a:p>
+            <a:pPr indent="0" marL="0">
+              <a:lnSpc>
+                <a:spcPct val="140000"/>
+              </a:lnSpc>
+              <a:buNone/>
+            </a:pPr>
+            <a:r>
+              <a:rPr lang="en-US" sz="1200" dirty="0">
+                <a:solidFill>
+                  <a:srgbClr val="6B7280"/>
+                </a:solidFill>
+                <a:latin typeface="Inter" pitchFamily="34" charset="0"/>
+                <a:ea typeface="Inter" pitchFamily="34" charset="-122"/>
+                <a:cs typeface="Inter" pitchFamily="34" charset="-120"/>
+              </a:rPr>
+              <a:t>Your customers call a real phone number. Our AI answers instantly, handles the conversation naturally, collects move details, and gives an accurate quote — all without a human on the line.</a:t>
+            </a:r>
+            <a:endParaRPr lang="en-US" sz="1200" dirty="0"/>
+          </a:p>
+        </p:txBody>
+      </p:sp>
+      <p:sp>
+        <p:nvSpPr>
+          <p:cNvPr id="5" name="Shape 3"/>
+          <p:cNvSpPr/>
+          <p:nvPr/>
+        </p:nvSpPr>
+        <p:spPr>
+          <a:xfrm>
+            <a:off x="731520" y="2743200"/>
+            <a:ext cx="3657600" cy="2011680"/>
           </a:xfrm>
           <a:prstGeom prst="rect">
             <a:avLst/>
           </a:prstGeom>
           <a:solidFill>
-            <a:srgbClr val="132240"/>
+            <a:srgbClr val="111111"/>
           </a:solidFill>
           <a:ln/>
           <a:effectLst>
@@ -4191,7 +4695,7 @@
       </p:sp>
       <p:pic>
         <p:nvPicPr>
-          <p:cNvPr id="5" name="Image 0" descr="preencoded.png">    </p:cNvPr>
+          <p:cNvPr id="6" name="Image 0" descr="preencoded.png">    </p:cNvPr>
           <p:cNvPicPr>
             <a:picLocks noChangeAspect="1"/>
           </p:cNvPicPr>
@@ -4205,7 +4709,7 @@
         </p:blipFill>
         <p:spPr>
           <a:xfrm>
-            <a:off x="1005840" y="2240280"/>
+            <a:off x="1005840" y="2926080"/>
             <a:ext cx="411480" cy="411480"/>
           </a:xfrm>
           <a:prstGeom prst="rect">
@@ -4215,13 +4719,13 @@
       </p:pic>
       <p:sp>
         <p:nvSpPr>
-          <p:cNvPr id="6" name="Text 3"/>
-          <p:cNvSpPr/>
-          <p:nvPr/>
-        </p:nvSpPr>
-        <p:spPr>
-          <a:xfrm>
-            <a:off x="1554480" y="2240280"/>
+          <p:cNvPr id="7" name="Text 4"/>
+          <p:cNvSpPr/>
+          <p:nvPr/>
+        </p:nvSpPr>
+        <p:spPr>
+          <a:xfrm>
+            <a:off x="1554480" y="2926080"/>
             <a:ext cx="2560320" cy="365760"/>
           </a:xfrm>
           <a:prstGeom prst="rect">
@@ -4242,9 +4746,9 @@
                 <a:solidFill>
                   <a:srgbClr val="FFFFFF"/>
                 </a:solidFill>
-                <a:latin typeface="Trebuchet MS" pitchFamily="34" charset="0"/>
-                <a:ea typeface="Trebuchet MS" pitchFamily="34" charset="-122"/>
-                <a:cs typeface="Trebuchet MS" pitchFamily="34" charset="-120"/>
+                <a:latin typeface="Inter" pitchFamily="34" charset="0"/>
+                <a:ea typeface="Inter" pitchFamily="34" charset="-122"/>
+                <a:cs typeface="Inter" pitchFamily="34" charset="-120"/>
               </a:rPr>
               <a:t>Inbound Calls</a:t>
             </a:r>
@@ -4254,14 +4758,14 @@
       </p:sp>
       <p:sp>
         <p:nvSpPr>
-          <p:cNvPr id="7" name="Text 4"/>
-          <p:cNvSpPr/>
-          <p:nvPr/>
-        </p:nvSpPr>
-        <p:spPr>
-          <a:xfrm>
-            <a:off x="1005840" y="2834640"/>
-            <a:ext cx="3108960" cy="1554480"/>
+          <p:cNvPr id="8" name="Text 5"/>
+          <p:cNvSpPr/>
+          <p:nvPr/>
+        </p:nvSpPr>
+        <p:spPr>
+          <a:xfrm>
+            <a:off x="1005840" y="3474720"/>
+            <a:ext cx="3108960" cy="1188720"/>
           </a:xfrm>
           <a:prstGeom prst="rect">
             <a:avLst/>
@@ -4280,13 +4784,13 @@
             <a:r>
               <a:rPr lang="en-US" sz="1100" dirty="0">
                 <a:solidFill>
-                  <a:srgbClr val="8896AB"/>
-                </a:solidFill>
-                <a:latin typeface="Calibri" pitchFamily="34" charset="0"/>
-                <a:ea typeface="Calibri" pitchFamily="34" charset="-122"/>
-                <a:cs typeface="Calibri" pitchFamily="34" charset="-120"/>
-              </a:rPr>
-              <a:t>Answers every call instantly</a:t>
+                  <a:srgbClr val="6B7280"/>
+                </a:solidFill>
+                <a:latin typeface="Inter" pitchFamily="34" charset="0"/>
+                <a:ea typeface="Inter" pitchFamily="34" charset="-122"/>
+                <a:cs typeface="Inter" pitchFamily="34" charset="-120"/>
+              </a:rPr>
+              <a:t>Answers every call on the first ring</a:t>
             </a:r>
             <a:endParaRPr lang="en-US" sz="1100" dirty="0"/>
           </a:p>
@@ -4298,13 +4802,13 @@
             <a:r>
               <a:rPr lang="en-US" sz="1100" dirty="0">
                 <a:solidFill>
-                  <a:srgbClr val="8896AB"/>
-                </a:solidFill>
-                <a:latin typeface="Calibri" pitchFamily="34" charset="0"/>
-                <a:ea typeface="Calibri" pitchFamily="34" charset="-122"/>
-                <a:cs typeface="Calibri" pitchFamily="34" charset="-120"/>
-              </a:rPr>
-              <a:t>Provides quotes in real-time</a:t>
+                  <a:srgbClr val="6B7280"/>
+                </a:solidFill>
+                <a:latin typeface="Inter" pitchFamily="34" charset="0"/>
+                <a:ea typeface="Inter" pitchFamily="34" charset="-122"/>
+                <a:cs typeface="Inter" pitchFamily="34" charset="-120"/>
+              </a:rPr>
+              <a:t>Provides real-time quotes over the phone</a:t>
             </a:r>
             <a:endParaRPr lang="en-US" sz="1100" dirty="0"/>
           </a:p>
@@ -4316,13 +4820,13 @@
             <a:r>
               <a:rPr lang="en-US" sz="1100" dirty="0">
                 <a:solidFill>
-                  <a:srgbClr val="8896AB"/>
-                </a:solidFill>
-                <a:latin typeface="Calibri" pitchFamily="34" charset="0"/>
-                <a:ea typeface="Calibri" pitchFamily="34" charset="-122"/>
-                <a:cs typeface="Calibri" pitchFamily="34" charset="-120"/>
-              </a:rPr>
-              <a:t>Schedules on-site estimates</a:t>
+                  <a:srgbClr val="6B7280"/>
+                </a:solidFill>
+                <a:latin typeface="Inter" pitchFamily="34" charset="0"/>
+                <a:ea typeface="Inter" pitchFamily="34" charset="-122"/>
+                <a:cs typeface="Inter" pitchFamily="34" charset="-120"/>
+              </a:rPr>
+              <a:t>Books on-site estimates automatically</a:t>
             </a:r>
             <a:endParaRPr lang="en-US" sz="1100" dirty="0"/>
           </a:p>
@@ -4334,13 +4838,13 @@
             <a:r>
               <a:rPr lang="en-US" sz="1100" dirty="0">
                 <a:solidFill>
-                  <a:srgbClr val="8896AB"/>
-                </a:solidFill>
-                <a:latin typeface="Calibri" pitchFamily="34" charset="0"/>
-                <a:ea typeface="Calibri" pitchFamily="34" charset="-122"/>
-                <a:cs typeface="Calibri" pitchFamily="34" charset="-120"/>
-              </a:rPr>
-              <a:t>Handles complaints &amp; routing</a:t>
+                  <a:srgbClr val="6B7280"/>
+                </a:solidFill>
+                <a:latin typeface="Inter" pitchFamily="34" charset="0"/>
+                <a:ea typeface="Inter" pitchFamily="34" charset="-122"/>
+                <a:cs typeface="Inter" pitchFamily="34" charset="-120"/>
+              </a:rPr>
+              <a:t>Routes urgent calls to your team</a:t>
             </a:r>
             <a:endParaRPr lang="en-US" sz="1100" dirty="0"/>
           </a:p>
@@ -4348,20 +4852,20 @@
       </p:sp>
       <p:sp>
         <p:nvSpPr>
-          <p:cNvPr id="8" name="Shape 5"/>
-          <p:cNvSpPr/>
-          <p:nvPr/>
-        </p:nvSpPr>
-        <p:spPr>
-          <a:xfrm>
-            <a:off x="4754880" y="2011680"/>
-            <a:ext cx="3657600" cy="2560320"/>
+          <p:cNvPr id="9" name="Shape 6"/>
+          <p:cNvSpPr/>
+          <p:nvPr/>
+        </p:nvSpPr>
+        <p:spPr>
+          <a:xfrm>
+            <a:off x="4754880" y="2743200"/>
+            <a:ext cx="3657600" cy="2011680"/>
           </a:xfrm>
           <a:prstGeom prst="rect">
             <a:avLst/>
           </a:prstGeom>
           <a:solidFill>
-            <a:srgbClr val="132240"/>
+            <a:srgbClr val="111111"/>
           </a:solidFill>
           <a:ln/>
           <a:effectLst>
@@ -4375,7 +4879,7 @@
       </p:sp>
       <p:pic>
         <p:nvPicPr>
-          <p:cNvPr id="9" name="Image 1" descr="preencoded.png">    </p:cNvPr>
+          <p:cNvPr id="10" name="Image 1" descr="preencoded.png">    </p:cNvPr>
           <p:cNvPicPr>
             <a:picLocks noChangeAspect="1"/>
           </p:cNvPicPr>
@@ -4389,7 +4893,7 @@
         </p:blipFill>
         <p:spPr>
           <a:xfrm>
-            <a:off x="5029200" y="2240280"/>
+            <a:off x="5029200" y="2926080"/>
             <a:ext cx="411480" cy="411480"/>
           </a:xfrm>
           <a:prstGeom prst="rect">
@@ -4399,13 +4903,13 @@
       </p:pic>
       <p:sp>
         <p:nvSpPr>
-          <p:cNvPr id="10" name="Text 6"/>
-          <p:cNvSpPr/>
-          <p:nvPr/>
-        </p:nvSpPr>
-        <p:spPr>
-          <a:xfrm>
-            <a:off x="5577840" y="2240280"/>
+          <p:cNvPr id="11" name="Text 7"/>
+          <p:cNvSpPr/>
+          <p:nvPr/>
+        </p:nvSpPr>
+        <p:spPr>
+          <a:xfrm>
+            <a:off x="5577840" y="2926080"/>
             <a:ext cx="2560320" cy="365760"/>
           </a:xfrm>
           <a:prstGeom prst="rect">
@@ -4426,9 +4930,9 @@
                 <a:solidFill>
                   <a:srgbClr val="FFFFFF"/>
                 </a:solidFill>
-                <a:latin typeface="Trebuchet MS" pitchFamily="34" charset="0"/>
-                <a:ea typeface="Trebuchet MS" pitchFamily="34" charset="-122"/>
-                <a:cs typeface="Trebuchet MS" pitchFamily="34" charset="-120"/>
+                <a:latin typeface="Inter" pitchFamily="34" charset="0"/>
+                <a:ea typeface="Inter" pitchFamily="34" charset="-122"/>
+                <a:cs typeface="Inter" pitchFamily="34" charset="-120"/>
               </a:rPr>
               <a:t>Outbound Calls</a:t>
             </a:r>
@@ -4438,14 +4942,14 @@
       </p:sp>
       <p:sp>
         <p:nvSpPr>
-          <p:cNvPr id="11" name="Text 7"/>
-          <p:cNvSpPr/>
-          <p:nvPr/>
-        </p:nvSpPr>
-        <p:spPr>
-          <a:xfrm>
-            <a:off x="5029200" y="2834640"/>
-            <a:ext cx="3108960" cy="1554480"/>
+          <p:cNvPr id="12" name="Text 8"/>
+          <p:cNvSpPr/>
+          <p:nvPr/>
+        </p:nvSpPr>
+        <p:spPr>
+          <a:xfrm>
+            <a:off x="5029200" y="3474720"/>
+            <a:ext cx="3108960" cy="1188720"/>
           </a:xfrm>
           <a:prstGeom prst="rect">
             <a:avLst/>
@@ -4464,13 +4968,13 @@
             <a:r>
               <a:rPr lang="en-US" sz="1100" dirty="0">
                 <a:solidFill>
-                  <a:srgbClr val="8896AB"/>
-                </a:solidFill>
-                <a:latin typeface="Calibri" pitchFamily="34" charset="0"/>
-                <a:ea typeface="Calibri" pitchFamily="34" charset="-122"/>
-                <a:cs typeface="Calibri" pitchFamily="34" charset="-120"/>
-              </a:rPr>
-              <a:t>Follow-up on pending quotes</a:t>
+                  <a:srgbClr val="6B7280"/>
+                </a:solidFill>
+                <a:latin typeface="Inter" pitchFamily="34" charset="0"/>
+                <a:ea typeface="Inter" pitchFamily="34" charset="-122"/>
+                <a:cs typeface="Inter" pitchFamily="34" charset="-120"/>
+              </a:rPr>
+              <a:t>Follows up on pending quotes</a:t>
             </a:r>
             <a:endParaRPr lang="en-US" sz="1100" dirty="0"/>
           </a:p>
@@ -4482,13 +4986,13 @@
             <a:r>
               <a:rPr lang="en-US" sz="1100" dirty="0">
                 <a:solidFill>
-                  <a:srgbClr val="8896AB"/>
-                </a:solidFill>
-                <a:latin typeface="Calibri" pitchFamily="34" charset="0"/>
-                <a:ea typeface="Calibri" pitchFamily="34" charset="-122"/>
-                <a:cs typeface="Calibri" pitchFamily="34" charset="-120"/>
-              </a:rPr>
-              <a:t>Confirm bookings &amp; details</a:t>
+                  <a:srgbClr val="6B7280"/>
+                </a:solidFill>
+                <a:latin typeface="Inter" pitchFamily="34" charset="0"/>
+                <a:ea typeface="Inter" pitchFamily="34" charset="-122"/>
+                <a:cs typeface="Inter" pitchFamily="34" charset="-120"/>
+              </a:rPr>
+              <a:t>Confirms bookings and move details</a:t>
             </a:r>
             <a:endParaRPr lang="en-US" sz="1100" dirty="0"/>
           </a:p>
@@ -4500,13 +5004,13 @@
             <a:r>
               <a:rPr lang="en-US" sz="1100" dirty="0">
                 <a:solidFill>
-                  <a:srgbClr val="8896AB"/>
-                </a:solidFill>
-                <a:latin typeface="Calibri" pitchFamily="34" charset="0"/>
-                <a:ea typeface="Calibri" pitchFamily="34" charset="-122"/>
-                <a:cs typeface="Calibri" pitchFamily="34" charset="-120"/>
-              </a:rPr>
-              <a:t>Collect post-move feedback</a:t>
+                  <a:srgbClr val="6B7280"/>
+                </a:solidFill>
+                <a:latin typeface="Inter" pitchFamily="34" charset="0"/>
+                <a:ea typeface="Inter" pitchFamily="34" charset="-122"/>
+                <a:cs typeface="Inter" pitchFamily="34" charset="-120"/>
+              </a:rPr>
+              <a:t>Collects post-move reviews</a:t>
             </a:r>
             <a:endParaRPr lang="en-US" sz="1100" dirty="0"/>
           </a:p>
@@ -4518,13 +5022,13 @@
             <a:r>
               <a:rPr lang="en-US" sz="1100" dirty="0">
                 <a:solidFill>
-                  <a:srgbClr val="8896AB"/>
-                </a:solidFill>
-                <a:latin typeface="Calibri" pitchFamily="34" charset="0"/>
-                <a:ea typeface="Calibri" pitchFamily="34" charset="-122"/>
-                <a:cs typeface="Calibri" pitchFamily="34" charset="-120"/>
-              </a:rPr>
-              <a:t>Upsell packing &amp; storage</a:t>
+                  <a:srgbClr val="6B7280"/>
+                </a:solidFill>
+                <a:latin typeface="Inter" pitchFamily="34" charset="0"/>
+                <a:ea typeface="Inter" pitchFamily="34" charset="-122"/>
+                <a:cs typeface="Inter" pitchFamily="34" charset="-120"/>
+              </a:rPr>
+              <a:t>Upsells packing and storage services</a:t>
             </a:r>
             <a:endParaRPr lang="en-US" sz="1100" dirty="0"/>
           </a:p>
@@ -4544,7 +5048,7 @@
     <p:bg>
       <p:bgPr>
         <a:solidFill>
-          <a:srgbClr val="F4F6FA"/>
+          <a:srgbClr val="F5F5F5"/>
         </a:solidFill>
       </p:bgPr>
     </p:bg>
@@ -4589,13 +5093,13 @@
             <a:r>
               <a:rPr lang="en-US" sz="1200" b="1" spc="400" kern="0" dirty="0">
                 <a:solidFill>
-                  <a:srgbClr val="00C9A7"/>
-                </a:solidFill>
-                <a:latin typeface="Trebuchet MS" pitchFamily="34" charset="0"/>
-                <a:ea typeface="Trebuchet MS" pitchFamily="34" charset="-122"/>
-                <a:cs typeface="Trebuchet MS" pitchFamily="34" charset="-120"/>
-              </a:rPr>
-              <a:t>THE NUMBERS</a:t>
+                  <a:srgbClr val="22C55E"/>
+                </a:solidFill>
+                <a:latin typeface="Inter" pitchFamily="34" charset="0"/>
+                <a:ea typeface="Inter" pitchFamily="34" charset="-122"/>
+                <a:cs typeface="Inter" pitchFamily="34" charset="-120"/>
+              </a:rPr>
+              <a:t>THE ROADMAP</a:t>
             </a:r>
             <a:endParaRPr lang="en-US" sz="1200" dirty="0"/>
           </a:p>
@@ -4626,17 +5130,17 @@
               <a:buNone/>
             </a:pPr>
             <a:r>
-              <a:rPr lang="en-US" sz="2800" b="1" dirty="0">
-                <a:solidFill>
-                  <a:srgbClr val="1E293B"/>
-                </a:solidFill>
-                <a:latin typeface="Trebuchet MS" pitchFamily="34" charset="0"/>
-                <a:ea typeface="Trebuchet MS" pitchFamily="34" charset="-122"/>
-                <a:cs typeface="Trebuchet MS" pitchFamily="34" charset="-120"/>
-              </a:rPr>
-              <a:t>What Automation Means for Your Bottom Line</a:t>
-            </a:r>
-            <a:endParaRPr lang="en-US" sz="2800" dirty="0"/>
+              <a:rPr lang="en-US" sz="3000" b="1" dirty="0">
+                <a:solidFill>
+                  <a:srgbClr val="000000"/>
+                </a:solidFill>
+                <a:latin typeface="Inter" pitchFamily="34" charset="0"/>
+                <a:ea typeface="Inter" pitchFamily="34" charset="-122"/>
+                <a:cs typeface="Inter" pitchFamily="34" charset="-120"/>
+              </a:rPr>
+              <a:t>From First Quote to Full Automation</a:t>
+            </a:r>
+            <a:endParaRPr lang="en-US" sz="3000" dirty="0"/>
           </a:p>
         </p:txBody>
       </p:sp>
@@ -4648,55 +5152,187 @@
         </p:nvSpPr>
         <p:spPr>
           <a:xfrm>
-            <a:off x="457200" y="1737360"/>
-            <a:ext cx="1920240" cy="2194560"/>
-          </a:xfrm>
-          <a:prstGeom prst="rect">
+            <a:off x="731520" y="1691640"/>
+            <a:ext cx="548640" cy="548640"/>
+          </a:xfrm>
+          <a:prstGeom prst="ellipse">
             <a:avLst/>
           </a:prstGeom>
           <a:solidFill>
-            <a:srgbClr val="FFFFFF"/>
+            <a:srgbClr val="22C55E"/>
           </a:solidFill>
           <a:ln/>
-          <a:effectLst>
-            <a:outerShdw sx="100000" sy="100000" kx="0" ky="0" algn="bl" rotWithShape="0" blurRad="76200" dist="25400" dir="8100000">
-              <a:srgbClr val="000000">
-                <a:alpha val="15000"/>
-              </a:srgbClr>
-            </a:outerShdw>
-          </a:effectLst>
-        </p:spPr>
-      </p:sp>
-      <p:sp>
-        <p:nvSpPr>
-          <p:cNvPr id="5" name="Shape 3"/>
-          <p:cNvSpPr/>
-          <p:nvPr/>
-        </p:nvSpPr>
-        <p:spPr>
-          <a:xfrm>
-            <a:off x="457200" y="1737360"/>
-            <a:ext cx="1920240" cy="54864"/>
+        </p:spPr>
+      </p:sp>
+      <p:sp>
+        <p:nvSpPr>
+          <p:cNvPr id="5" name="Text 3"/>
+          <p:cNvSpPr/>
+          <p:nvPr/>
+        </p:nvSpPr>
+        <p:spPr>
+          <a:xfrm>
+            <a:off x="731520" y="1691640"/>
+            <a:ext cx="548640" cy="548640"/>
+          </a:xfrm>
+          <a:prstGeom prst="rect">
+            <a:avLst/>
+          </a:prstGeom>
+          <a:noFill/>
+          <a:ln/>
+        </p:spPr>
+        <p:txBody>
+          <a:bodyPr wrap="square" lIns="0" tIns="0" rIns="0" bIns="0" rtlCol="0" anchor="ctr"/>
+          <a:lstStyle/>
+          <a:p>
+            <a:pPr algn="ctr" indent="0" marL="0">
+              <a:buNone/>
+            </a:pPr>
+            <a:r>
+              <a:rPr lang="en-US" sz="1600" b="1" dirty="0">
+                <a:solidFill>
+                  <a:srgbClr val="FFFFFF"/>
+                </a:solidFill>
+                <a:latin typeface="Inter" pitchFamily="34" charset="0"/>
+                <a:ea typeface="Inter" pitchFamily="34" charset="-122"/>
+                <a:cs typeface="Inter" pitchFamily="34" charset="-120"/>
+              </a:rPr>
+              <a:t>01</a:t>
+            </a:r>
+            <a:endParaRPr lang="en-US" sz="1600" dirty="0"/>
+          </a:p>
+        </p:txBody>
+      </p:sp>
+      <p:sp>
+        <p:nvSpPr>
+          <p:cNvPr id="6" name="Shape 4"/>
+          <p:cNvSpPr/>
+          <p:nvPr/>
+        </p:nvSpPr>
+        <p:spPr>
+          <a:xfrm>
+            <a:off x="978408" y="2240280"/>
+            <a:ext cx="54864" cy="292608"/>
           </a:xfrm>
           <a:prstGeom prst="rect">
             <a:avLst/>
           </a:prstGeom>
           <a:solidFill>
-            <a:srgbClr val="00C9A7"/>
+            <a:srgbClr val="22C55E">
+              <a:alpha val="40000"/>
+            </a:srgbClr>
           </a:solidFill>
           <a:ln/>
         </p:spPr>
       </p:sp>
       <p:sp>
         <p:nvSpPr>
-          <p:cNvPr id="6" name="Text 4"/>
-          <p:cNvSpPr/>
-          <p:nvPr/>
-        </p:nvSpPr>
-        <p:spPr>
-          <a:xfrm>
-            <a:off x="457200" y="2057400"/>
-            <a:ext cx="1920240" cy="731520"/>
+          <p:cNvPr id="7" name="Text 5"/>
+          <p:cNvSpPr/>
+          <p:nvPr/>
+        </p:nvSpPr>
+        <p:spPr>
+          <a:xfrm>
+            <a:off x="1554480" y="1709928"/>
+            <a:ext cx="2743200" cy="274320"/>
+          </a:xfrm>
+          <a:prstGeom prst="rect">
+            <a:avLst/>
+          </a:prstGeom>
+          <a:noFill/>
+          <a:ln/>
+        </p:spPr>
+        <p:txBody>
+          <a:bodyPr wrap="square" lIns="0" tIns="0" rIns="0" bIns="0" rtlCol="0" anchor="ctr"/>
+          <a:lstStyle/>
+          <a:p>
+            <a:pPr indent="0" marL="0">
+              <a:buNone/>
+            </a:pPr>
+            <a:r>
+              <a:rPr lang="en-US" sz="1500" b="1" dirty="0">
+                <a:solidFill>
+                  <a:srgbClr val="000000"/>
+                </a:solidFill>
+                <a:latin typeface="Inter" pitchFamily="34" charset="0"/>
+                <a:ea typeface="Inter" pitchFamily="34" charset="-122"/>
+                <a:cs typeface="Inter" pitchFamily="34" charset="-120"/>
+              </a:rPr>
+              <a:t>Smart Quote Form</a:t>
+            </a:r>
+            <a:endParaRPr lang="en-US" sz="1500" dirty="0"/>
+          </a:p>
+        </p:txBody>
+      </p:sp>
+      <p:sp>
+        <p:nvSpPr>
+          <p:cNvPr id="8" name="Text 6"/>
+          <p:cNvSpPr/>
+          <p:nvPr/>
+        </p:nvSpPr>
+        <p:spPr>
+          <a:xfrm>
+            <a:off x="1554480" y="1984248"/>
+            <a:ext cx="6400800" cy="274320"/>
+          </a:xfrm>
+          <a:prstGeom prst="rect">
+            <a:avLst/>
+          </a:prstGeom>
+          <a:noFill/>
+          <a:ln/>
+        </p:spPr>
+        <p:txBody>
+          <a:bodyPr wrap="square" lIns="0" tIns="0" rIns="0" bIns="0" rtlCol="0" anchor="ctr"/>
+          <a:lstStyle/>
+          <a:p>
+            <a:pPr indent="0" marL="0">
+              <a:buNone/>
+            </a:pPr>
+            <a:r>
+              <a:rPr lang="en-US" sz="1100" dirty="0">
+                <a:solidFill>
+                  <a:srgbClr val="6B7280"/>
+                </a:solidFill>
+                <a:latin typeface="Inter" pitchFamily="34" charset="0"/>
+                <a:ea typeface="Inter" pitchFamily="34" charset="-122"/>
+                <a:cs typeface="Inter" pitchFamily="34" charset="-120"/>
+              </a:rPr>
+              <a:t>Automated moving quote calculator on your website. Captures leads around the clock.</a:t>
+            </a:r>
+            <a:endParaRPr lang="en-US" sz="1100" dirty="0"/>
+          </a:p>
+        </p:txBody>
+      </p:sp>
+      <p:sp>
+        <p:nvSpPr>
+          <p:cNvPr id="9" name="Shape 7"/>
+          <p:cNvSpPr/>
+          <p:nvPr/>
+        </p:nvSpPr>
+        <p:spPr>
+          <a:xfrm>
+            <a:off x="731520" y="2532888"/>
+            <a:ext cx="548640" cy="548640"/>
+          </a:xfrm>
+          <a:prstGeom prst="ellipse">
+            <a:avLst/>
+          </a:prstGeom>
+          <a:solidFill>
+            <a:srgbClr val="16A34A"/>
+          </a:solidFill>
+          <a:ln/>
+        </p:spPr>
+      </p:sp>
+      <p:sp>
+        <p:nvSpPr>
+          <p:cNvPr id="10" name="Text 8"/>
+          <p:cNvSpPr/>
+          <p:nvPr/>
+        </p:nvSpPr>
+        <p:spPr>
+          <a:xfrm>
+            <a:off x="731520" y="2532888"/>
+            <a:ext cx="548640" cy="548640"/>
           </a:xfrm>
           <a:prstGeom prst="rect">
             <a:avLst/>
@@ -4712,30 +5348,150 @@
               <a:buNone/>
             </a:pPr>
             <a:r>
-              <a:rPr lang="en-US" sz="4400" b="1" dirty="0">
-                <a:solidFill>
-                  <a:srgbClr val="00C9A7"/>
-                </a:solidFill>
-                <a:latin typeface="Trebuchet MS" pitchFamily="34" charset="0"/>
-                <a:ea typeface="Trebuchet MS" pitchFamily="34" charset="-122"/>
-                <a:cs typeface="Trebuchet MS" pitchFamily="34" charset="-120"/>
-              </a:rPr>
-              <a:t>70%</a:t>
-            </a:r>
-            <a:endParaRPr lang="en-US" sz="4400" dirty="0"/>
-          </a:p>
-        </p:txBody>
-      </p:sp>
-      <p:sp>
-        <p:nvSpPr>
-          <p:cNvPr id="7" name="Text 5"/>
-          <p:cNvSpPr/>
-          <p:nvPr/>
-        </p:nvSpPr>
-        <p:spPr>
-          <a:xfrm>
-            <a:off x="457200" y="2926080"/>
-            <a:ext cx="1920240" cy="640080"/>
+              <a:rPr lang="en-US" sz="1600" b="1" dirty="0">
+                <a:solidFill>
+                  <a:srgbClr val="FFFFFF"/>
+                </a:solidFill>
+                <a:latin typeface="Inter" pitchFamily="34" charset="0"/>
+                <a:ea typeface="Inter" pitchFamily="34" charset="-122"/>
+                <a:cs typeface="Inter" pitchFamily="34" charset="-120"/>
+              </a:rPr>
+              <a:t>02</a:t>
+            </a:r>
+            <a:endParaRPr lang="en-US" sz="1600" dirty="0"/>
+          </a:p>
+        </p:txBody>
+      </p:sp>
+      <p:sp>
+        <p:nvSpPr>
+          <p:cNvPr id="11" name="Shape 9"/>
+          <p:cNvSpPr/>
+          <p:nvPr/>
+        </p:nvSpPr>
+        <p:spPr>
+          <a:xfrm>
+            <a:off x="978408" y="3081528"/>
+            <a:ext cx="54864" cy="292608"/>
+          </a:xfrm>
+          <a:prstGeom prst="rect">
+            <a:avLst/>
+          </a:prstGeom>
+          <a:solidFill>
+            <a:srgbClr val="16A34A">
+              <a:alpha val="40000"/>
+            </a:srgbClr>
+          </a:solidFill>
+          <a:ln/>
+        </p:spPr>
+      </p:sp>
+      <p:sp>
+        <p:nvSpPr>
+          <p:cNvPr id="12" name="Text 10"/>
+          <p:cNvSpPr/>
+          <p:nvPr/>
+        </p:nvSpPr>
+        <p:spPr>
+          <a:xfrm>
+            <a:off x="1554480" y="2551176"/>
+            <a:ext cx="2743200" cy="274320"/>
+          </a:xfrm>
+          <a:prstGeom prst="rect">
+            <a:avLst/>
+          </a:prstGeom>
+          <a:noFill/>
+          <a:ln/>
+        </p:spPr>
+        <p:txBody>
+          <a:bodyPr wrap="square" lIns="0" tIns="0" rIns="0" bIns="0" rtlCol="0" anchor="ctr"/>
+          <a:lstStyle/>
+          <a:p>
+            <a:pPr indent="0" marL="0">
+              <a:buNone/>
+            </a:pPr>
+            <a:r>
+              <a:rPr lang="en-US" sz="1500" b="1" dirty="0">
+                <a:solidFill>
+                  <a:srgbClr val="000000"/>
+                </a:solidFill>
+                <a:latin typeface="Inter" pitchFamily="34" charset="0"/>
+                <a:ea typeface="Inter" pitchFamily="34" charset="-122"/>
+                <a:cs typeface="Inter" pitchFamily="34" charset="-120"/>
+              </a:rPr>
+              <a:t>AI Concierge</a:t>
+            </a:r>
+            <a:endParaRPr lang="en-US" sz="1500" dirty="0"/>
+          </a:p>
+        </p:txBody>
+      </p:sp>
+      <p:sp>
+        <p:nvSpPr>
+          <p:cNvPr id="13" name="Text 11"/>
+          <p:cNvSpPr/>
+          <p:nvPr/>
+        </p:nvSpPr>
+        <p:spPr>
+          <a:xfrm>
+            <a:off x="1554480" y="2825496"/>
+            <a:ext cx="6400800" cy="274320"/>
+          </a:xfrm>
+          <a:prstGeom prst="rect">
+            <a:avLst/>
+          </a:prstGeom>
+          <a:noFill/>
+          <a:ln/>
+        </p:spPr>
+        <p:txBody>
+          <a:bodyPr wrap="square" lIns="0" tIns="0" rIns="0" bIns="0" rtlCol="0" anchor="ctr"/>
+          <a:lstStyle/>
+          <a:p>
+            <a:pPr indent="0" marL="0">
+              <a:buNone/>
+            </a:pPr>
+            <a:r>
+              <a:rPr lang="en-US" sz="1100" dirty="0">
+                <a:solidFill>
+                  <a:srgbClr val="6B7280"/>
+                </a:solidFill>
+                <a:latin typeface="Inter" pitchFamily="34" charset="0"/>
+                <a:ea typeface="Inter" pitchFamily="34" charset="-122"/>
+                <a:cs typeface="Inter" pitchFamily="34" charset="-120"/>
+              </a:rPr>
+              <a:t>Answers every phone call, schedules estimates, and routes urgent requests. Replaces front-desk staff.</a:t>
+            </a:r>
+            <a:endParaRPr lang="en-US" sz="1100" dirty="0"/>
+          </a:p>
+        </p:txBody>
+      </p:sp>
+      <p:sp>
+        <p:nvSpPr>
+          <p:cNvPr id="14" name="Shape 12"/>
+          <p:cNvSpPr/>
+          <p:nvPr/>
+        </p:nvSpPr>
+        <p:spPr>
+          <a:xfrm>
+            <a:off x="731520" y="3374136"/>
+            <a:ext cx="548640" cy="548640"/>
+          </a:xfrm>
+          <a:prstGeom prst="ellipse">
+            <a:avLst/>
+          </a:prstGeom>
+          <a:solidFill>
+            <a:srgbClr val="000000"/>
+          </a:solidFill>
+          <a:ln/>
+        </p:spPr>
+      </p:sp>
+      <p:sp>
+        <p:nvSpPr>
+          <p:cNvPr id="15" name="Text 13"/>
+          <p:cNvSpPr/>
+          <p:nvPr/>
+        </p:nvSpPr>
+        <p:spPr>
+          <a:xfrm>
+            <a:off x="731520" y="3374136"/>
+            <a:ext cx="548640" cy="548640"/>
           </a:xfrm>
           <a:prstGeom prst="rect">
             <a:avLst/>
@@ -4751,499 +5507,254 @@
               <a:buNone/>
             </a:pPr>
             <a:r>
-              <a:rPr lang="en-US" sz="1200" dirty="0">
-                <a:solidFill>
-                  <a:srgbClr val="8896AB"/>
-                </a:solidFill>
-                <a:latin typeface="Calibri" pitchFamily="34" charset="0"/>
-                <a:ea typeface="Calibri" pitchFamily="34" charset="-122"/>
-                <a:cs typeface="Calibri" pitchFamily="34" charset="-120"/>
-              </a:rPr>
-              <a:t>Reduction in</a:t>
-            </a:r>
-            <a:endParaRPr lang="en-US" sz="1200" dirty="0"/>
-          </a:p>
+              <a:rPr lang="en-US" sz="1600" b="1" dirty="0">
+                <a:solidFill>
+                  <a:srgbClr val="FFFFFF"/>
+                </a:solidFill>
+                <a:latin typeface="Inter" pitchFamily="34" charset="0"/>
+                <a:ea typeface="Inter" pitchFamily="34" charset="-122"/>
+                <a:cs typeface="Inter" pitchFamily="34" charset="-120"/>
+              </a:rPr>
+              <a:t>03</a:t>
+            </a:r>
+            <a:endParaRPr lang="en-US" sz="1600" dirty="0"/>
+          </a:p>
+        </p:txBody>
+      </p:sp>
+      <p:sp>
+        <p:nvSpPr>
+          <p:cNvPr id="16" name="Shape 14"/>
+          <p:cNvSpPr/>
+          <p:nvPr/>
+        </p:nvSpPr>
+        <p:spPr>
+          <a:xfrm>
+            <a:off x="978408" y="3922776"/>
+            <a:ext cx="54864" cy="292608"/>
+          </a:xfrm>
+          <a:prstGeom prst="rect">
+            <a:avLst/>
+          </a:prstGeom>
+          <a:solidFill>
+            <a:srgbClr val="000000">
+              <a:alpha val="40000"/>
+            </a:srgbClr>
+          </a:solidFill>
+          <a:ln/>
+        </p:spPr>
+      </p:sp>
+      <p:sp>
+        <p:nvSpPr>
+          <p:cNvPr id="17" name="Text 15"/>
+          <p:cNvSpPr/>
+          <p:nvPr/>
+        </p:nvSpPr>
+        <p:spPr>
+          <a:xfrm>
+            <a:off x="1554480" y="3392424"/>
+            <a:ext cx="2743200" cy="274320"/>
+          </a:xfrm>
+          <a:prstGeom prst="rect">
+            <a:avLst/>
+          </a:prstGeom>
+          <a:noFill/>
+          <a:ln/>
+        </p:spPr>
+        <p:txBody>
+          <a:bodyPr wrap="square" lIns="0" tIns="0" rIns="0" bIns="0" rtlCol="0" anchor="ctr"/>
+          <a:lstStyle/>
+          <a:p>
+            <a:pPr indent="0" marL="0">
+              <a:buNone/>
+            </a:pPr>
+            <a:r>
+              <a:rPr lang="en-US" sz="1500" b="1" dirty="0">
+                <a:solidFill>
+                  <a:srgbClr val="000000"/>
+                </a:solidFill>
+                <a:latin typeface="Inter" pitchFamily="34" charset="0"/>
+                <a:ea typeface="Inter" pitchFamily="34" charset="-122"/>
+                <a:cs typeface="Inter" pitchFamily="34" charset="-120"/>
+              </a:rPr>
+              <a:t>AI Sales Team</a:t>
+            </a:r>
+            <a:endParaRPr lang="en-US" sz="1500" dirty="0"/>
+          </a:p>
+        </p:txBody>
+      </p:sp>
+      <p:sp>
+        <p:nvSpPr>
+          <p:cNvPr id="18" name="Text 16"/>
+          <p:cNvSpPr/>
+          <p:nvPr/>
+        </p:nvSpPr>
+        <p:spPr>
+          <a:xfrm>
+            <a:off x="1554480" y="3666744"/>
+            <a:ext cx="6400800" cy="274320"/>
+          </a:xfrm>
+          <a:prstGeom prst="rect">
+            <a:avLst/>
+          </a:prstGeom>
+          <a:noFill/>
+          <a:ln/>
+        </p:spPr>
+        <p:txBody>
+          <a:bodyPr wrap="square" lIns="0" tIns="0" rIns="0" bIns="0" rtlCol="0" anchor="ctr"/>
+          <a:lstStyle/>
+          <a:p>
+            <a:pPr indent="0" marL="0">
+              <a:buNone/>
+            </a:pPr>
+            <a:r>
+              <a:rPr lang="en-US" sz="1100" dirty="0">
+                <a:solidFill>
+                  <a:srgbClr val="6B7280"/>
+                </a:solidFill>
+                <a:latin typeface="Inter" pitchFamily="34" charset="0"/>
+                <a:ea typeface="Inter" pitchFamily="34" charset="-122"/>
+                <a:cs typeface="Inter" pitchFamily="34" charset="-120"/>
+              </a:rPr>
+              <a:t>Outbound calls, follow-ups, and upsells. Closes deals without human reps.</a:t>
+            </a:r>
+            <a:endParaRPr lang="en-US" sz="1100" dirty="0"/>
+          </a:p>
+        </p:txBody>
+      </p:sp>
+      <p:sp>
+        <p:nvSpPr>
+          <p:cNvPr id="19" name="Shape 17"/>
+          <p:cNvSpPr/>
+          <p:nvPr/>
+        </p:nvSpPr>
+        <p:spPr>
+          <a:xfrm>
+            <a:off x="731520" y="4215384"/>
+            <a:ext cx="548640" cy="548640"/>
+          </a:xfrm>
+          <a:prstGeom prst="ellipse">
+            <a:avLst/>
+          </a:prstGeom>
+          <a:solidFill>
+            <a:srgbClr val="374151"/>
+          </a:solidFill>
+          <a:ln/>
+        </p:spPr>
+      </p:sp>
+      <p:sp>
+        <p:nvSpPr>
+          <p:cNvPr id="20" name="Text 18"/>
+          <p:cNvSpPr/>
+          <p:nvPr/>
+        </p:nvSpPr>
+        <p:spPr>
+          <a:xfrm>
+            <a:off x="731520" y="4215384"/>
+            <a:ext cx="548640" cy="548640"/>
+          </a:xfrm>
+          <a:prstGeom prst="rect">
+            <a:avLst/>
+          </a:prstGeom>
+          <a:noFill/>
+          <a:ln/>
+        </p:spPr>
+        <p:txBody>
+          <a:bodyPr wrap="square" lIns="0" tIns="0" rIns="0" bIns="0" rtlCol="0" anchor="ctr"/>
+          <a:lstStyle/>
           <a:p>
             <a:pPr algn="ctr" indent="0" marL="0">
               <a:buNone/>
             </a:pPr>
             <a:r>
-              <a:rPr lang="en-US" sz="1200" dirty="0">
-                <a:solidFill>
-                  <a:srgbClr val="8896AB"/>
-                </a:solidFill>
-                <a:latin typeface="Calibri" pitchFamily="34" charset="0"/>
-                <a:ea typeface="Calibri" pitchFamily="34" charset="-122"/>
-                <a:cs typeface="Calibri" pitchFamily="34" charset="-120"/>
-              </a:rPr>
-              <a:t>staffing costs</a:t>
-            </a:r>
-            <a:endParaRPr lang="en-US" sz="1200" dirty="0"/>
-          </a:p>
-        </p:txBody>
-      </p:sp>
-      <p:sp>
-        <p:nvSpPr>
-          <p:cNvPr id="8" name="Shape 6"/>
-          <p:cNvSpPr/>
-          <p:nvPr/>
-        </p:nvSpPr>
-        <p:spPr>
-          <a:xfrm>
-            <a:off x="2651760" y="1737360"/>
-            <a:ext cx="1920240" cy="2194560"/>
-          </a:xfrm>
-          <a:prstGeom prst="rect">
-            <a:avLst/>
-          </a:prstGeom>
-          <a:solidFill>
-            <a:srgbClr val="FFFFFF"/>
-          </a:solidFill>
-          <a:ln/>
-          <a:effectLst>
-            <a:outerShdw sx="100000" sy="100000" kx="0" ky="0" algn="bl" rotWithShape="0" blurRad="76200" dist="25400" dir="8100000">
-              <a:srgbClr val="000000">
-                <a:alpha val="15000"/>
-              </a:srgbClr>
-            </a:outerShdw>
-          </a:effectLst>
-        </p:spPr>
-      </p:sp>
-      <p:sp>
-        <p:nvSpPr>
-          <p:cNvPr id="9" name="Shape 7"/>
-          <p:cNvSpPr/>
-          <p:nvPr/>
-        </p:nvSpPr>
-        <p:spPr>
-          <a:xfrm>
-            <a:off x="2651760" y="1737360"/>
-            <a:ext cx="1920240" cy="54864"/>
-          </a:xfrm>
-          <a:prstGeom prst="rect">
-            <a:avLst/>
-          </a:prstGeom>
-          <a:solidFill>
-            <a:srgbClr val="3B82F6"/>
-          </a:solidFill>
-          <a:ln/>
-        </p:spPr>
-      </p:sp>
-      <p:sp>
-        <p:nvSpPr>
-          <p:cNvPr id="10" name="Text 8"/>
-          <p:cNvSpPr/>
-          <p:nvPr/>
-        </p:nvSpPr>
-        <p:spPr>
-          <a:xfrm>
-            <a:off x="2651760" y="2057400"/>
-            <a:ext cx="1920240" cy="731520"/>
-          </a:xfrm>
-          <a:prstGeom prst="rect">
-            <a:avLst/>
-          </a:prstGeom>
-          <a:noFill/>
-          <a:ln/>
-        </p:spPr>
-        <p:txBody>
-          <a:bodyPr wrap="square" lIns="0" tIns="0" rIns="0" bIns="0" rtlCol="0" anchor="ctr"/>
-          <a:lstStyle/>
-          <a:p>
-            <a:pPr algn="ctr" indent="0" marL="0">
-              <a:buNone/>
-            </a:pPr>
-            <a:r>
-              <a:rPr lang="en-US" sz="4400" b="1" dirty="0">
-                <a:solidFill>
-                  <a:srgbClr val="3B82F6"/>
-                </a:solidFill>
-                <a:latin typeface="Trebuchet MS" pitchFamily="34" charset="0"/>
-                <a:ea typeface="Trebuchet MS" pitchFamily="34" charset="-122"/>
-                <a:cs typeface="Trebuchet MS" pitchFamily="34" charset="-120"/>
-              </a:rPr>
-              <a:t>24/7</a:t>
-            </a:r>
-            <a:endParaRPr lang="en-US" sz="4400" dirty="0"/>
-          </a:p>
-        </p:txBody>
-      </p:sp>
-      <p:sp>
-        <p:nvSpPr>
-          <p:cNvPr id="11" name="Text 9"/>
-          <p:cNvSpPr/>
-          <p:nvPr/>
-        </p:nvSpPr>
-        <p:spPr>
-          <a:xfrm>
-            <a:off x="2651760" y="2926080"/>
-            <a:ext cx="1920240" cy="640080"/>
-          </a:xfrm>
-          <a:prstGeom prst="rect">
-            <a:avLst/>
-          </a:prstGeom>
-          <a:noFill/>
-          <a:ln/>
-        </p:spPr>
-        <p:txBody>
-          <a:bodyPr wrap="square" lIns="0" tIns="0" rIns="0" bIns="0" rtlCol="0" anchor="ctr"/>
-          <a:lstStyle/>
-          <a:p>
-            <a:pPr algn="ctr" indent="0" marL="0">
-              <a:buNone/>
-            </a:pPr>
-            <a:r>
-              <a:rPr lang="en-US" sz="1200" dirty="0">
-                <a:solidFill>
-                  <a:srgbClr val="8896AB"/>
-                </a:solidFill>
-                <a:latin typeface="Calibri" pitchFamily="34" charset="0"/>
-                <a:ea typeface="Calibri" pitchFamily="34" charset="-122"/>
-                <a:cs typeface="Calibri" pitchFamily="34" charset="-120"/>
-              </a:rPr>
-              <a:t>Customer service</a:t>
-            </a:r>
-            <a:endParaRPr lang="en-US" sz="1200" dirty="0"/>
-          </a:p>
-          <a:p>
-            <a:pPr algn="ctr" indent="0" marL="0">
-              <a:buNone/>
-            </a:pPr>
-            <a:r>
-              <a:rPr lang="en-US" sz="1200" dirty="0">
-                <a:solidFill>
-                  <a:srgbClr val="8896AB"/>
-                </a:solidFill>
-                <a:latin typeface="Calibri" pitchFamily="34" charset="0"/>
-                <a:ea typeface="Calibri" pitchFamily="34" charset="-122"/>
-                <a:cs typeface="Calibri" pitchFamily="34" charset="-120"/>
-              </a:rPr>
-              <a:t>availability</a:t>
-            </a:r>
-            <a:endParaRPr lang="en-US" sz="1200" dirty="0"/>
-          </a:p>
-        </p:txBody>
-      </p:sp>
-      <p:sp>
-        <p:nvSpPr>
-          <p:cNvPr id="12" name="Shape 10"/>
-          <p:cNvSpPr/>
-          <p:nvPr/>
-        </p:nvSpPr>
-        <p:spPr>
-          <a:xfrm>
-            <a:off x="4846320" y="1737360"/>
-            <a:ext cx="1920240" cy="2194560"/>
-          </a:xfrm>
-          <a:prstGeom prst="rect">
-            <a:avLst/>
-          </a:prstGeom>
-          <a:solidFill>
-            <a:srgbClr val="FFFFFF"/>
-          </a:solidFill>
-          <a:ln/>
-          <a:effectLst>
-            <a:outerShdw sx="100000" sy="100000" kx="0" ky="0" algn="bl" rotWithShape="0" blurRad="76200" dist="25400" dir="8100000">
-              <a:srgbClr val="000000">
-                <a:alpha val="15000"/>
-              </a:srgbClr>
-            </a:outerShdw>
-          </a:effectLst>
-        </p:spPr>
-      </p:sp>
-      <p:sp>
-        <p:nvSpPr>
-          <p:cNvPr id="13" name="Shape 11"/>
-          <p:cNvSpPr/>
-          <p:nvPr/>
-        </p:nvSpPr>
-        <p:spPr>
-          <a:xfrm>
-            <a:off x="4846320" y="1737360"/>
-            <a:ext cx="1920240" cy="54864"/>
-          </a:xfrm>
-          <a:prstGeom prst="rect">
-            <a:avLst/>
-          </a:prstGeom>
-          <a:solidFill>
-            <a:srgbClr val="8B5CF6"/>
-          </a:solidFill>
-          <a:ln/>
-        </p:spPr>
-      </p:sp>
-      <p:sp>
-        <p:nvSpPr>
-          <p:cNvPr id="14" name="Text 12"/>
-          <p:cNvSpPr/>
-          <p:nvPr/>
-        </p:nvSpPr>
-        <p:spPr>
-          <a:xfrm>
-            <a:off x="4846320" y="2057400"/>
-            <a:ext cx="1920240" cy="731520"/>
-          </a:xfrm>
-          <a:prstGeom prst="rect">
-            <a:avLst/>
-          </a:prstGeom>
-          <a:noFill/>
-          <a:ln/>
-        </p:spPr>
-        <p:txBody>
-          <a:bodyPr wrap="square" lIns="0" tIns="0" rIns="0" bIns="0" rtlCol="0" anchor="ctr"/>
-          <a:lstStyle/>
-          <a:p>
-            <a:pPr algn="ctr" indent="0" marL="0">
-              <a:buNone/>
-            </a:pPr>
-            <a:r>
-              <a:rPr lang="en-US" sz="4400" b="1" dirty="0">
-                <a:solidFill>
-                  <a:srgbClr val="8B5CF6"/>
-                </a:solidFill>
-                <a:latin typeface="Trebuchet MS" pitchFamily="34" charset="0"/>
-                <a:ea typeface="Trebuchet MS" pitchFamily="34" charset="-122"/>
-                <a:cs typeface="Trebuchet MS" pitchFamily="34" charset="-120"/>
-              </a:rPr>
-              <a:t>3x</a:t>
-            </a:r>
-            <a:endParaRPr lang="en-US" sz="4400" dirty="0"/>
-          </a:p>
-        </p:txBody>
-      </p:sp>
-      <p:sp>
-        <p:nvSpPr>
-          <p:cNvPr id="15" name="Text 13"/>
-          <p:cNvSpPr/>
-          <p:nvPr/>
-        </p:nvSpPr>
-        <p:spPr>
-          <a:xfrm>
-            <a:off x="4846320" y="2926080"/>
-            <a:ext cx="1920240" cy="640080"/>
-          </a:xfrm>
-          <a:prstGeom prst="rect">
-            <a:avLst/>
-          </a:prstGeom>
-          <a:noFill/>
-          <a:ln/>
-        </p:spPr>
-        <p:txBody>
-          <a:bodyPr wrap="square" lIns="0" tIns="0" rIns="0" bIns="0" rtlCol="0" anchor="ctr"/>
-          <a:lstStyle/>
-          <a:p>
-            <a:pPr algn="ctr" indent="0" marL="0">
-              <a:buNone/>
-            </a:pPr>
-            <a:r>
-              <a:rPr lang="en-US" sz="1200" dirty="0">
-                <a:solidFill>
-                  <a:srgbClr val="8896AB"/>
-                </a:solidFill>
-                <a:latin typeface="Calibri" pitchFamily="34" charset="0"/>
-                <a:ea typeface="Calibri" pitchFamily="34" charset="-122"/>
-                <a:cs typeface="Calibri" pitchFamily="34" charset="-120"/>
-              </a:rPr>
-              <a:t>More leads</a:t>
-            </a:r>
-            <a:endParaRPr lang="en-US" sz="1200" dirty="0"/>
-          </a:p>
-          <a:p>
-            <a:pPr algn="ctr" indent="0" marL="0">
-              <a:buNone/>
-            </a:pPr>
-            <a:r>
-              <a:rPr lang="en-US" sz="1200" dirty="0">
-                <a:solidFill>
-                  <a:srgbClr val="8896AB"/>
-                </a:solidFill>
-                <a:latin typeface="Calibri" pitchFamily="34" charset="0"/>
-                <a:ea typeface="Calibri" pitchFamily="34" charset="-122"/>
-                <a:cs typeface="Calibri" pitchFamily="34" charset="-120"/>
-              </a:rPr>
-              <a:t>captured</a:t>
-            </a:r>
-            <a:endParaRPr lang="en-US" sz="1200" dirty="0"/>
-          </a:p>
-        </p:txBody>
-      </p:sp>
-      <p:sp>
-        <p:nvSpPr>
-          <p:cNvPr id="16" name="Shape 14"/>
-          <p:cNvSpPr/>
-          <p:nvPr/>
-        </p:nvSpPr>
-        <p:spPr>
-          <a:xfrm>
-            <a:off x="7040880" y="1737360"/>
-            <a:ext cx="1920240" cy="2194560"/>
-          </a:xfrm>
-          <a:prstGeom prst="rect">
-            <a:avLst/>
-          </a:prstGeom>
-          <a:solidFill>
-            <a:srgbClr val="FFFFFF"/>
-          </a:solidFill>
-          <a:ln/>
-          <a:effectLst>
-            <a:outerShdw sx="100000" sy="100000" kx="0" ky="0" algn="bl" rotWithShape="0" blurRad="76200" dist="25400" dir="8100000">
-              <a:srgbClr val="000000">
-                <a:alpha val="15000"/>
-              </a:srgbClr>
-            </a:outerShdw>
-          </a:effectLst>
-        </p:spPr>
-      </p:sp>
-      <p:sp>
-        <p:nvSpPr>
-          <p:cNvPr id="17" name="Shape 15"/>
-          <p:cNvSpPr/>
-          <p:nvPr/>
-        </p:nvSpPr>
-        <p:spPr>
-          <a:xfrm>
-            <a:off x="7040880" y="1737360"/>
-            <a:ext cx="1920240" cy="54864"/>
-          </a:xfrm>
-          <a:prstGeom prst="rect">
-            <a:avLst/>
-          </a:prstGeom>
-          <a:solidFill>
-            <a:srgbClr val="EC4899"/>
-          </a:solidFill>
-          <a:ln/>
-        </p:spPr>
-      </p:sp>
-      <p:sp>
-        <p:nvSpPr>
-          <p:cNvPr id="18" name="Text 16"/>
-          <p:cNvSpPr/>
-          <p:nvPr/>
-        </p:nvSpPr>
-        <p:spPr>
-          <a:xfrm>
-            <a:off x="7040880" y="2057400"/>
-            <a:ext cx="1920240" cy="731520"/>
-          </a:xfrm>
-          <a:prstGeom prst="rect">
-            <a:avLst/>
-          </a:prstGeom>
-          <a:noFill/>
-          <a:ln/>
-        </p:spPr>
-        <p:txBody>
-          <a:bodyPr wrap="square" lIns="0" tIns="0" rIns="0" bIns="0" rtlCol="0" anchor="ctr"/>
-          <a:lstStyle/>
-          <a:p>
-            <a:pPr algn="ctr" indent="0" marL="0">
-              <a:buNone/>
-            </a:pPr>
-            <a:r>
-              <a:rPr lang="en-US" sz="4400" b="1" dirty="0">
-                <a:solidFill>
-                  <a:srgbClr val="EC4899"/>
-                </a:solidFill>
-                <a:latin typeface="Trebuchet MS" pitchFamily="34" charset="0"/>
-                <a:ea typeface="Trebuchet MS" pitchFamily="34" charset="-122"/>
-                <a:cs typeface="Trebuchet MS" pitchFamily="34" charset="-120"/>
-              </a:rPr>
-              <a:t>&lt;2s</a:t>
-            </a:r>
-            <a:endParaRPr lang="en-US" sz="4400" dirty="0"/>
-          </a:p>
-        </p:txBody>
-      </p:sp>
-      <p:sp>
-        <p:nvSpPr>
-          <p:cNvPr id="19" name="Text 17"/>
-          <p:cNvSpPr/>
-          <p:nvPr/>
-        </p:nvSpPr>
-        <p:spPr>
-          <a:xfrm>
-            <a:off x="7040880" y="2926080"/>
-            <a:ext cx="1920240" cy="640080"/>
-          </a:xfrm>
-          <a:prstGeom prst="rect">
-            <a:avLst/>
-          </a:prstGeom>
-          <a:noFill/>
-          <a:ln/>
-        </p:spPr>
-        <p:txBody>
-          <a:bodyPr wrap="square" lIns="0" tIns="0" rIns="0" bIns="0" rtlCol="0" anchor="ctr"/>
-          <a:lstStyle/>
-          <a:p>
-            <a:pPr algn="ctr" indent="0" marL="0">
-              <a:buNone/>
-            </a:pPr>
-            <a:r>
-              <a:rPr lang="en-US" sz="1200" dirty="0">
-                <a:solidFill>
-                  <a:srgbClr val="8896AB"/>
-                </a:solidFill>
-                <a:latin typeface="Calibri" pitchFamily="34" charset="0"/>
-                <a:ea typeface="Calibri" pitchFamily="34" charset="-122"/>
-                <a:cs typeface="Calibri" pitchFamily="34" charset="-120"/>
-              </a:rPr>
-              <a:t>Average quote</a:t>
-            </a:r>
-            <a:endParaRPr lang="en-US" sz="1200" dirty="0"/>
-          </a:p>
-          <a:p>
-            <a:pPr algn="ctr" indent="0" marL="0">
-              <a:buNone/>
-            </a:pPr>
-            <a:r>
-              <a:rPr lang="en-US" sz="1200" dirty="0">
-                <a:solidFill>
-                  <a:srgbClr val="8896AB"/>
-                </a:solidFill>
-                <a:latin typeface="Calibri" pitchFamily="34" charset="0"/>
-                <a:ea typeface="Calibri" pitchFamily="34" charset="-122"/>
-                <a:cs typeface="Calibri" pitchFamily="34" charset="-120"/>
-              </a:rPr>
-              <a:t>response time</a:t>
-            </a:r>
-            <a:endParaRPr lang="en-US" sz="1200" dirty="0"/>
-          </a:p>
-        </p:txBody>
-      </p:sp>
-      <p:sp>
-        <p:nvSpPr>
-          <p:cNvPr id="20" name="Text 18"/>
-          <p:cNvSpPr/>
-          <p:nvPr/>
-        </p:nvSpPr>
-        <p:spPr>
-          <a:xfrm>
-            <a:off x="731520" y="4297680"/>
-            <a:ext cx="7315200" cy="274320"/>
-          </a:xfrm>
-          <a:prstGeom prst="rect">
-            <a:avLst/>
-          </a:prstGeom>
-          <a:noFill/>
-          <a:ln/>
-        </p:spPr>
-        <p:txBody>
-          <a:bodyPr wrap="square" lIns="0" tIns="0" rIns="0" bIns="0" rtlCol="0" anchor="ctr"/>
-          <a:lstStyle/>
-          <a:p>
-            <a:pPr indent="0" marL="0">
-              <a:buNone/>
-            </a:pPr>
-            <a:r>
-              <a:rPr lang="en-US" sz="900" i="1" dirty="0">
-                <a:solidFill>
-                  <a:srgbClr val="8896AB"/>
-                </a:solidFill>
-                <a:latin typeface="Calibri" pitchFamily="34" charset="0"/>
-                <a:ea typeface="Calibri" pitchFamily="34" charset="-122"/>
-                <a:cs typeface="Calibri" pitchFamily="34" charset="-120"/>
-              </a:rPr>
-              <a:t>* Based on typical results for mid-size US moving companies (5-20 trucks)</a:t>
-            </a:r>
-            <a:endParaRPr lang="en-US" sz="900" dirty="0"/>
+              <a:rPr lang="en-US" sz="1600" b="1" dirty="0">
+                <a:solidFill>
+                  <a:srgbClr val="FFFFFF"/>
+                </a:solidFill>
+                <a:latin typeface="Inter" pitchFamily="34" charset="0"/>
+                <a:ea typeface="Inter" pitchFamily="34" charset="-122"/>
+                <a:cs typeface="Inter" pitchFamily="34" charset="-120"/>
+              </a:rPr>
+              <a:t>04</a:t>
+            </a:r>
+            <a:endParaRPr lang="en-US" sz="1600" dirty="0"/>
+          </a:p>
+        </p:txBody>
+      </p:sp>
+      <p:sp>
+        <p:nvSpPr>
+          <p:cNvPr id="21" name="Text 19"/>
+          <p:cNvSpPr/>
+          <p:nvPr/>
+        </p:nvSpPr>
+        <p:spPr>
+          <a:xfrm>
+            <a:off x="1554480" y="4233672"/>
+            <a:ext cx="2743200" cy="274320"/>
+          </a:xfrm>
+          <a:prstGeom prst="rect">
+            <a:avLst/>
+          </a:prstGeom>
+          <a:noFill/>
+          <a:ln/>
+        </p:spPr>
+        <p:txBody>
+          <a:bodyPr wrap="square" lIns="0" tIns="0" rIns="0" bIns="0" rtlCol="0" anchor="ctr"/>
+          <a:lstStyle/>
+          <a:p>
+            <a:pPr indent="0" marL="0">
+              <a:buNone/>
+            </a:pPr>
+            <a:r>
+              <a:rPr lang="en-US" sz="1500" b="1" dirty="0">
+                <a:solidFill>
+                  <a:srgbClr val="000000"/>
+                </a:solidFill>
+                <a:latin typeface="Inter" pitchFamily="34" charset="0"/>
+                <a:ea typeface="Inter" pitchFamily="34" charset="-122"/>
+                <a:cs typeface="Inter" pitchFamily="34" charset="-120"/>
+              </a:rPr>
+              <a:t>CRM &amp; Accounting</a:t>
+            </a:r>
+            <a:endParaRPr lang="en-US" sz="1500" dirty="0"/>
+          </a:p>
+        </p:txBody>
+      </p:sp>
+      <p:sp>
+        <p:nvSpPr>
+          <p:cNvPr id="22" name="Text 20"/>
+          <p:cNvSpPr/>
+          <p:nvPr/>
+        </p:nvSpPr>
+        <p:spPr>
+          <a:xfrm>
+            <a:off x="1554480" y="4507992"/>
+            <a:ext cx="6400800" cy="274320"/>
+          </a:xfrm>
+          <a:prstGeom prst="rect">
+            <a:avLst/>
+          </a:prstGeom>
+          <a:noFill/>
+          <a:ln/>
+        </p:spPr>
+        <p:txBody>
+          <a:bodyPr wrap="square" lIns="0" tIns="0" rIns="0" bIns="0" rtlCol="0" anchor="ctr"/>
+          <a:lstStyle/>
+          <a:p>
+            <a:pPr indent="0" marL="0">
+              <a:buNone/>
+            </a:pPr>
+            <a:r>
+              <a:rPr lang="en-US" sz="1100" dirty="0">
+                <a:solidFill>
+                  <a:srgbClr val="6B7280"/>
+                </a:solidFill>
+                <a:latin typeface="Inter" pitchFamily="34" charset="0"/>
+                <a:ea typeface="Inter" pitchFamily="34" charset="-122"/>
+                <a:cs typeface="Inter" pitchFamily="34" charset="-120"/>
+              </a:rPr>
+              <a:t>Unified customer database, invoicing, payments, and financial reporting — fully automated.</a:t>
+            </a:r>
+            <a:endParaRPr lang="en-US" sz="1100" dirty="0"/>
           </a:p>
         </p:txBody>
       </p:sp>
@@ -5261,7 +5772,7 @@
     <p:bg>
       <p:bgPr>
         <a:solidFill>
-          <a:srgbClr val="0A1628"/>
+          <a:srgbClr val="000000"/>
         </a:solidFill>
       </p:bgPr>
     </p:bg>
@@ -5306,13 +5817,13 @@
             <a:r>
               <a:rPr lang="en-US" sz="1200" b="1" spc="400" kern="0" dirty="0">
                 <a:solidFill>
-                  <a:srgbClr val="00C9A7"/>
-                </a:solidFill>
-                <a:latin typeface="Trebuchet MS" pitchFamily="34" charset="0"/>
-                <a:ea typeface="Trebuchet MS" pitchFamily="34" charset="-122"/>
-                <a:cs typeface="Trebuchet MS" pitchFamily="34" charset="-120"/>
-              </a:rPr>
-              <a:t>WHY AXVEER</a:t>
+                  <a:srgbClr val="22C55E"/>
+                </a:solidFill>
+                <a:latin typeface="Inter" pitchFamily="34" charset="0"/>
+                <a:ea typeface="Inter" pitchFamily="34" charset="-122"/>
+                <a:cs typeface="Inter" pitchFamily="34" charset="-120"/>
+              </a:rPr>
+              <a:t>THE NUMBERS</a:t>
             </a:r>
             <a:endParaRPr lang="en-US" sz="1200" dirty="0"/>
           </a:p>
@@ -5327,7 +5838,7 @@
         <p:spPr>
           <a:xfrm>
             <a:off x="731520" y="822960"/>
-            <a:ext cx="7315200" cy="914400"/>
+            <a:ext cx="7315200" cy="640080"/>
           </a:xfrm>
           <a:prstGeom prst="rect">
             <a:avLst/>
@@ -5347,31 +5858,14 @@
                 <a:solidFill>
                   <a:srgbClr val="FFFFFF"/>
                 </a:solidFill>
-                <a:latin typeface="Trebuchet MS" pitchFamily="34" charset="0"/>
-                <a:ea typeface="Trebuchet MS" pitchFamily="34" charset="-122"/>
-                <a:cs typeface="Trebuchet MS" pitchFamily="34" charset="-120"/>
-              </a:rPr>
-              <a:t>Built by Engineers Who Understand</a:t>
+                <a:latin typeface="Inter" pitchFamily="34" charset="0"/>
+                <a:ea typeface="Inter" pitchFamily="34" charset="-122"/>
+                <a:cs typeface="Inter" pitchFamily="34" charset="-120"/>
+              </a:rPr>
+              <a:t>What Automation Means for Your Bottom Line</a:t>
             </a:r>
             <a:endParaRPr lang="en-US" sz="2800" dirty="0"/>
           </a:p>
-          <a:p>
-            <a:pPr indent="0" marL="0">
-              <a:buNone/>
-            </a:pPr>
-            <a:r>
-              <a:rPr lang="en-US" sz="2800" b="1" dirty="0">
-                <a:solidFill>
-                  <a:srgbClr val="FFFFFF"/>
-                </a:solidFill>
-                <a:latin typeface="Trebuchet MS" pitchFamily="34" charset="0"/>
-                <a:ea typeface="Trebuchet MS" pitchFamily="34" charset="-122"/>
-                <a:cs typeface="Trebuchet MS" pitchFamily="34" charset="-120"/>
-              </a:rPr>
-              <a:t>Both Software and Moving</a:t>
-            </a:r>
-            <a:endParaRPr lang="en-US" sz="2800" dirty="0"/>
-          </a:p>
         </p:txBody>
       </p:sp>
       <p:sp>
@@ -5382,491 +5876,602 @@
         </p:nvSpPr>
         <p:spPr>
           <a:xfrm>
-            <a:off x="731520" y="2011680"/>
-            <a:ext cx="502920" cy="502920"/>
-          </a:xfrm>
-          <a:prstGeom prst="ellipse">
+            <a:off x="457200" y="1737360"/>
+            <a:ext cx="1920240" cy="2194560"/>
+          </a:xfrm>
+          <a:prstGeom prst="rect">
             <a:avLst/>
           </a:prstGeom>
           <a:solidFill>
-            <a:srgbClr val="00C9A7">
-              <a:alpha val="15000"/>
-            </a:srgbClr>
+            <a:srgbClr val="111111"/>
           </a:solidFill>
           <a:ln/>
-        </p:spPr>
-      </p:sp>
-      <p:pic>
-        <p:nvPicPr>
-          <p:cNvPr id="5" name="Image 0" descr="preencoded.png">    </p:cNvPr>
-          <p:cNvPicPr>
-            <a:picLocks noChangeAspect="1"/>
-          </p:cNvPicPr>
-          <p:nvPr/>
-        </p:nvPicPr>
-        <p:blipFill>
-          <a:blip r:embed="rId1"/>
-          <a:stretch>
-            <a:fillRect/>
-          </a:stretch>
-        </p:blipFill>
-        <p:spPr>
-          <a:xfrm>
-            <a:off x="804672" y="2084832"/>
-            <a:ext cx="365760" cy="365760"/>
-          </a:xfrm>
-          <a:prstGeom prst="rect">
-            <a:avLst/>
-          </a:prstGeom>
-        </p:spPr>
-      </p:pic>
-      <p:sp>
-        <p:nvSpPr>
-          <p:cNvPr id="6" name="Text 3"/>
-          <p:cNvSpPr/>
-          <p:nvPr/>
-        </p:nvSpPr>
-        <p:spPr>
-          <a:xfrm>
-            <a:off x="1417320" y="2011680"/>
-            <a:ext cx="3200400" cy="274320"/>
-          </a:xfrm>
-          <a:prstGeom prst="rect">
-            <a:avLst/>
-          </a:prstGeom>
-          <a:noFill/>
-          <a:ln/>
-        </p:spPr>
-        <p:txBody>
-          <a:bodyPr wrap="square" lIns="0" tIns="0" rIns="0" bIns="0" rtlCol="0" anchor="ctr"/>
-          <a:lstStyle/>
-          <a:p>
-            <a:pPr indent="0" marL="0">
-              <a:buNone/>
-            </a:pPr>
-            <a:r>
-              <a:rPr lang="en-US" sz="1400" b="1" dirty="0">
-                <a:solidFill>
-                  <a:srgbClr val="FFFFFF"/>
-                </a:solidFill>
-                <a:latin typeface="Trebuchet MS" pitchFamily="34" charset="0"/>
-                <a:ea typeface="Trebuchet MS" pitchFamily="34" charset="-122"/>
-                <a:cs typeface="Trebuchet MS" pitchFamily="34" charset="-120"/>
-              </a:rPr>
-              <a:t>Global Brain Trust</a:t>
-            </a:r>
-            <a:endParaRPr lang="en-US" sz="1400" dirty="0"/>
-          </a:p>
-        </p:txBody>
-      </p:sp>
-      <p:sp>
-        <p:nvSpPr>
-          <p:cNvPr id="7" name="Text 4"/>
-          <p:cNvSpPr/>
-          <p:nvPr/>
-        </p:nvSpPr>
-        <p:spPr>
-          <a:xfrm>
-            <a:off x="1417320" y="2331720"/>
-            <a:ext cx="3200400" cy="457200"/>
-          </a:xfrm>
-          <a:prstGeom prst="rect">
-            <a:avLst/>
-          </a:prstGeom>
-          <a:noFill/>
-          <a:ln/>
-        </p:spPr>
-        <p:txBody>
-          <a:bodyPr wrap="square" lIns="0" tIns="0" rIns="0" bIns="0" rtlCol="0" anchor="ctr"/>
-          <a:lstStyle/>
-          <a:p>
-            <a:pPr indent="0" marL="0">
-              <a:buNone/>
-            </a:pPr>
-            <a:r>
-              <a:rPr lang="en-US" sz="1100" dirty="0">
-                <a:solidFill>
-                  <a:srgbClr val="8896AB"/>
-                </a:solidFill>
-                <a:latin typeface="Calibri" pitchFamily="34" charset="0"/>
-                <a:ea typeface="Calibri" pitchFamily="34" charset="-122"/>
-                <a:cs typeface="Calibri" pitchFamily="34" charset="-120"/>
-              </a:rPr>
-              <a:t>Elite engineers and strategists from Axveer's managed talent pool.</a:t>
-            </a:r>
-            <a:endParaRPr lang="en-US" sz="1100" dirty="0"/>
-          </a:p>
-        </p:txBody>
-      </p:sp>
-      <p:sp>
-        <p:nvSpPr>
-          <p:cNvPr id="8" name="Shape 5"/>
-          <p:cNvSpPr/>
-          <p:nvPr/>
-        </p:nvSpPr>
-        <p:spPr>
-          <a:xfrm>
-            <a:off x="4846320" y="2011680"/>
-            <a:ext cx="502920" cy="502920"/>
-          </a:xfrm>
-          <a:prstGeom prst="ellipse">
+          <a:effectLst>
+            <a:outerShdw sx="100000" sy="100000" kx="0" ky="0" algn="bl" rotWithShape="0" blurRad="76200" dist="25400" dir="8100000">
+              <a:srgbClr val="000000">
+                <a:alpha val="15000"/>
+              </a:srgbClr>
+            </a:outerShdw>
+          </a:effectLst>
+        </p:spPr>
+      </p:sp>
+      <p:sp>
+        <p:nvSpPr>
+          <p:cNvPr id="5" name="Shape 3"/>
+          <p:cNvSpPr/>
+          <p:nvPr/>
+        </p:nvSpPr>
+        <p:spPr>
+          <a:xfrm>
+            <a:off x="457200" y="1737360"/>
+            <a:ext cx="1920240" cy="54864"/>
+          </a:xfrm>
+          <a:prstGeom prst="rect">
             <a:avLst/>
           </a:prstGeom>
           <a:solidFill>
-            <a:srgbClr val="00C9A7">
-              <a:alpha val="15000"/>
-            </a:srgbClr>
+            <a:srgbClr val="22C55E"/>
           </a:solidFill>
           <a:ln/>
         </p:spPr>
       </p:sp>
-      <p:pic>
-        <p:nvPicPr>
-          <p:cNvPr id="9" name="Image 1" descr="preencoded.png">    </p:cNvPr>
-          <p:cNvPicPr>
-            <a:picLocks noChangeAspect="1"/>
-          </p:cNvPicPr>
-          <p:nvPr/>
-        </p:nvPicPr>
-        <p:blipFill>
-          <a:blip r:embed="rId2"/>
-          <a:stretch>
-            <a:fillRect/>
-          </a:stretch>
-        </p:blipFill>
-        <p:spPr>
-          <a:xfrm>
-            <a:off x="4919472" y="2084832"/>
-            <a:ext cx="365760" cy="365760"/>
-          </a:xfrm>
-          <a:prstGeom prst="rect">
-            <a:avLst/>
-          </a:prstGeom>
-        </p:spPr>
-      </p:pic>
-      <p:sp>
-        <p:nvSpPr>
-          <p:cNvPr id="10" name="Text 6"/>
-          <p:cNvSpPr/>
-          <p:nvPr/>
-        </p:nvSpPr>
-        <p:spPr>
-          <a:xfrm>
-            <a:off x="5532120" y="2011680"/>
-            <a:ext cx="3200400" cy="274320"/>
-          </a:xfrm>
-          <a:prstGeom prst="rect">
-            <a:avLst/>
-          </a:prstGeom>
-          <a:noFill/>
-          <a:ln/>
-        </p:spPr>
-        <p:txBody>
-          <a:bodyPr wrap="square" lIns="0" tIns="0" rIns="0" bIns="0" rtlCol="0" anchor="ctr"/>
-          <a:lstStyle/>
-          <a:p>
-            <a:pPr indent="0" marL="0">
-              <a:buNone/>
-            </a:pPr>
-            <a:r>
-              <a:rPr lang="en-US" sz="1400" b="1" dirty="0">
-                <a:solidFill>
-                  <a:srgbClr val="FFFFFF"/>
-                </a:solidFill>
-                <a:latin typeface="Trebuchet MS" pitchFamily="34" charset="0"/>
-                <a:ea typeface="Trebuchet MS" pitchFamily="34" charset="-122"/>
-                <a:cs typeface="Trebuchet MS" pitchFamily="34" charset="-120"/>
-              </a:rPr>
-              <a:t>Moving Industry Expertise</a:t>
-            </a:r>
-            <a:endParaRPr lang="en-US" sz="1400" dirty="0"/>
-          </a:p>
-        </p:txBody>
-      </p:sp>
-      <p:sp>
-        <p:nvSpPr>
-          <p:cNvPr id="11" name="Text 7"/>
-          <p:cNvSpPr/>
-          <p:nvPr/>
-        </p:nvSpPr>
-        <p:spPr>
-          <a:xfrm>
-            <a:off x="5532120" y="2331720"/>
-            <a:ext cx="3200400" cy="457200"/>
-          </a:xfrm>
-          <a:prstGeom prst="rect">
-            <a:avLst/>
-          </a:prstGeom>
-          <a:noFill/>
-          <a:ln/>
-        </p:spPr>
-        <p:txBody>
-          <a:bodyPr wrap="square" lIns="0" tIns="0" rIns="0" bIns="0" rtlCol="0" anchor="ctr"/>
-          <a:lstStyle/>
-          <a:p>
-            <a:pPr indent="0" marL="0">
-              <a:buNone/>
-            </a:pPr>
-            <a:r>
-              <a:rPr lang="en-US" sz="1100" dirty="0">
-                <a:solidFill>
-                  <a:srgbClr val="8896AB"/>
-                </a:solidFill>
-                <a:latin typeface="Calibri" pitchFamily="34" charset="0"/>
-                <a:ea typeface="Calibri" pitchFamily="34" charset="-122"/>
-                <a:cs typeface="Calibri" pitchFamily="34" charset="-120"/>
-              </a:rPr>
-              <a:t>We already built a production-grade quote bot. We know your business.</a:t>
-            </a:r>
-            <a:endParaRPr lang="en-US" sz="1100" dirty="0"/>
-          </a:p>
-        </p:txBody>
-      </p:sp>
-      <p:sp>
-        <p:nvSpPr>
-          <p:cNvPr id="12" name="Shape 8"/>
-          <p:cNvSpPr/>
-          <p:nvPr/>
-        </p:nvSpPr>
-        <p:spPr>
-          <a:xfrm>
-            <a:off x="731520" y="3383280"/>
-            <a:ext cx="502920" cy="502920"/>
-          </a:xfrm>
-          <a:prstGeom prst="ellipse">
+      <p:sp>
+        <p:nvSpPr>
+          <p:cNvPr id="6" name="Text 4"/>
+          <p:cNvSpPr/>
+          <p:nvPr/>
+        </p:nvSpPr>
+        <p:spPr>
+          <a:xfrm>
+            <a:off x="457200" y="2057400"/>
+            <a:ext cx="1920240" cy="731520"/>
+          </a:xfrm>
+          <a:prstGeom prst="rect">
+            <a:avLst/>
+          </a:prstGeom>
+          <a:noFill/>
+          <a:ln/>
+        </p:spPr>
+        <p:txBody>
+          <a:bodyPr wrap="square" lIns="0" tIns="0" rIns="0" bIns="0" rtlCol="0" anchor="ctr"/>
+          <a:lstStyle/>
+          <a:p>
+            <a:pPr algn="ctr" indent="0" marL="0">
+              <a:buNone/>
+            </a:pPr>
+            <a:r>
+              <a:rPr lang="en-US" sz="4400" b="1" dirty="0">
+                <a:solidFill>
+                  <a:srgbClr val="22C55E"/>
+                </a:solidFill>
+                <a:latin typeface="Inter" pitchFamily="34" charset="0"/>
+                <a:ea typeface="Inter" pitchFamily="34" charset="-122"/>
+                <a:cs typeface="Inter" pitchFamily="34" charset="-120"/>
+              </a:rPr>
+              <a:t>70%</a:t>
+            </a:r>
+            <a:endParaRPr lang="en-US" sz="4400" dirty="0"/>
+          </a:p>
+        </p:txBody>
+      </p:sp>
+      <p:sp>
+        <p:nvSpPr>
+          <p:cNvPr id="7" name="Text 5"/>
+          <p:cNvSpPr/>
+          <p:nvPr/>
+        </p:nvSpPr>
+        <p:spPr>
+          <a:xfrm>
+            <a:off x="457200" y="2926080"/>
+            <a:ext cx="1920240" cy="640080"/>
+          </a:xfrm>
+          <a:prstGeom prst="rect">
+            <a:avLst/>
+          </a:prstGeom>
+          <a:noFill/>
+          <a:ln/>
+        </p:spPr>
+        <p:txBody>
+          <a:bodyPr wrap="square" lIns="0" tIns="0" rIns="0" bIns="0" rtlCol="0" anchor="ctr"/>
+          <a:lstStyle/>
+          <a:p>
+            <a:pPr algn="ctr" indent="0" marL="0">
+              <a:buNone/>
+            </a:pPr>
+            <a:r>
+              <a:rPr lang="en-US" sz="1200" dirty="0">
+                <a:solidFill>
+                  <a:srgbClr val="6B7280"/>
+                </a:solidFill>
+                <a:latin typeface="Inter" pitchFamily="34" charset="0"/>
+                <a:ea typeface="Inter" pitchFamily="34" charset="-122"/>
+                <a:cs typeface="Inter" pitchFamily="34" charset="-120"/>
+              </a:rPr>
+              <a:t>Reduction in</a:t>
+            </a:r>
+            <a:endParaRPr lang="en-US" sz="1200" dirty="0"/>
+          </a:p>
+          <a:p>
+            <a:pPr algn="ctr" indent="0" marL="0">
+              <a:buNone/>
+            </a:pPr>
+            <a:r>
+              <a:rPr lang="en-US" sz="1200" dirty="0">
+                <a:solidFill>
+                  <a:srgbClr val="6B7280"/>
+                </a:solidFill>
+                <a:latin typeface="Inter" pitchFamily="34" charset="0"/>
+                <a:ea typeface="Inter" pitchFamily="34" charset="-122"/>
+                <a:cs typeface="Inter" pitchFamily="34" charset="-120"/>
+              </a:rPr>
+              <a:t>staffing costs</a:t>
+            </a:r>
+            <a:endParaRPr lang="en-US" sz="1200" dirty="0"/>
+          </a:p>
+        </p:txBody>
+      </p:sp>
+      <p:sp>
+        <p:nvSpPr>
+          <p:cNvPr id="8" name="Shape 6"/>
+          <p:cNvSpPr/>
+          <p:nvPr/>
+        </p:nvSpPr>
+        <p:spPr>
+          <a:xfrm>
+            <a:off x="2651760" y="1737360"/>
+            <a:ext cx="1920240" cy="2194560"/>
+          </a:xfrm>
+          <a:prstGeom prst="rect">
             <a:avLst/>
           </a:prstGeom>
           <a:solidFill>
-            <a:srgbClr val="00C9A7">
-              <a:alpha val="15000"/>
-            </a:srgbClr>
+            <a:srgbClr val="111111"/>
           </a:solidFill>
           <a:ln/>
-        </p:spPr>
-      </p:sp>
-      <p:pic>
-        <p:nvPicPr>
-          <p:cNvPr id="13" name="Image 2" descr="preencoded.png">    </p:cNvPr>
-          <p:cNvPicPr>
-            <a:picLocks noChangeAspect="1"/>
-          </p:cNvPicPr>
-          <p:nvPr/>
-        </p:nvPicPr>
-        <p:blipFill>
-          <a:blip r:embed="rId3"/>
-          <a:stretch>
-            <a:fillRect/>
-          </a:stretch>
-        </p:blipFill>
-        <p:spPr>
-          <a:xfrm>
-            <a:off x="804672" y="3456432"/>
-            <a:ext cx="365760" cy="365760"/>
-          </a:xfrm>
-          <a:prstGeom prst="rect">
-            <a:avLst/>
-          </a:prstGeom>
-        </p:spPr>
-      </p:pic>
-      <p:sp>
-        <p:nvSpPr>
-          <p:cNvPr id="14" name="Text 9"/>
-          <p:cNvSpPr/>
-          <p:nvPr/>
-        </p:nvSpPr>
-        <p:spPr>
-          <a:xfrm>
-            <a:off x="1417320" y="3383280"/>
-            <a:ext cx="3200400" cy="274320"/>
-          </a:xfrm>
-          <a:prstGeom prst="rect">
-            <a:avLst/>
-          </a:prstGeom>
-          <a:noFill/>
-          <a:ln/>
-        </p:spPr>
-        <p:txBody>
-          <a:bodyPr wrap="square" lIns="0" tIns="0" rIns="0" bIns="0" rtlCol="0" anchor="ctr"/>
-          <a:lstStyle/>
-          <a:p>
-            <a:pPr indent="0" marL="0">
-              <a:buNone/>
-            </a:pPr>
-            <a:r>
-              <a:rPr lang="en-US" sz="1400" b="1" dirty="0">
-                <a:solidFill>
-                  <a:srgbClr val="FFFFFF"/>
-                </a:solidFill>
-                <a:latin typeface="Trebuchet MS" pitchFamily="34" charset="0"/>
-                <a:ea typeface="Trebuchet MS" pitchFamily="34" charset="-122"/>
-                <a:cs typeface="Trebuchet MS" pitchFamily="34" charset="-120"/>
-              </a:rPr>
-              <a:t>Full-Stack Delivery</a:t>
-            </a:r>
-            <a:endParaRPr lang="en-US" sz="1400" dirty="0"/>
-          </a:p>
-        </p:txBody>
-      </p:sp>
-      <p:sp>
-        <p:nvSpPr>
-          <p:cNvPr id="15" name="Text 10"/>
-          <p:cNvSpPr/>
-          <p:nvPr/>
-        </p:nvSpPr>
-        <p:spPr>
-          <a:xfrm>
-            <a:off x="1417320" y="3703320"/>
-            <a:ext cx="3200400" cy="457200"/>
-          </a:xfrm>
-          <a:prstGeom prst="rect">
-            <a:avLst/>
-          </a:prstGeom>
-          <a:noFill/>
-          <a:ln/>
-        </p:spPr>
-        <p:txBody>
-          <a:bodyPr wrap="square" lIns="0" tIns="0" rIns="0" bIns="0" rtlCol="0" anchor="ctr"/>
-          <a:lstStyle/>
-          <a:p>
-            <a:pPr indent="0" marL="0">
-              <a:buNone/>
-            </a:pPr>
-            <a:r>
-              <a:rPr lang="en-US" sz="1100" dirty="0">
-                <a:solidFill>
-                  <a:srgbClr val="8896AB"/>
-                </a:solidFill>
-                <a:latin typeface="Calibri" pitchFamily="34" charset="0"/>
-                <a:ea typeface="Calibri" pitchFamily="34" charset="-122"/>
-                <a:cs typeface="Calibri" pitchFamily="34" charset="-120"/>
-              </a:rPr>
-              <a:t>Strategy, engineering, deployment, and support — one team, one contract.</a:t>
-            </a:r>
-            <a:endParaRPr lang="en-US" sz="1100" dirty="0"/>
-          </a:p>
-        </p:txBody>
-      </p:sp>
-      <p:sp>
-        <p:nvSpPr>
-          <p:cNvPr id="16" name="Shape 11"/>
-          <p:cNvSpPr/>
-          <p:nvPr/>
-        </p:nvSpPr>
-        <p:spPr>
-          <a:xfrm>
-            <a:off x="4846320" y="3383280"/>
-            <a:ext cx="502920" cy="502920"/>
-          </a:xfrm>
-          <a:prstGeom prst="ellipse">
+          <a:effectLst>
+            <a:outerShdw sx="100000" sy="100000" kx="0" ky="0" algn="bl" rotWithShape="0" blurRad="76200" dist="25400" dir="8100000">
+              <a:srgbClr val="000000">
+                <a:alpha val="15000"/>
+              </a:srgbClr>
+            </a:outerShdw>
+          </a:effectLst>
+        </p:spPr>
+      </p:sp>
+      <p:sp>
+        <p:nvSpPr>
+          <p:cNvPr id="9" name="Shape 7"/>
+          <p:cNvSpPr/>
+          <p:nvPr/>
+        </p:nvSpPr>
+        <p:spPr>
+          <a:xfrm>
+            <a:off x="2651760" y="1737360"/>
+            <a:ext cx="1920240" cy="54864"/>
+          </a:xfrm>
+          <a:prstGeom prst="rect">
             <a:avLst/>
           </a:prstGeom>
           <a:solidFill>
-            <a:srgbClr val="00C9A7">
-              <a:alpha val="15000"/>
-            </a:srgbClr>
+            <a:srgbClr val="16A34A"/>
           </a:solidFill>
           <a:ln/>
         </p:spPr>
       </p:sp>
-      <p:pic>
-        <p:nvPicPr>
-          <p:cNvPr id="17" name="Image 3" descr="preencoded.png">    </p:cNvPr>
-          <p:cNvPicPr>
-            <a:picLocks noChangeAspect="1"/>
-          </p:cNvPicPr>
-          <p:nvPr/>
-        </p:nvPicPr>
-        <p:blipFill>
-          <a:blip r:embed="rId4"/>
-          <a:stretch>
-            <a:fillRect/>
-          </a:stretch>
-        </p:blipFill>
-        <p:spPr>
-          <a:xfrm>
-            <a:off x="4919472" y="3456432"/>
-            <a:ext cx="365760" cy="365760"/>
-          </a:xfrm>
-          <a:prstGeom prst="rect">
-            <a:avLst/>
-          </a:prstGeom>
-        </p:spPr>
-      </p:pic>
-      <p:sp>
-        <p:nvSpPr>
-          <p:cNvPr id="18" name="Text 12"/>
-          <p:cNvSpPr/>
-          <p:nvPr/>
-        </p:nvSpPr>
-        <p:spPr>
-          <a:xfrm>
-            <a:off x="5532120" y="3383280"/>
-            <a:ext cx="3200400" cy="274320"/>
-          </a:xfrm>
-          <a:prstGeom prst="rect">
-            <a:avLst/>
-          </a:prstGeom>
-          <a:noFill/>
-          <a:ln/>
-        </p:spPr>
-        <p:txBody>
-          <a:bodyPr wrap="square" lIns="0" tIns="0" rIns="0" bIns="0" rtlCol="0" anchor="ctr"/>
-          <a:lstStyle/>
-          <a:p>
-            <a:pPr indent="0" marL="0">
-              <a:buNone/>
-            </a:pPr>
-            <a:r>
-              <a:rPr lang="en-US" sz="1400" b="1" dirty="0">
-                <a:solidFill>
-                  <a:srgbClr val="FFFFFF"/>
-                </a:solidFill>
-                <a:latin typeface="Trebuchet MS" pitchFamily="34" charset="0"/>
-                <a:ea typeface="Trebuchet MS" pitchFamily="34" charset="-122"/>
-                <a:cs typeface="Trebuchet MS" pitchFamily="34" charset="-120"/>
-              </a:rPr>
-              <a:t>Incremental Approach</a:t>
-            </a:r>
-            <a:endParaRPr lang="en-US" sz="1400" dirty="0"/>
-          </a:p>
-        </p:txBody>
-      </p:sp>
-      <p:sp>
-        <p:nvSpPr>
-          <p:cNvPr id="19" name="Text 13"/>
-          <p:cNvSpPr/>
-          <p:nvPr/>
-        </p:nvSpPr>
-        <p:spPr>
-          <a:xfrm>
-            <a:off x="5532120" y="3703320"/>
-            <a:ext cx="3200400" cy="457200"/>
-          </a:xfrm>
-          <a:prstGeom prst="rect">
-            <a:avLst/>
-          </a:prstGeom>
-          <a:noFill/>
-          <a:ln/>
-        </p:spPr>
-        <p:txBody>
-          <a:bodyPr wrap="square" lIns="0" tIns="0" rIns="0" bIns="0" rtlCol="0" anchor="ctr"/>
-          <a:lstStyle/>
-          <a:p>
-            <a:pPr indent="0" marL="0">
-              <a:buNone/>
-            </a:pPr>
-            <a:r>
-              <a:rPr lang="en-US" sz="1100" dirty="0">
-                <a:solidFill>
-                  <a:srgbClr val="8896AB"/>
-                </a:solidFill>
-                <a:latin typeface="Calibri" pitchFamily="34" charset="0"/>
-                <a:ea typeface="Calibri" pitchFamily="34" charset="-122"/>
-                <a:cs typeface="Calibri" pitchFamily="34" charset="-120"/>
-              </a:rPr>
-              <a:t>Start small with the quote bot. Expand as you see ROI. No lock-in.</a:t>
-            </a:r>
-            <a:endParaRPr lang="en-US" sz="1100" dirty="0"/>
+      <p:sp>
+        <p:nvSpPr>
+          <p:cNvPr id="10" name="Text 8"/>
+          <p:cNvSpPr/>
+          <p:nvPr/>
+        </p:nvSpPr>
+        <p:spPr>
+          <a:xfrm>
+            <a:off x="2651760" y="2057400"/>
+            <a:ext cx="1920240" cy="731520"/>
+          </a:xfrm>
+          <a:prstGeom prst="rect">
+            <a:avLst/>
+          </a:prstGeom>
+          <a:noFill/>
+          <a:ln/>
+        </p:spPr>
+        <p:txBody>
+          <a:bodyPr wrap="square" lIns="0" tIns="0" rIns="0" bIns="0" rtlCol="0" anchor="ctr"/>
+          <a:lstStyle/>
+          <a:p>
+            <a:pPr algn="ctr" indent="0" marL="0">
+              <a:buNone/>
+            </a:pPr>
+            <a:r>
+              <a:rPr lang="en-US" sz="4400" b="1" dirty="0">
+                <a:solidFill>
+                  <a:srgbClr val="16A34A"/>
+                </a:solidFill>
+                <a:latin typeface="Inter" pitchFamily="34" charset="0"/>
+                <a:ea typeface="Inter" pitchFamily="34" charset="-122"/>
+                <a:cs typeface="Inter" pitchFamily="34" charset="-120"/>
+              </a:rPr>
+              <a:t>24/7</a:t>
+            </a:r>
+            <a:endParaRPr lang="en-US" sz="4400" dirty="0"/>
+          </a:p>
+        </p:txBody>
+      </p:sp>
+      <p:sp>
+        <p:nvSpPr>
+          <p:cNvPr id="11" name="Text 9"/>
+          <p:cNvSpPr/>
+          <p:nvPr/>
+        </p:nvSpPr>
+        <p:spPr>
+          <a:xfrm>
+            <a:off x="2651760" y="2926080"/>
+            <a:ext cx="1920240" cy="640080"/>
+          </a:xfrm>
+          <a:prstGeom prst="rect">
+            <a:avLst/>
+          </a:prstGeom>
+          <a:noFill/>
+          <a:ln/>
+        </p:spPr>
+        <p:txBody>
+          <a:bodyPr wrap="square" lIns="0" tIns="0" rIns="0" bIns="0" rtlCol="0" anchor="ctr"/>
+          <a:lstStyle/>
+          <a:p>
+            <a:pPr algn="ctr" indent="0" marL="0">
+              <a:buNone/>
+            </a:pPr>
+            <a:r>
+              <a:rPr lang="en-US" sz="1200" dirty="0">
+                <a:solidFill>
+                  <a:srgbClr val="6B7280"/>
+                </a:solidFill>
+                <a:latin typeface="Inter" pitchFamily="34" charset="0"/>
+                <a:ea typeface="Inter" pitchFamily="34" charset="-122"/>
+                <a:cs typeface="Inter" pitchFamily="34" charset="-120"/>
+              </a:rPr>
+              <a:t>Customer service</a:t>
+            </a:r>
+            <a:endParaRPr lang="en-US" sz="1200" dirty="0"/>
+          </a:p>
+          <a:p>
+            <a:pPr algn="ctr" indent="0" marL="0">
+              <a:buNone/>
+            </a:pPr>
+            <a:r>
+              <a:rPr lang="en-US" sz="1200" dirty="0">
+                <a:solidFill>
+                  <a:srgbClr val="6B7280"/>
+                </a:solidFill>
+                <a:latin typeface="Inter" pitchFamily="34" charset="0"/>
+                <a:ea typeface="Inter" pitchFamily="34" charset="-122"/>
+                <a:cs typeface="Inter" pitchFamily="34" charset="-120"/>
+              </a:rPr>
+              <a:t>availability</a:t>
+            </a:r>
+            <a:endParaRPr lang="en-US" sz="1200" dirty="0"/>
+          </a:p>
+        </p:txBody>
+      </p:sp>
+      <p:sp>
+        <p:nvSpPr>
+          <p:cNvPr id="12" name="Shape 10"/>
+          <p:cNvSpPr/>
+          <p:nvPr/>
+        </p:nvSpPr>
+        <p:spPr>
+          <a:xfrm>
+            <a:off x="4846320" y="1737360"/>
+            <a:ext cx="1920240" cy="2194560"/>
+          </a:xfrm>
+          <a:prstGeom prst="rect">
+            <a:avLst/>
+          </a:prstGeom>
+          <a:solidFill>
+            <a:srgbClr val="111111"/>
+          </a:solidFill>
+          <a:ln/>
+          <a:effectLst>
+            <a:outerShdw sx="100000" sy="100000" kx="0" ky="0" algn="bl" rotWithShape="0" blurRad="76200" dist="25400" dir="8100000">
+              <a:srgbClr val="000000">
+                <a:alpha val="15000"/>
+              </a:srgbClr>
+            </a:outerShdw>
+          </a:effectLst>
+        </p:spPr>
+      </p:sp>
+      <p:sp>
+        <p:nvSpPr>
+          <p:cNvPr id="13" name="Shape 11"/>
+          <p:cNvSpPr/>
+          <p:nvPr/>
+        </p:nvSpPr>
+        <p:spPr>
+          <a:xfrm>
+            <a:off x="4846320" y="1737360"/>
+            <a:ext cx="1920240" cy="54864"/>
+          </a:xfrm>
+          <a:prstGeom prst="rect">
+            <a:avLst/>
+          </a:prstGeom>
+          <a:solidFill>
+            <a:srgbClr val="34D399"/>
+          </a:solidFill>
+          <a:ln/>
+        </p:spPr>
+      </p:sp>
+      <p:sp>
+        <p:nvSpPr>
+          <p:cNvPr id="14" name="Text 12"/>
+          <p:cNvSpPr/>
+          <p:nvPr/>
+        </p:nvSpPr>
+        <p:spPr>
+          <a:xfrm>
+            <a:off x="4846320" y="2057400"/>
+            <a:ext cx="1920240" cy="731520"/>
+          </a:xfrm>
+          <a:prstGeom prst="rect">
+            <a:avLst/>
+          </a:prstGeom>
+          <a:noFill/>
+          <a:ln/>
+        </p:spPr>
+        <p:txBody>
+          <a:bodyPr wrap="square" lIns="0" tIns="0" rIns="0" bIns="0" rtlCol="0" anchor="ctr"/>
+          <a:lstStyle/>
+          <a:p>
+            <a:pPr algn="ctr" indent="0" marL="0">
+              <a:buNone/>
+            </a:pPr>
+            <a:r>
+              <a:rPr lang="en-US" sz="4400" b="1" dirty="0">
+                <a:solidFill>
+                  <a:srgbClr val="34D399"/>
+                </a:solidFill>
+                <a:latin typeface="Inter" pitchFamily="34" charset="0"/>
+                <a:ea typeface="Inter" pitchFamily="34" charset="-122"/>
+                <a:cs typeface="Inter" pitchFamily="34" charset="-120"/>
+              </a:rPr>
+              <a:t>3x</a:t>
+            </a:r>
+            <a:endParaRPr lang="en-US" sz="4400" dirty="0"/>
+          </a:p>
+        </p:txBody>
+      </p:sp>
+      <p:sp>
+        <p:nvSpPr>
+          <p:cNvPr id="15" name="Text 13"/>
+          <p:cNvSpPr/>
+          <p:nvPr/>
+        </p:nvSpPr>
+        <p:spPr>
+          <a:xfrm>
+            <a:off x="4846320" y="2926080"/>
+            <a:ext cx="1920240" cy="640080"/>
+          </a:xfrm>
+          <a:prstGeom prst="rect">
+            <a:avLst/>
+          </a:prstGeom>
+          <a:noFill/>
+          <a:ln/>
+        </p:spPr>
+        <p:txBody>
+          <a:bodyPr wrap="square" lIns="0" tIns="0" rIns="0" bIns="0" rtlCol="0" anchor="ctr"/>
+          <a:lstStyle/>
+          <a:p>
+            <a:pPr algn="ctr" indent="0" marL="0">
+              <a:buNone/>
+            </a:pPr>
+            <a:r>
+              <a:rPr lang="en-US" sz="1200" dirty="0">
+                <a:solidFill>
+                  <a:srgbClr val="6B7280"/>
+                </a:solidFill>
+                <a:latin typeface="Inter" pitchFamily="34" charset="0"/>
+                <a:ea typeface="Inter" pitchFamily="34" charset="-122"/>
+                <a:cs typeface="Inter" pitchFamily="34" charset="-120"/>
+              </a:rPr>
+              <a:t>More leads</a:t>
+            </a:r>
+            <a:endParaRPr lang="en-US" sz="1200" dirty="0"/>
+          </a:p>
+          <a:p>
+            <a:pPr algn="ctr" indent="0" marL="0">
+              <a:buNone/>
+            </a:pPr>
+            <a:r>
+              <a:rPr lang="en-US" sz="1200" dirty="0">
+                <a:solidFill>
+                  <a:srgbClr val="6B7280"/>
+                </a:solidFill>
+                <a:latin typeface="Inter" pitchFamily="34" charset="0"/>
+                <a:ea typeface="Inter" pitchFamily="34" charset="-122"/>
+                <a:cs typeface="Inter" pitchFamily="34" charset="-120"/>
+              </a:rPr>
+              <a:t>captured</a:t>
+            </a:r>
+            <a:endParaRPr lang="en-US" sz="1200" dirty="0"/>
+          </a:p>
+        </p:txBody>
+      </p:sp>
+      <p:sp>
+        <p:nvSpPr>
+          <p:cNvPr id="16" name="Shape 14"/>
+          <p:cNvSpPr/>
+          <p:nvPr/>
+        </p:nvSpPr>
+        <p:spPr>
+          <a:xfrm>
+            <a:off x="7040880" y="1737360"/>
+            <a:ext cx="1920240" cy="2194560"/>
+          </a:xfrm>
+          <a:prstGeom prst="rect">
+            <a:avLst/>
+          </a:prstGeom>
+          <a:solidFill>
+            <a:srgbClr val="111111"/>
+          </a:solidFill>
+          <a:ln/>
+          <a:effectLst>
+            <a:outerShdw sx="100000" sy="100000" kx="0" ky="0" algn="bl" rotWithShape="0" blurRad="76200" dist="25400" dir="8100000">
+              <a:srgbClr val="000000">
+                <a:alpha val="15000"/>
+              </a:srgbClr>
+            </a:outerShdw>
+          </a:effectLst>
+        </p:spPr>
+      </p:sp>
+      <p:sp>
+        <p:nvSpPr>
+          <p:cNvPr id="17" name="Shape 15"/>
+          <p:cNvSpPr/>
+          <p:nvPr/>
+        </p:nvSpPr>
+        <p:spPr>
+          <a:xfrm>
+            <a:off x="7040880" y="1737360"/>
+            <a:ext cx="1920240" cy="54864"/>
+          </a:xfrm>
+          <a:prstGeom prst="rect">
+            <a:avLst/>
+          </a:prstGeom>
+          <a:solidFill>
+            <a:srgbClr val="22C55E"/>
+          </a:solidFill>
+          <a:ln/>
+        </p:spPr>
+      </p:sp>
+      <p:sp>
+        <p:nvSpPr>
+          <p:cNvPr id="18" name="Text 16"/>
+          <p:cNvSpPr/>
+          <p:nvPr/>
+        </p:nvSpPr>
+        <p:spPr>
+          <a:xfrm>
+            <a:off x="7040880" y="2057400"/>
+            <a:ext cx="1920240" cy="731520"/>
+          </a:xfrm>
+          <a:prstGeom prst="rect">
+            <a:avLst/>
+          </a:prstGeom>
+          <a:noFill/>
+          <a:ln/>
+        </p:spPr>
+        <p:txBody>
+          <a:bodyPr wrap="square" lIns="0" tIns="0" rIns="0" bIns="0" rtlCol="0" anchor="ctr"/>
+          <a:lstStyle/>
+          <a:p>
+            <a:pPr algn="ctr" indent="0" marL="0">
+              <a:buNone/>
+            </a:pPr>
+            <a:r>
+              <a:rPr lang="en-US" sz="4400" b="1" dirty="0">
+                <a:solidFill>
+                  <a:srgbClr val="22C55E"/>
+                </a:solidFill>
+                <a:latin typeface="Inter" pitchFamily="34" charset="0"/>
+                <a:ea typeface="Inter" pitchFamily="34" charset="-122"/>
+                <a:cs typeface="Inter" pitchFamily="34" charset="-120"/>
+              </a:rPr>
+              <a:t>&lt;2s</a:t>
+            </a:r>
+            <a:endParaRPr lang="en-US" sz="4400" dirty="0"/>
+          </a:p>
+        </p:txBody>
+      </p:sp>
+      <p:sp>
+        <p:nvSpPr>
+          <p:cNvPr id="19" name="Text 17"/>
+          <p:cNvSpPr/>
+          <p:nvPr/>
+        </p:nvSpPr>
+        <p:spPr>
+          <a:xfrm>
+            <a:off x="7040880" y="2926080"/>
+            <a:ext cx="1920240" cy="640080"/>
+          </a:xfrm>
+          <a:prstGeom prst="rect">
+            <a:avLst/>
+          </a:prstGeom>
+          <a:noFill/>
+          <a:ln/>
+        </p:spPr>
+        <p:txBody>
+          <a:bodyPr wrap="square" lIns="0" tIns="0" rIns="0" bIns="0" rtlCol="0" anchor="ctr"/>
+          <a:lstStyle/>
+          <a:p>
+            <a:pPr algn="ctr" indent="0" marL="0">
+              <a:buNone/>
+            </a:pPr>
+            <a:r>
+              <a:rPr lang="en-US" sz="1200" dirty="0">
+                <a:solidFill>
+                  <a:srgbClr val="6B7280"/>
+                </a:solidFill>
+                <a:latin typeface="Inter" pitchFamily="34" charset="0"/>
+                <a:ea typeface="Inter" pitchFamily="34" charset="-122"/>
+                <a:cs typeface="Inter" pitchFamily="34" charset="-120"/>
+              </a:rPr>
+              <a:t>Average quote</a:t>
+            </a:r>
+            <a:endParaRPr lang="en-US" sz="1200" dirty="0"/>
+          </a:p>
+          <a:p>
+            <a:pPr algn="ctr" indent="0" marL="0">
+              <a:buNone/>
+            </a:pPr>
+            <a:r>
+              <a:rPr lang="en-US" sz="1200" dirty="0">
+                <a:solidFill>
+                  <a:srgbClr val="6B7280"/>
+                </a:solidFill>
+                <a:latin typeface="Inter" pitchFamily="34" charset="0"/>
+                <a:ea typeface="Inter" pitchFamily="34" charset="-122"/>
+                <a:cs typeface="Inter" pitchFamily="34" charset="-120"/>
+              </a:rPr>
+              <a:t>response time</a:t>
+            </a:r>
+            <a:endParaRPr lang="en-US" sz="1200" dirty="0"/>
+          </a:p>
+        </p:txBody>
+      </p:sp>
+      <p:sp>
+        <p:nvSpPr>
+          <p:cNvPr id="20" name="Text 18"/>
+          <p:cNvSpPr/>
+          <p:nvPr/>
+        </p:nvSpPr>
+        <p:spPr>
+          <a:xfrm>
+            <a:off x="731520" y="4297680"/>
+            <a:ext cx="7315200" cy="274320"/>
+          </a:xfrm>
+          <a:prstGeom prst="rect">
+            <a:avLst/>
+          </a:prstGeom>
+          <a:noFill/>
+          <a:ln/>
+        </p:spPr>
+        <p:txBody>
+          <a:bodyPr wrap="square" lIns="0" tIns="0" rIns="0" bIns="0" rtlCol="0" anchor="ctr"/>
+          <a:lstStyle/>
+          <a:p>
+            <a:pPr indent="0" marL="0">
+              <a:buNone/>
+            </a:pPr>
+            <a:r>
+              <a:rPr lang="en-US" sz="900" i="1" dirty="0">
+                <a:solidFill>
+                  <a:srgbClr val="6B7280"/>
+                </a:solidFill>
+                <a:latin typeface="Inter" pitchFamily="34" charset="0"/>
+                <a:ea typeface="Inter" pitchFamily="34" charset="-122"/>
+                <a:cs typeface="Inter" pitchFamily="34" charset="-120"/>
+              </a:rPr>
+              <a:t>* Based on typical results for mid-size US moving companies (5–20 trucks)</a:t>
+            </a:r>
+            <a:endParaRPr lang="en-US" sz="900" dirty="0"/>
           </a:p>
         </p:txBody>
       </p:sp>
@@ -5884,7 +6489,7 @@
     <p:bg>
       <p:bgPr>
         <a:solidFill>
-          <a:srgbClr val="F4F6FA"/>
+          <a:srgbClr val="F5F5F5"/>
         </a:solidFill>
       </p:bgPr>
     </p:bg>
@@ -5929,13 +6534,13 @@
             <a:r>
               <a:rPr lang="en-US" sz="1200" b="1" spc="400" kern="0" dirty="0">
                 <a:solidFill>
-                  <a:srgbClr val="00C9A7"/>
-                </a:solidFill>
-                <a:latin typeface="Trebuchet MS" pitchFamily="34" charset="0"/>
-                <a:ea typeface="Trebuchet MS" pitchFamily="34" charset="-122"/>
-                <a:cs typeface="Trebuchet MS" pitchFamily="34" charset="-120"/>
-              </a:rPr>
-              <a:t>GETTING STARTED</a:t>
+                  <a:srgbClr val="22C55E"/>
+                </a:solidFill>
+                <a:latin typeface="Inter" pitchFamily="34" charset="0"/>
+                <a:ea typeface="Inter" pitchFamily="34" charset="-122"/>
+                <a:cs typeface="Inter" pitchFamily="34" charset="-120"/>
+              </a:rPr>
+              <a:t>WHY AXVEER</a:t>
             </a:r>
             <a:endParaRPr lang="en-US" sz="1200" dirty="0"/>
           </a:p>
@@ -5950,33 +6555,50 @@
         <p:spPr>
           <a:xfrm>
             <a:off x="731520" y="822960"/>
-            <a:ext cx="7315200" cy="640080"/>
-          </a:xfrm>
-          <a:prstGeom prst="rect">
-            <a:avLst/>
-          </a:prstGeom>
-          <a:noFill/>
-          <a:ln/>
-        </p:spPr>
-        <p:txBody>
-          <a:bodyPr wrap="square" lIns="0" tIns="0" rIns="0" bIns="0" rtlCol="0" anchor="ctr"/>
-          <a:lstStyle/>
-          <a:p>
-            <a:pPr indent="0" marL="0">
-              <a:buNone/>
-            </a:pPr>
-            <a:r>
-              <a:rPr lang="en-US" sz="3000" b="1" dirty="0">
-                <a:solidFill>
-                  <a:srgbClr val="1E293B"/>
-                </a:solidFill>
-                <a:latin typeface="Trebuchet MS" pitchFamily="34" charset="0"/>
-                <a:ea typeface="Trebuchet MS" pitchFamily="34" charset="-122"/>
-                <a:cs typeface="Trebuchet MS" pitchFamily="34" charset="-120"/>
-              </a:rPr>
-              <a:t>Three Steps to Your First AI Employee</a:t>
-            </a:r>
-            <a:endParaRPr lang="en-US" sz="3000" dirty="0"/>
+            <a:ext cx="7315200" cy="914400"/>
+          </a:xfrm>
+          <a:prstGeom prst="rect">
+            <a:avLst/>
+          </a:prstGeom>
+          <a:noFill/>
+          <a:ln/>
+        </p:spPr>
+        <p:txBody>
+          <a:bodyPr wrap="square" lIns="0" tIns="0" rIns="0" bIns="0" rtlCol="0" anchor="ctr"/>
+          <a:lstStyle/>
+          <a:p>
+            <a:pPr indent="0" marL="0">
+              <a:buNone/>
+            </a:pPr>
+            <a:r>
+              <a:rPr lang="en-US" sz="2800" b="1" dirty="0">
+                <a:solidFill>
+                  <a:srgbClr val="000000"/>
+                </a:solidFill>
+                <a:latin typeface="Inter" pitchFamily="34" charset="0"/>
+                <a:ea typeface="Inter" pitchFamily="34" charset="-122"/>
+                <a:cs typeface="Inter" pitchFamily="34" charset="-120"/>
+              </a:rPr>
+              <a:t>Built by Engineers Who Understand</a:t>
+            </a:r>
+            <a:endParaRPr lang="en-US" sz="2800" dirty="0"/>
+          </a:p>
+          <a:p>
+            <a:pPr indent="0" marL="0">
+              <a:buNone/>
+            </a:pPr>
+            <a:r>
+              <a:rPr lang="en-US" sz="2800" b="1" dirty="0">
+                <a:solidFill>
+                  <a:srgbClr val="000000"/>
+                </a:solidFill>
+                <a:latin typeface="Inter" pitchFamily="34" charset="0"/>
+                <a:ea typeface="Inter" pitchFamily="34" charset="-122"/>
+                <a:cs typeface="Inter" pitchFamily="34" charset="-120"/>
+              </a:rPr>
+              <a:t>Both Software and Moving</a:t>
+            </a:r>
+            <a:endParaRPr lang="en-US" sz="2800" dirty="0"/>
           </a:p>
         </p:txBody>
       </p:sp>
@@ -5988,148 +6610,23 @@
         </p:nvSpPr>
         <p:spPr>
           <a:xfrm>
-            <a:off x="548640" y="1828800"/>
-            <a:ext cx="2606040" cy="2560320"/>
-          </a:xfrm>
-          <a:prstGeom prst="rect">
+            <a:off x="731520" y="2011680"/>
+            <a:ext cx="502920" cy="502920"/>
+          </a:xfrm>
+          <a:prstGeom prst="ellipse">
             <a:avLst/>
           </a:prstGeom>
           <a:solidFill>
-            <a:srgbClr val="FFFFFF"/>
+            <a:srgbClr val="22C55E">
+              <a:alpha val="15000"/>
+            </a:srgbClr>
           </a:solidFill>
           <a:ln/>
-          <a:effectLst>
-            <a:outerShdw sx="100000" sy="100000" kx="0" ky="0" algn="bl" rotWithShape="0" blurRad="76200" dist="25400" dir="8100000">
-              <a:srgbClr val="000000">
-                <a:alpha val="15000"/>
-              </a:srgbClr>
-            </a:outerShdw>
-          </a:effectLst>
-        </p:spPr>
-      </p:sp>
-      <p:sp>
-        <p:nvSpPr>
-          <p:cNvPr id="5" name="Text 3"/>
-          <p:cNvSpPr/>
-          <p:nvPr/>
-        </p:nvSpPr>
-        <p:spPr>
-          <a:xfrm>
-            <a:off x="731520" y="2011680"/>
-            <a:ext cx="640080" cy="640080"/>
-          </a:xfrm>
-          <a:prstGeom prst="rect">
-            <a:avLst/>
-          </a:prstGeom>
-          <a:noFill/>
-          <a:ln/>
-        </p:spPr>
-        <p:txBody>
-          <a:bodyPr wrap="square" lIns="0" tIns="0" rIns="0" bIns="0" rtlCol="0" anchor="ctr"/>
-          <a:lstStyle/>
-          <a:p>
-            <a:pPr indent="0" marL="0">
-              <a:buNone/>
-            </a:pPr>
-            <a:r>
-              <a:rPr lang="en-US" sz="3600" b="1" dirty="0">
-                <a:solidFill>
-                  <a:srgbClr val="00C9A7"/>
-                </a:solidFill>
-                <a:latin typeface="Trebuchet MS" pitchFamily="34" charset="0"/>
-                <a:ea typeface="Trebuchet MS" pitchFamily="34" charset="-122"/>
-                <a:cs typeface="Trebuchet MS" pitchFamily="34" charset="-120"/>
-              </a:rPr>
-              <a:t>1</a:t>
-            </a:r>
-            <a:endParaRPr lang="en-US" sz="3600" dirty="0"/>
-          </a:p>
-        </p:txBody>
-      </p:sp>
-      <p:sp>
-        <p:nvSpPr>
-          <p:cNvPr id="6" name="Text 4"/>
-          <p:cNvSpPr/>
-          <p:nvPr/>
-        </p:nvSpPr>
-        <p:spPr>
-          <a:xfrm>
-            <a:off x="731520" y="2743200"/>
-            <a:ext cx="2240280" cy="320040"/>
-          </a:xfrm>
-          <a:prstGeom prst="rect">
-            <a:avLst/>
-          </a:prstGeom>
-          <a:noFill/>
-          <a:ln/>
-        </p:spPr>
-        <p:txBody>
-          <a:bodyPr wrap="square" lIns="0" tIns="0" rIns="0" bIns="0" rtlCol="0" anchor="ctr"/>
-          <a:lstStyle/>
-          <a:p>
-            <a:pPr indent="0" marL="0">
-              <a:buNone/>
-            </a:pPr>
-            <a:r>
-              <a:rPr lang="en-US" sz="1500" b="1" dirty="0">
-                <a:solidFill>
-                  <a:srgbClr val="1E293B"/>
-                </a:solidFill>
-                <a:latin typeface="Trebuchet MS" pitchFamily="34" charset="0"/>
-                <a:ea typeface="Trebuchet MS" pitchFamily="34" charset="-122"/>
-                <a:cs typeface="Trebuchet MS" pitchFamily="34" charset="-120"/>
-              </a:rPr>
-              <a:t>Discovery Call</a:t>
-            </a:r>
-            <a:endParaRPr lang="en-US" sz="1500" dirty="0"/>
-          </a:p>
-        </p:txBody>
-      </p:sp>
-      <p:sp>
-        <p:nvSpPr>
-          <p:cNvPr id="7" name="Text 5"/>
-          <p:cNvSpPr/>
-          <p:nvPr/>
-        </p:nvSpPr>
-        <p:spPr>
-          <a:xfrm>
-            <a:off x="731520" y="3154680"/>
-            <a:ext cx="2240280" cy="822960"/>
-          </a:xfrm>
-          <a:prstGeom prst="rect">
-            <a:avLst/>
-          </a:prstGeom>
-          <a:noFill/>
-          <a:ln/>
-        </p:spPr>
-        <p:txBody>
-          <a:bodyPr wrap="square" lIns="0" tIns="0" rIns="0" bIns="0" rtlCol="0" anchor="ctr"/>
-          <a:lstStyle/>
-          <a:p>
-            <a:pPr indent="0" marL="0">
-              <a:lnSpc>
-                <a:spcPct val="130000"/>
-              </a:lnSpc>
-              <a:buNone/>
-            </a:pPr>
-            <a:r>
-              <a:rPr lang="en-US" sz="1100" dirty="0">
-                <a:solidFill>
-                  <a:srgbClr val="8896AB"/>
-                </a:solidFill>
-                <a:latin typeface="Calibri" pitchFamily="34" charset="0"/>
-                <a:ea typeface="Calibri" pitchFamily="34" charset="-122"/>
-                <a:cs typeface="Calibri" pitchFamily="34" charset="-120"/>
-              </a:rPr>
-              <a:t>We learn your pricing model, routes, services, and pain points. 30 minutes.</a:t>
-            </a:r>
-            <a:endParaRPr lang="en-US" sz="1100" dirty="0"/>
-          </a:p>
-        </p:txBody>
+        </p:spPr>
       </p:sp>
       <p:pic>
         <p:nvPicPr>
-          <p:cNvPr id="8" name="Image 0" descr="preencoded.png">    </p:cNvPr>
+          <p:cNvPr id="5" name="Image 0" descr="preencoded.png">    </p:cNvPr>
           <p:cNvPicPr>
             <a:picLocks noChangeAspect="1"/>
           </p:cNvPicPr>
@@ -6143,8 +6640,8 @@
         </p:blipFill>
         <p:spPr>
           <a:xfrm>
-            <a:off x="3246120" y="2834640"/>
-            <a:ext cx="274320" cy="274320"/>
+            <a:off x="804672" y="2084832"/>
+            <a:ext cx="365760" cy="365760"/>
           </a:xfrm>
           <a:prstGeom prst="rect">
             <a:avLst/>
@@ -6153,154 +6650,107 @@
       </p:pic>
       <p:sp>
         <p:nvSpPr>
-          <p:cNvPr id="9" name="Shape 6"/>
-          <p:cNvSpPr/>
-          <p:nvPr/>
-        </p:nvSpPr>
-        <p:spPr>
-          <a:xfrm>
-            <a:off x="3429000" y="1828800"/>
-            <a:ext cx="2606040" cy="2560320"/>
-          </a:xfrm>
-          <a:prstGeom prst="rect">
+          <p:cNvPr id="6" name="Text 3"/>
+          <p:cNvSpPr/>
+          <p:nvPr/>
+        </p:nvSpPr>
+        <p:spPr>
+          <a:xfrm>
+            <a:off x="1417320" y="2011680"/>
+            <a:ext cx="3200400" cy="274320"/>
+          </a:xfrm>
+          <a:prstGeom prst="rect">
+            <a:avLst/>
+          </a:prstGeom>
+          <a:noFill/>
+          <a:ln/>
+        </p:spPr>
+        <p:txBody>
+          <a:bodyPr wrap="square" lIns="0" tIns="0" rIns="0" bIns="0" rtlCol="0" anchor="ctr"/>
+          <a:lstStyle/>
+          <a:p>
+            <a:pPr indent="0" marL="0">
+              <a:buNone/>
+            </a:pPr>
+            <a:r>
+              <a:rPr lang="en-US" sz="1400" b="1" dirty="0">
+                <a:solidFill>
+                  <a:srgbClr val="000000"/>
+                </a:solidFill>
+                <a:latin typeface="Inter" pitchFamily="34" charset="0"/>
+                <a:ea typeface="Inter" pitchFamily="34" charset="-122"/>
+                <a:cs typeface="Inter" pitchFamily="34" charset="-120"/>
+              </a:rPr>
+              <a:t>Global Brain Trust</a:t>
+            </a:r>
+            <a:endParaRPr lang="en-US" sz="1400" dirty="0"/>
+          </a:p>
+        </p:txBody>
+      </p:sp>
+      <p:sp>
+        <p:nvSpPr>
+          <p:cNvPr id="7" name="Text 4"/>
+          <p:cNvSpPr/>
+          <p:nvPr/>
+        </p:nvSpPr>
+        <p:spPr>
+          <a:xfrm>
+            <a:off x="1417320" y="2331720"/>
+            <a:ext cx="3200400" cy="457200"/>
+          </a:xfrm>
+          <a:prstGeom prst="rect">
+            <a:avLst/>
+          </a:prstGeom>
+          <a:noFill/>
+          <a:ln/>
+        </p:spPr>
+        <p:txBody>
+          <a:bodyPr wrap="square" lIns="0" tIns="0" rIns="0" bIns="0" rtlCol="0" anchor="ctr"/>
+          <a:lstStyle/>
+          <a:p>
+            <a:pPr indent="0" marL="0">
+              <a:buNone/>
+            </a:pPr>
+            <a:r>
+              <a:rPr lang="en-US" sz="1100" dirty="0">
+                <a:solidFill>
+                  <a:srgbClr val="6B7280"/>
+                </a:solidFill>
+                <a:latin typeface="Inter" pitchFamily="34" charset="0"/>
+                <a:ea typeface="Inter" pitchFamily="34" charset="-122"/>
+                <a:cs typeface="Inter" pitchFamily="34" charset="-120"/>
+              </a:rPr>
+              <a:t>Elite engineers and strategists from Axveer's managed talent network.</a:t>
+            </a:r>
+            <a:endParaRPr lang="en-US" sz="1100" dirty="0"/>
+          </a:p>
+        </p:txBody>
+      </p:sp>
+      <p:sp>
+        <p:nvSpPr>
+          <p:cNvPr id="8" name="Shape 5"/>
+          <p:cNvSpPr/>
+          <p:nvPr/>
+        </p:nvSpPr>
+        <p:spPr>
+          <a:xfrm>
+            <a:off x="4846320" y="2011680"/>
+            <a:ext cx="502920" cy="502920"/>
+          </a:xfrm>
+          <a:prstGeom prst="ellipse">
             <a:avLst/>
           </a:prstGeom>
           <a:solidFill>
-            <a:srgbClr val="FFFFFF"/>
+            <a:srgbClr val="22C55E">
+              <a:alpha val="15000"/>
+            </a:srgbClr>
           </a:solidFill>
           <a:ln/>
-          <a:effectLst>
-            <a:outerShdw sx="100000" sy="100000" kx="0" ky="0" algn="bl" rotWithShape="0" blurRad="76200" dist="25400" dir="8100000">
-              <a:srgbClr val="000000">
-                <a:alpha val="15000"/>
-              </a:srgbClr>
-            </a:outerShdw>
-          </a:effectLst>
-        </p:spPr>
-      </p:sp>
-      <p:sp>
-        <p:nvSpPr>
-          <p:cNvPr id="10" name="Text 7"/>
-          <p:cNvSpPr/>
-          <p:nvPr/>
-        </p:nvSpPr>
-        <p:spPr>
-          <a:xfrm>
-            <a:off x="3611880" y="2011680"/>
-            <a:ext cx="640080" cy="640080"/>
-          </a:xfrm>
-          <a:prstGeom prst="rect">
-            <a:avLst/>
-          </a:prstGeom>
-          <a:noFill/>
-          <a:ln/>
-        </p:spPr>
-        <p:txBody>
-          <a:bodyPr wrap="square" lIns="0" tIns="0" rIns="0" bIns="0" rtlCol="0" anchor="ctr"/>
-          <a:lstStyle/>
-          <a:p>
-            <a:pPr indent="0" marL="0">
-              <a:buNone/>
-            </a:pPr>
-            <a:r>
-              <a:rPr lang="en-US" sz="3600" b="1" dirty="0">
-                <a:solidFill>
-                  <a:srgbClr val="00C9A7"/>
-                </a:solidFill>
-                <a:latin typeface="Trebuchet MS" pitchFamily="34" charset="0"/>
-                <a:ea typeface="Trebuchet MS" pitchFamily="34" charset="-122"/>
-                <a:cs typeface="Trebuchet MS" pitchFamily="34" charset="-120"/>
-              </a:rPr>
-              <a:t>2</a:t>
-            </a:r>
-            <a:endParaRPr lang="en-US" sz="3600" dirty="0"/>
-          </a:p>
-        </p:txBody>
-      </p:sp>
-      <p:sp>
-        <p:nvSpPr>
-          <p:cNvPr id="11" name="Text 8"/>
-          <p:cNvSpPr/>
-          <p:nvPr/>
-        </p:nvSpPr>
-        <p:spPr>
-          <a:xfrm>
-            <a:off x="3611880" y="2743200"/>
-            <a:ext cx="2240280" cy="320040"/>
-          </a:xfrm>
-          <a:prstGeom prst="rect">
-            <a:avLst/>
-          </a:prstGeom>
-          <a:noFill/>
-          <a:ln/>
-        </p:spPr>
-        <p:txBody>
-          <a:bodyPr wrap="square" lIns="0" tIns="0" rIns="0" bIns="0" rtlCol="0" anchor="ctr"/>
-          <a:lstStyle/>
-          <a:p>
-            <a:pPr indent="0" marL="0">
-              <a:buNone/>
-            </a:pPr>
-            <a:r>
-              <a:rPr lang="en-US" sz="1500" b="1" dirty="0">
-                <a:solidFill>
-                  <a:srgbClr val="1E293B"/>
-                </a:solidFill>
-                <a:latin typeface="Trebuchet MS" pitchFamily="34" charset="0"/>
-                <a:ea typeface="Trebuchet MS" pitchFamily="34" charset="-122"/>
-                <a:cs typeface="Trebuchet MS" pitchFamily="34" charset="-120"/>
-              </a:rPr>
-              <a:t>Quote Bot Deployment</a:t>
-            </a:r>
-            <a:endParaRPr lang="en-US" sz="1500" dirty="0"/>
-          </a:p>
-        </p:txBody>
-      </p:sp>
-      <p:sp>
-        <p:nvSpPr>
-          <p:cNvPr id="12" name="Text 9"/>
-          <p:cNvSpPr/>
-          <p:nvPr/>
-        </p:nvSpPr>
-        <p:spPr>
-          <a:xfrm>
-            <a:off x="3611880" y="3154680"/>
-            <a:ext cx="2240280" cy="822960"/>
-          </a:xfrm>
-          <a:prstGeom prst="rect">
-            <a:avLst/>
-          </a:prstGeom>
-          <a:noFill/>
-          <a:ln/>
-        </p:spPr>
-        <p:txBody>
-          <a:bodyPr wrap="square" lIns="0" tIns="0" rIns="0" bIns="0" rtlCol="0" anchor="ctr"/>
-          <a:lstStyle/>
-          <a:p>
-            <a:pPr indent="0" marL="0">
-              <a:lnSpc>
-                <a:spcPct val="130000"/>
-              </a:lnSpc>
-              <a:buNone/>
-            </a:pPr>
-            <a:r>
-              <a:rPr lang="en-US" sz="1100" dirty="0">
-                <a:solidFill>
-                  <a:srgbClr val="8896AB"/>
-                </a:solidFill>
-                <a:latin typeface="Calibri" pitchFamily="34" charset="0"/>
-                <a:ea typeface="Calibri" pitchFamily="34" charset="-122"/>
-                <a:cs typeface="Calibri" pitchFamily="34" charset="-120"/>
-              </a:rPr>
-              <a:t>We configure and deploy your branded AI quote calculator within 2 weeks.</a:t>
-            </a:r>
-            <a:endParaRPr lang="en-US" sz="1100" dirty="0"/>
-          </a:p>
-        </p:txBody>
+        </p:spPr>
       </p:sp>
       <p:pic>
         <p:nvPicPr>
-          <p:cNvPr id="13" name="Image 1" descr="preencoded.png">    </p:cNvPr>
+          <p:cNvPr id="9" name="Image 1" descr="preencoded.png">    </p:cNvPr>
           <p:cNvPicPr>
             <a:picLocks noChangeAspect="1"/>
           </p:cNvPicPr>
@@ -6314,8 +6764,8 @@
         </p:blipFill>
         <p:spPr>
           <a:xfrm>
-            <a:off x="6126480" y="2834640"/>
-            <a:ext cx="274320" cy="274320"/>
+            <a:off x="4919472" y="2084832"/>
+            <a:ext cx="365760" cy="365760"/>
           </a:xfrm>
           <a:prstGeom prst="rect">
             <a:avLst/>
@@ -6324,146 +6774,325 @@
       </p:pic>
       <p:sp>
         <p:nvSpPr>
-          <p:cNvPr id="14" name="Shape 10"/>
-          <p:cNvSpPr/>
-          <p:nvPr/>
-        </p:nvSpPr>
-        <p:spPr>
-          <a:xfrm>
-            <a:off x="6309360" y="1828800"/>
-            <a:ext cx="2606040" cy="2560320"/>
-          </a:xfrm>
-          <a:prstGeom prst="rect">
+          <p:cNvPr id="10" name="Text 6"/>
+          <p:cNvSpPr/>
+          <p:nvPr/>
+        </p:nvSpPr>
+        <p:spPr>
+          <a:xfrm>
+            <a:off x="5532120" y="2011680"/>
+            <a:ext cx="3200400" cy="274320"/>
+          </a:xfrm>
+          <a:prstGeom prst="rect">
+            <a:avLst/>
+          </a:prstGeom>
+          <a:noFill/>
+          <a:ln/>
+        </p:spPr>
+        <p:txBody>
+          <a:bodyPr wrap="square" lIns="0" tIns="0" rIns="0" bIns="0" rtlCol="0" anchor="ctr"/>
+          <a:lstStyle/>
+          <a:p>
+            <a:pPr indent="0" marL="0">
+              <a:buNone/>
+            </a:pPr>
+            <a:r>
+              <a:rPr lang="en-US" sz="1400" b="1" dirty="0">
+                <a:solidFill>
+                  <a:srgbClr val="000000"/>
+                </a:solidFill>
+                <a:latin typeface="Inter" pitchFamily="34" charset="0"/>
+                <a:ea typeface="Inter" pitchFamily="34" charset="-122"/>
+                <a:cs typeface="Inter" pitchFamily="34" charset="-120"/>
+              </a:rPr>
+              <a:t>Moving Industry Expertise</a:t>
+            </a:r>
+            <a:endParaRPr lang="en-US" sz="1400" dirty="0"/>
+          </a:p>
+        </p:txBody>
+      </p:sp>
+      <p:sp>
+        <p:nvSpPr>
+          <p:cNvPr id="11" name="Text 7"/>
+          <p:cNvSpPr/>
+          <p:nvPr/>
+        </p:nvSpPr>
+        <p:spPr>
+          <a:xfrm>
+            <a:off x="5532120" y="2331720"/>
+            <a:ext cx="3200400" cy="457200"/>
+          </a:xfrm>
+          <a:prstGeom prst="rect">
+            <a:avLst/>
+          </a:prstGeom>
+          <a:noFill/>
+          <a:ln/>
+        </p:spPr>
+        <p:txBody>
+          <a:bodyPr wrap="square" lIns="0" tIns="0" rIns="0" bIns="0" rtlCol="0" anchor="ctr"/>
+          <a:lstStyle/>
+          <a:p>
+            <a:pPr indent="0" marL="0">
+              <a:buNone/>
+            </a:pPr>
+            <a:r>
+              <a:rPr lang="en-US" sz="1100" dirty="0">
+                <a:solidFill>
+                  <a:srgbClr val="6B7280"/>
+                </a:solidFill>
+                <a:latin typeface="Inter" pitchFamily="34" charset="0"/>
+                <a:ea typeface="Inter" pitchFamily="34" charset="-122"/>
+                <a:cs typeface="Inter" pitchFamily="34" charset="-120"/>
+              </a:rPr>
+              <a:t>We already built a production-grade quote system. We know your business.</a:t>
+            </a:r>
+            <a:endParaRPr lang="en-US" sz="1100" dirty="0"/>
+          </a:p>
+        </p:txBody>
+      </p:sp>
+      <p:sp>
+        <p:nvSpPr>
+          <p:cNvPr id="12" name="Shape 8"/>
+          <p:cNvSpPr/>
+          <p:nvPr/>
+        </p:nvSpPr>
+        <p:spPr>
+          <a:xfrm>
+            <a:off x="731520" y="3383280"/>
+            <a:ext cx="502920" cy="502920"/>
+          </a:xfrm>
+          <a:prstGeom prst="ellipse">
             <a:avLst/>
           </a:prstGeom>
           <a:solidFill>
-            <a:srgbClr val="FFFFFF"/>
+            <a:srgbClr val="22C55E">
+              <a:alpha val="15000"/>
+            </a:srgbClr>
           </a:solidFill>
           <a:ln/>
-          <a:effectLst>
-            <a:outerShdw sx="100000" sy="100000" kx="0" ky="0" algn="bl" rotWithShape="0" blurRad="76200" dist="25400" dir="8100000">
-              <a:srgbClr val="000000">
-                <a:alpha val="15000"/>
-              </a:srgbClr>
-            </a:outerShdw>
-          </a:effectLst>
-        </p:spPr>
-      </p:sp>
-      <p:sp>
-        <p:nvSpPr>
-          <p:cNvPr id="15" name="Text 11"/>
-          <p:cNvSpPr/>
-          <p:nvPr/>
-        </p:nvSpPr>
-        <p:spPr>
-          <a:xfrm>
-            <a:off x="6492240" y="2011680"/>
-            <a:ext cx="640080" cy="640080"/>
-          </a:xfrm>
-          <a:prstGeom prst="rect">
-            <a:avLst/>
-          </a:prstGeom>
-          <a:noFill/>
-          <a:ln/>
-        </p:spPr>
-        <p:txBody>
-          <a:bodyPr wrap="square" lIns="0" tIns="0" rIns="0" bIns="0" rtlCol="0" anchor="ctr"/>
-          <a:lstStyle/>
-          <a:p>
-            <a:pPr indent="0" marL="0">
-              <a:buNone/>
-            </a:pPr>
-            <a:r>
-              <a:rPr lang="en-US" sz="3600" b="1" dirty="0">
-                <a:solidFill>
-                  <a:srgbClr val="00C9A7"/>
-                </a:solidFill>
-                <a:latin typeface="Trebuchet MS" pitchFamily="34" charset="0"/>
-                <a:ea typeface="Trebuchet MS" pitchFamily="34" charset="-122"/>
-                <a:cs typeface="Trebuchet MS" pitchFamily="34" charset="-120"/>
-              </a:rPr>
-              <a:t>3</a:t>
-            </a:r>
-            <a:endParaRPr lang="en-US" sz="3600" dirty="0"/>
-          </a:p>
-        </p:txBody>
-      </p:sp>
-      <p:sp>
-        <p:nvSpPr>
-          <p:cNvPr id="16" name="Text 12"/>
-          <p:cNvSpPr/>
-          <p:nvPr/>
-        </p:nvSpPr>
-        <p:spPr>
-          <a:xfrm>
-            <a:off x="6492240" y="2743200"/>
-            <a:ext cx="2240280" cy="320040"/>
-          </a:xfrm>
-          <a:prstGeom prst="rect">
-            <a:avLst/>
-          </a:prstGeom>
-          <a:noFill/>
-          <a:ln/>
-        </p:spPr>
-        <p:txBody>
-          <a:bodyPr wrap="square" lIns="0" tIns="0" rIns="0" bIns="0" rtlCol="0" anchor="ctr"/>
-          <a:lstStyle/>
-          <a:p>
-            <a:pPr indent="0" marL="0">
-              <a:buNone/>
-            </a:pPr>
-            <a:r>
-              <a:rPr lang="en-US" sz="1500" b="1" dirty="0">
-                <a:solidFill>
-                  <a:srgbClr val="1E293B"/>
-                </a:solidFill>
-                <a:latin typeface="Trebuchet MS" pitchFamily="34" charset="0"/>
-                <a:ea typeface="Trebuchet MS" pitchFamily="34" charset="-122"/>
-                <a:cs typeface="Trebuchet MS" pitchFamily="34" charset="-120"/>
-              </a:rPr>
-              <a:t>Measure &amp; Expand</a:t>
-            </a:r>
-            <a:endParaRPr lang="en-US" sz="1500" dirty="0"/>
-          </a:p>
-        </p:txBody>
-      </p:sp>
-      <p:sp>
-        <p:nvSpPr>
-          <p:cNvPr id="17" name="Text 13"/>
-          <p:cNvSpPr/>
-          <p:nvPr/>
-        </p:nvSpPr>
-        <p:spPr>
-          <a:xfrm>
-            <a:off x="6492240" y="3154680"/>
-            <a:ext cx="2240280" cy="822960"/>
-          </a:xfrm>
-          <a:prstGeom prst="rect">
-            <a:avLst/>
-          </a:prstGeom>
-          <a:noFill/>
-          <a:ln/>
-        </p:spPr>
-        <p:txBody>
-          <a:bodyPr wrap="square" lIns="0" tIns="0" rIns="0" bIns="0" rtlCol="0" anchor="ctr"/>
-          <a:lstStyle/>
-          <a:p>
-            <a:pPr indent="0" marL="0">
-              <a:lnSpc>
-                <a:spcPct val="130000"/>
-              </a:lnSpc>
+        </p:spPr>
+      </p:sp>
+      <p:pic>
+        <p:nvPicPr>
+          <p:cNvPr id="13" name="Image 2" descr="preencoded.png">    </p:cNvPr>
+          <p:cNvPicPr>
+            <a:picLocks noChangeAspect="1"/>
+          </p:cNvPicPr>
+          <p:nvPr/>
+        </p:nvPicPr>
+        <p:blipFill>
+          <a:blip r:embed="rId3"/>
+          <a:stretch>
+            <a:fillRect/>
+          </a:stretch>
+        </p:blipFill>
+        <p:spPr>
+          <a:xfrm>
+            <a:off x="804672" y="3456432"/>
+            <a:ext cx="365760" cy="365760"/>
+          </a:xfrm>
+          <a:prstGeom prst="rect">
+            <a:avLst/>
+          </a:prstGeom>
+        </p:spPr>
+      </p:pic>
+      <p:sp>
+        <p:nvSpPr>
+          <p:cNvPr id="14" name="Text 9"/>
+          <p:cNvSpPr/>
+          <p:nvPr/>
+        </p:nvSpPr>
+        <p:spPr>
+          <a:xfrm>
+            <a:off x="1417320" y="3383280"/>
+            <a:ext cx="3200400" cy="274320"/>
+          </a:xfrm>
+          <a:prstGeom prst="rect">
+            <a:avLst/>
+          </a:prstGeom>
+          <a:noFill/>
+          <a:ln/>
+        </p:spPr>
+        <p:txBody>
+          <a:bodyPr wrap="square" lIns="0" tIns="0" rIns="0" bIns="0" rtlCol="0" anchor="ctr"/>
+          <a:lstStyle/>
+          <a:p>
+            <a:pPr indent="0" marL="0">
+              <a:buNone/>
+            </a:pPr>
+            <a:r>
+              <a:rPr lang="en-US" sz="1400" b="1" dirty="0">
+                <a:solidFill>
+                  <a:srgbClr val="000000"/>
+                </a:solidFill>
+                <a:latin typeface="Inter" pitchFamily="34" charset="0"/>
+                <a:ea typeface="Inter" pitchFamily="34" charset="-122"/>
+                <a:cs typeface="Inter" pitchFamily="34" charset="-120"/>
+              </a:rPr>
+              <a:t>Full-Stack Delivery</a:t>
+            </a:r>
+            <a:endParaRPr lang="en-US" sz="1400" dirty="0"/>
+          </a:p>
+        </p:txBody>
+      </p:sp>
+      <p:sp>
+        <p:nvSpPr>
+          <p:cNvPr id="15" name="Text 10"/>
+          <p:cNvSpPr/>
+          <p:nvPr/>
+        </p:nvSpPr>
+        <p:spPr>
+          <a:xfrm>
+            <a:off x="1417320" y="3703320"/>
+            <a:ext cx="3200400" cy="457200"/>
+          </a:xfrm>
+          <a:prstGeom prst="rect">
+            <a:avLst/>
+          </a:prstGeom>
+          <a:noFill/>
+          <a:ln/>
+        </p:spPr>
+        <p:txBody>
+          <a:bodyPr wrap="square" lIns="0" tIns="0" rIns="0" bIns="0" rtlCol="0" anchor="ctr"/>
+          <a:lstStyle/>
+          <a:p>
+            <a:pPr indent="0" marL="0">
               <a:buNone/>
             </a:pPr>
             <a:r>
               <a:rPr lang="en-US" sz="1100" dirty="0">
                 <a:solidFill>
-                  <a:srgbClr val="8896AB"/>
-                </a:solidFill>
-                <a:latin typeface="Calibri" pitchFamily="34" charset="0"/>
-                <a:ea typeface="Calibri" pitchFamily="34" charset="-122"/>
-                <a:cs typeface="Calibri" pitchFamily="34" charset="-120"/>
-              </a:rPr>
-              <a:t>Track conversion rates, cost savings, and customer satisfaction. Then scale.</a:t>
+                  <a:srgbClr val="6B7280"/>
+                </a:solidFill>
+                <a:latin typeface="Inter" pitchFamily="34" charset="0"/>
+                <a:ea typeface="Inter" pitchFamily="34" charset="-122"/>
+                <a:cs typeface="Inter" pitchFamily="34" charset="-120"/>
+              </a:rPr>
+              <a:t>Strategy, engineering, deployment, and support — one team, one contract.</a:t>
+            </a:r>
+            <a:endParaRPr lang="en-US" sz="1100" dirty="0"/>
+          </a:p>
+        </p:txBody>
+      </p:sp>
+      <p:sp>
+        <p:nvSpPr>
+          <p:cNvPr id="16" name="Shape 11"/>
+          <p:cNvSpPr/>
+          <p:nvPr/>
+        </p:nvSpPr>
+        <p:spPr>
+          <a:xfrm>
+            <a:off x="4846320" y="3383280"/>
+            <a:ext cx="502920" cy="502920"/>
+          </a:xfrm>
+          <a:prstGeom prst="ellipse">
+            <a:avLst/>
+          </a:prstGeom>
+          <a:solidFill>
+            <a:srgbClr val="22C55E">
+              <a:alpha val="15000"/>
+            </a:srgbClr>
+          </a:solidFill>
+          <a:ln/>
+        </p:spPr>
+      </p:sp>
+      <p:pic>
+        <p:nvPicPr>
+          <p:cNvPr id="17" name="Image 3" descr="preencoded.png">    </p:cNvPr>
+          <p:cNvPicPr>
+            <a:picLocks noChangeAspect="1"/>
+          </p:cNvPicPr>
+          <p:nvPr/>
+        </p:nvPicPr>
+        <p:blipFill>
+          <a:blip r:embed="rId4"/>
+          <a:stretch>
+            <a:fillRect/>
+          </a:stretch>
+        </p:blipFill>
+        <p:spPr>
+          <a:xfrm>
+            <a:off x="4919472" y="3456432"/>
+            <a:ext cx="365760" cy="365760"/>
+          </a:xfrm>
+          <a:prstGeom prst="rect">
+            <a:avLst/>
+          </a:prstGeom>
+        </p:spPr>
+      </p:pic>
+      <p:sp>
+        <p:nvSpPr>
+          <p:cNvPr id="18" name="Text 12"/>
+          <p:cNvSpPr/>
+          <p:nvPr/>
+        </p:nvSpPr>
+        <p:spPr>
+          <a:xfrm>
+            <a:off x="5532120" y="3383280"/>
+            <a:ext cx="3200400" cy="274320"/>
+          </a:xfrm>
+          <a:prstGeom prst="rect">
+            <a:avLst/>
+          </a:prstGeom>
+          <a:noFill/>
+          <a:ln/>
+        </p:spPr>
+        <p:txBody>
+          <a:bodyPr wrap="square" lIns="0" tIns="0" rIns="0" bIns="0" rtlCol="0" anchor="ctr"/>
+          <a:lstStyle/>
+          <a:p>
+            <a:pPr indent="0" marL="0">
+              <a:buNone/>
+            </a:pPr>
+            <a:r>
+              <a:rPr lang="en-US" sz="1400" b="1" dirty="0">
+                <a:solidFill>
+                  <a:srgbClr val="000000"/>
+                </a:solidFill>
+                <a:latin typeface="Inter" pitchFamily="34" charset="0"/>
+                <a:ea typeface="Inter" pitchFamily="34" charset="-122"/>
+                <a:cs typeface="Inter" pitchFamily="34" charset="-120"/>
+              </a:rPr>
+              <a:t>Start Small, Scale Fast</a:t>
+            </a:r>
+            <a:endParaRPr lang="en-US" sz="1400" dirty="0"/>
+          </a:p>
+        </p:txBody>
+      </p:sp>
+      <p:sp>
+        <p:nvSpPr>
+          <p:cNvPr id="19" name="Text 13"/>
+          <p:cNvSpPr/>
+          <p:nvPr/>
+        </p:nvSpPr>
+        <p:spPr>
+          <a:xfrm>
+            <a:off x="5532120" y="3703320"/>
+            <a:ext cx="3200400" cy="457200"/>
+          </a:xfrm>
+          <a:prstGeom prst="rect">
+            <a:avLst/>
+          </a:prstGeom>
+          <a:noFill/>
+          <a:ln/>
+        </p:spPr>
+        <p:txBody>
+          <a:bodyPr wrap="square" lIns="0" tIns="0" rIns="0" bIns="0" rtlCol="0" anchor="ctr"/>
+          <a:lstStyle/>
+          <a:p>
+            <a:pPr indent="0" marL="0">
+              <a:buNone/>
+            </a:pPr>
+            <a:r>
+              <a:rPr lang="en-US" sz="1100" dirty="0">
+                <a:solidFill>
+                  <a:srgbClr val="6B7280"/>
+                </a:solidFill>
+                <a:latin typeface="Inter" pitchFamily="34" charset="0"/>
+                <a:ea typeface="Inter" pitchFamily="34" charset="-122"/>
+                <a:cs typeface="Inter" pitchFamily="34" charset="-120"/>
+              </a:rPr>
+              <a:t>Begin with the quote form. Add AI voice and more as you see ROI. No lock-in.</a:t>
             </a:r>
             <a:endParaRPr lang="en-US" sz="1100" dirty="0"/>
           </a:p>
@@ -6483,7 +7112,7 @@
     <p:bg>
       <p:bgPr>
         <a:solidFill>
-          <a:srgbClr val="0A1628"/>
+          <a:srgbClr val="000000"/>
         </a:solidFill>
       </p:bgPr>
     </p:bg>
@@ -6510,22 +7139,19 @@
         <p:spPr>
           <a:xfrm>
             <a:off x="731520" y="914400"/>
-            <a:ext cx="7315200" cy="1463040"/>
-          </a:xfrm>
-          <a:prstGeom prst="rect">
-            <a:avLst/>
-          </a:prstGeom>
-          <a:noFill/>
-          <a:ln/>
-        </p:spPr>
-        <p:txBody>
-          <a:bodyPr wrap="square" lIns="0" tIns="0" rIns="0" bIns="0" rtlCol="0" anchor="ctr"/>
-          <a:lstStyle/>
-          <a:p>
-            <a:pPr indent="0" marL="0">
-              <a:lnSpc>
-                <a:spcPct val="110000"/>
-              </a:lnSpc>
+            <a:ext cx="7315200" cy="914400"/>
+          </a:xfrm>
+          <a:prstGeom prst="rect">
+            <a:avLst/>
+          </a:prstGeom>
+          <a:noFill/>
+          <a:ln/>
+        </p:spPr>
+        <p:txBody>
+          <a:bodyPr wrap="square" lIns="0" tIns="0" rIns="0" bIns="0" rtlCol="0" anchor="ctr"/>
+          <a:lstStyle/>
+          <a:p>
+            <a:pPr indent="0" marL="0">
               <a:buNone/>
             </a:pPr>
             <a:r>
@@ -6533,91 +7159,260 @@
                 <a:solidFill>
                   <a:srgbClr val="FFFFFF"/>
                 </a:solidFill>
-                <a:latin typeface="Trebuchet MS" pitchFamily="34" charset="0"/>
-                <a:ea typeface="Trebuchet MS" pitchFamily="34" charset="-122"/>
-                <a:cs typeface="Trebuchet MS" pitchFamily="34" charset="-120"/>
-              </a:rPr>
-              <a:t>Let's Automate</a:t>
+                <a:latin typeface="Inter" pitchFamily="34" charset="0"/>
+                <a:ea typeface="Inter" pitchFamily="34" charset="-122"/>
+                <a:cs typeface="Inter" pitchFamily="34" charset="-120"/>
+              </a:rPr>
+              <a:t>Ready to Get Started?</a:t>
             </a:r>
             <a:endParaRPr lang="en-US" sz="4000" dirty="0"/>
           </a:p>
-          <a:p>
-            <a:pPr indent="0" marL="0">
-              <a:lnSpc>
-                <a:spcPct val="110000"/>
-              </a:lnSpc>
-              <a:buNone/>
-            </a:pPr>
-            <a:r>
-              <a:rPr lang="en-US" sz="4000" b="1" dirty="0">
+        </p:txBody>
+      </p:sp>
+      <p:sp>
+        <p:nvSpPr>
+          <p:cNvPr id="3" name="Text 1"/>
+          <p:cNvSpPr/>
+          <p:nvPr/>
+        </p:nvSpPr>
+        <p:spPr>
+          <a:xfrm>
+            <a:off x="731520" y="1920240"/>
+            <a:ext cx="6400800" cy="411480"/>
+          </a:xfrm>
+          <a:prstGeom prst="rect">
+            <a:avLst/>
+          </a:prstGeom>
+          <a:noFill/>
+          <a:ln/>
+        </p:spPr>
+        <p:txBody>
+          <a:bodyPr wrap="square" lIns="0" tIns="0" rIns="0" bIns="0" rtlCol="0" anchor="ctr"/>
+          <a:lstStyle/>
+          <a:p>
+            <a:pPr indent="0" marL="0">
+              <a:buNone/>
+            </a:pPr>
+            <a:r>
+              <a:rPr lang="en-US" sz="1500" dirty="0">
+                <a:solidFill>
+                  <a:srgbClr val="6B7280"/>
+                </a:solidFill>
+                <a:latin typeface="Inter" pitchFamily="34" charset="0"/>
+                <a:ea typeface="Inter" pitchFamily="34" charset="-122"/>
+                <a:cs typeface="Inter" pitchFamily="34" charset="-120"/>
+              </a:rPr>
+              <a:t>We can kick off deployment this week. Here's what happens next:</a:t>
+            </a:r>
+            <a:endParaRPr lang="en-US" sz="1500" dirty="0"/>
+          </a:p>
+        </p:txBody>
+      </p:sp>
+      <p:pic>
+        <p:nvPicPr>
+          <p:cNvPr id="4" name="Image 0" descr="preencoded.png">    </p:cNvPr>
+          <p:cNvPicPr>
+            <a:picLocks noChangeAspect="1"/>
+          </p:cNvPicPr>
+          <p:nvPr/>
+        </p:nvPicPr>
+        <p:blipFill>
+          <a:blip r:embed="rId1"/>
+          <a:stretch>
+            <a:fillRect/>
+          </a:stretch>
+        </p:blipFill>
+        <p:spPr>
+          <a:xfrm>
+            <a:off x="914400" y="2606040"/>
+            <a:ext cx="274320" cy="274320"/>
+          </a:xfrm>
+          <a:prstGeom prst="rect">
+            <a:avLst/>
+          </a:prstGeom>
+        </p:spPr>
+      </p:pic>
+      <p:sp>
+        <p:nvSpPr>
+          <p:cNvPr id="5" name="Text 2"/>
+          <p:cNvSpPr/>
+          <p:nvPr/>
+        </p:nvSpPr>
+        <p:spPr>
+          <a:xfrm>
+            <a:off x="1371600" y="2560320"/>
+            <a:ext cx="5486400" cy="365760"/>
+          </a:xfrm>
+          <a:prstGeom prst="rect">
+            <a:avLst/>
+          </a:prstGeom>
+          <a:noFill/>
+          <a:ln/>
+        </p:spPr>
+        <p:txBody>
+          <a:bodyPr wrap="square" lIns="0" tIns="0" rIns="0" bIns="0" rtlCol="0" anchor="ctr"/>
+          <a:lstStyle/>
+          <a:p>
+            <a:pPr indent="0" marL="0">
+              <a:buNone/>
+            </a:pPr>
+            <a:r>
+              <a:rPr lang="en-US" sz="1300" dirty="0">
                 <a:solidFill>
                   <a:srgbClr val="FFFFFF"/>
                 </a:solidFill>
-                <a:latin typeface="Trebuchet MS" pitchFamily="34" charset="0"/>
-                <a:ea typeface="Trebuchet MS" pitchFamily="34" charset="-122"/>
-                <a:cs typeface="Trebuchet MS" pitchFamily="34" charset="-120"/>
-              </a:rPr>
-              <a:t>Your Moving Business</a:t>
-            </a:r>
-            <a:endParaRPr lang="en-US" sz="4000" dirty="0"/>
-          </a:p>
-        </p:txBody>
-      </p:sp>
-      <p:sp>
-        <p:nvSpPr>
-          <p:cNvPr id="3" name="Text 1"/>
-          <p:cNvSpPr/>
-          <p:nvPr/>
-        </p:nvSpPr>
-        <p:spPr>
-          <a:xfrm>
-            <a:off x="731520" y="2560320"/>
-            <a:ext cx="6400800" cy="457200"/>
-          </a:xfrm>
-          <a:prstGeom prst="rect">
-            <a:avLst/>
-          </a:prstGeom>
-          <a:noFill/>
-          <a:ln/>
-        </p:spPr>
-        <p:txBody>
-          <a:bodyPr wrap="square" lIns="0" tIns="0" rIns="0" bIns="0" rtlCol="0" anchor="ctr"/>
-          <a:lstStyle/>
-          <a:p>
-            <a:pPr indent="0" marL="0">
-              <a:buNone/>
-            </a:pPr>
-            <a:r>
-              <a:rPr lang="en-US" sz="1500" dirty="0">
-                <a:solidFill>
-                  <a:srgbClr val="8896AB"/>
-                </a:solidFill>
-                <a:latin typeface="Calibri" pitchFamily="34" charset="0"/>
-                <a:ea typeface="Calibri" pitchFamily="34" charset="-122"/>
-                <a:cs typeface="Calibri" pitchFamily="34" charset="-120"/>
-              </a:rPr>
-              <a:t>Start with a free discovery call. See your custom quote bot demo in action.</a:t>
-            </a:r>
-            <a:endParaRPr lang="en-US" sz="1500" dirty="0"/>
-          </a:p>
-        </p:txBody>
-      </p:sp>
-      <p:sp>
-        <p:nvSpPr>
-          <p:cNvPr id="4" name="Shape 2"/>
-          <p:cNvSpPr/>
-          <p:nvPr/>
-        </p:nvSpPr>
-        <p:spPr>
-          <a:xfrm>
-            <a:off x="731520" y="3383280"/>
-            <a:ext cx="2926080" cy="548640"/>
+                <a:latin typeface="Inter" pitchFamily="34" charset="0"/>
+                <a:ea typeface="Inter" pitchFamily="34" charset="-122"/>
+                <a:cs typeface="Inter" pitchFamily="34" charset="-120"/>
+              </a:rPr>
+              <a:t>We configure your pricing model and branding</a:t>
+            </a:r>
+            <a:endParaRPr lang="en-US" sz="1300" dirty="0"/>
+          </a:p>
+        </p:txBody>
+      </p:sp>
+      <p:pic>
+        <p:nvPicPr>
+          <p:cNvPr id="6" name="Image 1" descr="preencoded.png">    </p:cNvPr>
+          <p:cNvPicPr>
+            <a:picLocks noChangeAspect="1"/>
+          </p:cNvPicPr>
+          <p:nvPr/>
+        </p:nvPicPr>
+        <p:blipFill>
+          <a:blip r:embed="rId2"/>
+          <a:stretch>
+            <a:fillRect/>
+          </a:stretch>
+        </p:blipFill>
+        <p:spPr>
+          <a:xfrm>
+            <a:off x="914400" y="3108960"/>
+            <a:ext cx="274320" cy="274320"/>
+          </a:xfrm>
+          <a:prstGeom prst="rect">
+            <a:avLst/>
+          </a:prstGeom>
+        </p:spPr>
+      </p:pic>
+      <p:sp>
+        <p:nvSpPr>
+          <p:cNvPr id="7" name="Text 3"/>
+          <p:cNvSpPr/>
+          <p:nvPr/>
+        </p:nvSpPr>
+        <p:spPr>
+          <a:xfrm>
+            <a:off x="1371600" y="3063240"/>
+            <a:ext cx="5486400" cy="365760"/>
+          </a:xfrm>
+          <a:prstGeom prst="rect">
+            <a:avLst/>
+          </a:prstGeom>
+          <a:noFill/>
+          <a:ln/>
+        </p:spPr>
+        <p:txBody>
+          <a:bodyPr wrap="square" lIns="0" tIns="0" rIns="0" bIns="0" rtlCol="0" anchor="ctr"/>
+          <a:lstStyle/>
+          <a:p>
+            <a:pPr indent="0" marL="0">
+              <a:buNone/>
+            </a:pPr>
+            <a:r>
+              <a:rPr lang="en-US" sz="1300" dirty="0">
+                <a:solidFill>
+                  <a:srgbClr val="FFFFFF"/>
+                </a:solidFill>
+                <a:latin typeface="Inter" pitchFamily="34" charset="0"/>
+                <a:ea typeface="Inter" pitchFamily="34" charset="-122"/>
+                <a:cs typeface="Inter" pitchFamily="34" charset="-120"/>
+              </a:rPr>
+              <a:t>Your quote form goes live on your site within two weeks</a:t>
+            </a:r>
+            <a:endParaRPr lang="en-US" sz="1300" dirty="0"/>
+          </a:p>
+        </p:txBody>
+      </p:sp>
+      <p:pic>
+        <p:nvPicPr>
+          <p:cNvPr id="8" name="Image 2" descr="preencoded.png">    </p:cNvPr>
+          <p:cNvPicPr>
+            <a:picLocks noChangeAspect="1"/>
+          </p:cNvPicPr>
+          <p:nvPr/>
+        </p:nvPicPr>
+        <p:blipFill>
+          <a:blip r:embed="rId3"/>
+          <a:stretch>
+            <a:fillRect/>
+          </a:stretch>
+        </p:blipFill>
+        <p:spPr>
+          <a:xfrm>
+            <a:off x="914400" y="3611880"/>
+            <a:ext cx="274320" cy="274320"/>
+          </a:xfrm>
+          <a:prstGeom prst="rect">
+            <a:avLst/>
+          </a:prstGeom>
+        </p:spPr>
+      </p:pic>
+      <p:sp>
+        <p:nvSpPr>
+          <p:cNvPr id="9" name="Text 4"/>
+          <p:cNvSpPr/>
+          <p:nvPr/>
+        </p:nvSpPr>
+        <p:spPr>
+          <a:xfrm>
+            <a:off x="1371600" y="3566160"/>
+            <a:ext cx="5486400" cy="365760"/>
+          </a:xfrm>
+          <a:prstGeom prst="rect">
+            <a:avLst/>
+          </a:prstGeom>
+          <a:noFill/>
+          <a:ln/>
+        </p:spPr>
+        <p:txBody>
+          <a:bodyPr wrap="square" lIns="0" tIns="0" rIns="0" bIns="0" rtlCol="0" anchor="ctr"/>
+          <a:lstStyle/>
+          <a:p>
+            <a:pPr indent="0" marL="0">
+              <a:buNone/>
+            </a:pPr>
+            <a:r>
+              <a:rPr lang="en-US" sz="1300" dirty="0">
+                <a:solidFill>
+                  <a:srgbClr val="FFFFFF"/>
+                </a:solidFill>
+                <a:latin typeface="Inter" pitchFamily="34" charset="0"/>
+                <a:ea typeface="Inter" pitchFamily="34" charset="-122"/>
+                <a:cs typeface="Inter" pitchFamily="34" charset="-120"/>
+              </a:rPr>
+              <a:t>AI Concierge phone line activates — no more missed calls</a:t>
+            </a:r>
+            <a:endParaRPr lang="en-US" sz="1300" dirty="0"/>
+          </a:p>
+        </p:txBody>
+      </p:sp>
+      <p:sp>
+        <p:nvSpPr>
+          <p:cNvPr id="10" name="Shape 5"/>
+          <p:cNvSpPr/>
+          <p:nvPr/>
+        </p:nvSpPr>
+        <p:spPr>
+          <a:xfrm>
+            <a:off x="731520" y="4114800"/>
+            <a:ext cx="3291840" cy="594360"/>
           </a:xfrm>
           <a:prstGeom prst="rect">
             <a:avLst/>
           </a:prstGeom>
           <a:solidFill>
-            <a:srgbClr val="00C9A7"/>
+            <a:srgbClr val="22C55E"/>
           </a:solidFill>
           <a:ln/>
           <a:effectLst>
@@ -6631,14 +7426,14 @@
       </p:sp>
       <p:sp>
         <p:nvSpPr>
-          <p:cNvPr id="5" name="Text 3"/>
-          <p:cNvSpPr/>
-          <p:nvPr/>
-        </p:nvSpPr>
-        <p:spPr>
-          <a:xfrm>
-            <a:off x="731520" y="3383280"/>
-            <a:ext cx="2926080" cy="548640"/>
+          <p:cNvPr id="11" name="Text 6"/>
+          <p:cNvSpPr/>
+          <p:nvPr/>
+        </p:nvSpPr>
+        <p:spPr>
+          <a:xfrm>
+            <a:off x="731520" y="4114800"/>
+            <a:ext cx="3291840" cy="594360"/>
           </a:xfrm>
           <a:prstGeom prst="rect">
             <a:avLst/>
@@ -6654,85 +7449,29 @@
               <a:buNone/>
             </a:pPr>
             <a:r>
-              <a:rPr lang="en-US" sz="1300" b="1" dirty="0">
-                <a:solidFill>
-                  <a:srgbClr val="0A1628"/>
-                </a:solidFill>
-                <a:latin typeface="Trebuchet MS" pitchFamily="34" charset="0"/>
-                <a:ea typeface="Trebuchet MS" pitchFamily="34" charset="-122"/>
-                <a:cs typeface="Trebuchet MS" pitchFamily="34" charset="-120"/>
-              </a:rPr>
-              <a:t>BOOK A DISCOVERY CALL</a:t>
-            </a:r>
-            <a:endParaRPr lang="en-US" sz="1300" dirty="0"/>
-          </a:p>
-        </p:txBody>
-      </p:sp>
-      <p:sp>
-        <p:nvSpPr>
-          <p:cNvPr id="6" name="Text 4"/>
-          <p:cNvSpPr/>
-          <p:nvPr/>
-        </p:nvSpPr>
-        <p:spPr>
-          <a:xfrm>
-            <a:off x="731520" y="3977640"/>
-            <a:ext cx="4572000" cy="502920"/>
-          </a:xfrm>
-          <a:prstGeom prst="rect">
-            <a:avLst/>
-          </a:prstGeom>
-          <a:noFill/>
-          <a:ln/>
-        </p:spPr>
-        <p:txBody>
-          <a:bodyPr wrap="square" lIns="0" tIns="0" rIns="0" bIns="0" rtlCol="0" anchor="ctr"/>
-          <a:lstStyle/>
-          <a:p>
-            <a:pPr indent="0" marL="0">
-              <a:buNone/>
-            </a:pPr>
-            <a:r>
-              <a:rPr lang="en-US" sz="1300" b="1" dirty="0">
+              <a:rPr lang="en-US" sz="1400" b="1" dirty="0">
                 <a:solidFill>
                   <a:srgbClr val="FFFFFF"/>
                 </a:solidFill>
-                <a:latin typeface="Calibri" pitchFamily="34" charset="0"/>
-                <a:ea typeface="Calibri" pitchFamily="34" charset="-122"/>
-                <a:cs typeface="Calibri" pitchFamily="34" charset="-120"/>
-              </a:rPr>
-              <a:t>axveer.com</a:t>
-            </a:r>
-            <a:endParaRPr lang="en-US" sz="1300" dirty="0"/>
-          </a:p>
-          <a:p>
-            <a:pPr indent="0" marL="0">
-              <a:buNone/>
-            </a:pPr>
-            <a:r>
-              <a:rPr lang="en-US" sz="1200" dirty="0">
-                <a:solidFill>
-                  <a:srgbClr val="8896AB"/>
-                </a:solidFill>
-                <a:latin typeface="Calibri" pitchFamily="34" charset="0"/>
-                <a:ea typeface="Calibri" pitchFamily="34" charset="-122"/>
-                <a:cs typeface="Calibri" pitchFamily="34" charset="-120"/>
-              </a:rPr>
-              <a:t>babin@axveer.com</a:t>
-            </a:r>
-            <a:endParaRPr lang="en-US" sz="1300" dirty="0"/>
-          </a:p>
-        </p:txBody>
-      </p:sp>
-      <p:sp>
-        <p:nvSpPr>
-          <p:cNvPr id="7" name="Text 5"/>
-          <p:cNvSpPr/>
-          <p:nvPr/>
-        </p:nvSpPr>
-        <p:spPr>
-          <a:xfrm>
-            <a:off x="731520" y="4572000"/>
+                <a:latin typeface="Inter" pitchFamily="34" charset="0"/>
+                <a:ea typeface="Inter" pitchFamily="34" charset="-122"/>
+                <a:cs typeface="Inter" pitchFamily="34" charset="-120"/>
+              </a:rPr>
+              <a:t>LET'S GET STARTED TODAY</a:t>
+            </a:r>
+            <a:endParaRPr lang="en-US" sz="1400" dirty="0"/>
+          </a:p>
+        </p:txBody>
+      </p:sp>
+      <p:sp>
+        <p:nvSpPr>
+          <p:cNvPr id="12" name="Text 7"/>
+          <p:cNvSpPr/>
+          <p:nvPr/>
+        </p:nvSpPr>
+        <p:spPr>
+          <a:xfrm>
+            <a:off x="731520" y="4754880"/>
             <a:ext cx="4572000" cy="228600"/>
           </a:xfrm>
           <a:prstGeom prst="rect">
@@ -6751,13 +7490,13 @@
             <a:r>
               <a:rPr lang="en-US" sz="1000" dirty="0">
                 <a:solidFill>
-                  <a:srgbClr val="8896AB"/>
-                </a:solidFill>
-                <a:latin typeface="Calibri" pitchFamily="34" charset="0"/>
-                <a:ea typeface="Calibri" pitchFamily="34" charset="-122"/>
-                <a:cs typeface="Calibri" pitchFamily="34" charset="-120"/>
-              </a:rPr>
-              <a:t>AXVEER  |  Global Brain Trust</a:t>
+                  <a:srgbClr val="6B7280"/>
+                </a:solidFill>
+                <a:latin typeface="Inter" pitchFamily="34" charset="0"/>
+                <a:ea typeface="Inter" pitchFamily="34" charset="-122"/>
+                <a:cs typeface="Inter" pitchFamily="34" charset="-120"/>
+              </a:rPr>
+              <a:t>AXVEER  |  axveer.com</a:t>
             </a:r>
             <a:endParaRPr lang="en-US" sz="1000" dirty="0"/>
           </a:p>
@@ -6765,20 +7504,20 @@
       </p:sp>
       <p:sp>
         <p:nvSpPr>
-          <p:cNvPr id="8" name="Shape 6"/>
-          <p:cNvSpPr/>
-          <p:nvPr/>
-        </p:nvSpPr>
-        <p:spPr>
-          <a:xfrm>
-            <a:off x="0" y="4937760"/>
+          <p:cNvPr id="13" name="Shape 8"/>
+          <p:cNvSpPr/>
+          <p:nvPr/>
+        </p:nvSpPr>
+        <p:spPr>
+          <a:xfrm>
+            <a:off x="0" y="5029200"/>
             <a:ext cx="9144000" cy="73152"/>
           </a:xfrm>
           <a:prstGeom prst="rect">
             <a:avLst/>
           </a:prstGeom>
           <a:solidFill>
-            <a:srgbClr val="00C9A7"/>
+            <a:srgbClr val="22C55E"/>
           </a:solidFill>
           <a:ln/>
         </p:spPr>

--- a/Axveer-Moving-Automation.pptx
+++ b/Axveer-Moving-Automation.pptx
@@ -4458,45 +4458,6 @@
           </a:p>
         </p:txBody>
       </p:sp>
-      <p:sp>
-        <p:nvSpPr>
-          <p:cNvPr id="22" name="Text 20"/>
-          <p:cNvSpPr/>
-          <p:nvPr/>
-        </p:nvSpPr>
-        <p:spPr>
-          <a:xfrm>
-            <a:off x="731520" y="4526280"/>
-            <a:ext cx="7772400" cy="320040"/>
-          </a:xfrm>
-          <a:prstGeom prst="rect">
-            <a:avLst/>
-          </a:prstGeom>
-          <a:noFill/>
-          <a:ln/>
-        </p:spPr>
-        <p:txBody>
-          <a:bodyPr wrap="square" lIns="0" tIns="0" rIns="0" bIns="0" rtlCol="0" anchor="ctr"/>
-          <a:lstStyle/>
-          <a:p>
-            <a:pPr indent="0" marL="0">
-              <a:buNone/>
-            </a:pPr>
-            <a:r>
-              <a:rPr lang="en-US" sz="1000" i="1" dirty="0">
-                <a:solidFill>
-                  <a:srgbClr val="6B7280"/>
-                </a:solidFill>
-                <a:latin typeface="Inter" pitchFamily="34" charset="0"/>
-                <a:ea typeface="Inter" pitchFamily="34" charset="-122"/>
-                <a:cs typeface="Inter" pitchFamily="34" charset="-120"/>
-              </a:rPr>
-              <a:t>Add-ons: marketing platform, Google Calendar sync, WhatsApp management, SEO</a:t>
-            </a:r>
-            <a:endParaRPr lang="en-US" sz="1000" dirty="0"/>
-          </a:p>
-        </p:txBody>
-      </p:sp>
     </p:spTree>
   </p:cSld>
   <p:clrMapOvr>
